--- a/BUS AN_500/BUS AN500Class01_2026.pptx
+++ b/BUS AN_500/BUS AN500Class01_2026.pptx
@@ -21,24 +21,24 @@
     <p:sldId id="885" r:id="rId12"/>
     <p:sldId id="887" r:id="rId13"/>
     <p:sldId id="888" r:id="rId14"/>
-    <p:sldId id="417" r:id="rId15"/>
-    <p:sldId id="889" r:id="rId16"/>
-    <p:sldId id="900" r:id="rId17"/>
-    <p:sldId id="901" r:id="rId18"/>
-    <p:sldId id="890" r:id="rId19"/>
-    <p:sldId id="891" r:id="rId20"/>
-    <p:sldId id="897" r:id="rId21"/>
-    <p:sldId id="899" r:id="rId22"/>
-    <p:sldId id="893" r:id="rId23"/>
-    <p:sldId id="892" r:id="rId24"/>
-    <p:sldId id="896" r:id="rId25"/>
-    <p:sldId id="902" r:id="rId26"/>
-    <p:sldId id="903" r:id="rId27"/>
-    <p:sldId id="418" r:id="rId28"/>
-    <p:sldId id="904" r:id="rId29"/>
-    <p:sldId id="905" r:id="rId30"/>
-    <p:sldId id="895" r:id="rId31"/>
-    <p:sldId id="906" r:id="rId32"/>
+    <p:sldId id="418" r:id="rId15"/>
+    <p:sldId id="904" r:id="rId16"/>
+    <p:sldId id="905" r:id="rId17"/>
+    <p:sldId id="895" r:id="rId18"/>
+    <p:sldId id="906" r:id="rId19"/>
+    <p:sldId id="417" r:id="rId20"/>
+    <p:sldId id="889" r:id="rId21"/>
+    <p:sldId id="900" r:id="rId22"/>
+    <p:sldId id="901" r:id="rId23"/>
+    <p:sldId id="890" r:id="rId24"/>
+    <p:sldId id="891" r:id="rId25"/>
+    <p:sldId id="897" r:id="rId26"/>
+    <p:sldId id="893" r:id="rId27"/>
+    <p:sldId id="892" r:id="rId28"/>
+    <p:sldId id="896" r:id="rId29"/>
+    <p:sldId id="902" r:id="rId30"/>
+    <p:sldId id="903" r:id="rId31"/>
+    <p:sldId id="899" r:id="rId32"/>
     <p:sldId id="894" r:id="rId33"/>
     <p:sldId id="415" r:id="rId34"/>
     <p:sldId id="907" r:id="rId35"/>
@@ -208,6 +208,11 @@
             <p14:sldId id="885"/>
             <p14:sldId id="887"/>
             <p14:sldId id="888"/>
+            <p14:sldId id="418"/>
+            <p14:sldId id="904"/>
+            <p14:sldId id="905"/>
+            <p14:sldId id="895"/>
+            <p14:sldId id="906"/>
             <p14:sldId id="417"/>
             <p14:sldId id="889"/>
             <p14:sldId id="900"/>
@@ -215,17 +220,12 @@
             <p14:sldId id="890"/>
             <p14:sldId id="891"/>
             <p14:sldId id="897"/>
-            <p14:sldId id="899"/>
             <p14:sldId id="893"/>
             <p14:sldId id="892"/>
             <p14:sldId id="896"/>
             <p14:sldId id="902"/>
             <p14:sldId id="903"/>
-            <p14:sldId id="418"/>
-            <p14:sldId id="904"/>
-            <p14:sldId id="905"/>
-            <p14:sldId id="895"/>
-            <p14:sldId id="906"/>
+            <p14:sldId id="899"/>
             <p14:sldId id="894"/>
             <p14:sldId id="415"/>
             <p14:sldId id="907"/>
@@ -281,23 +281,31 @@
 </p:presentation>
 </file>
 
+<file path=ppt/revisionInfo.xml><?xml version="1.0" encoding="utf-8"?>
+<p1510:revInfo xmlns:a="http://schemas.openxmlformats.org/drawingml/2006/main" xmlns:r="http://schemas.openxmlformats.org/officeDocument/2006/relationships" xmlns:p1510="http://schemas.microsoft.com/office/powerpoint/2015/10/main">
+  <p1510:revLst>
+    <p1510:client id="{A442A1C4-0200-471B-A7E1-8D03137B58ED}" v="5" dt="2026-04-02T23:45:17.729"/>
+  </p1510:revLst>
+</p1510:revInfo>
+</file>
+
 <file path=ppt/changesInfos/changesInfo1.xml><?xml version="1.0" encoding="utf-8"?>
 <pc:chgInfo xmlns:a="http://schemas.openxmlformats.org/drawingml/2006/main" xmlns:r="http://schemas.openxmlformats.org/officeDocument/2006/relationships" xmlns:ac="http://schemas.microsoft.com/office/drawing/2013/main/command" xmlns:pc="http://schemas.microsoft.com/office/powerpoint/2013/main/command">
   <pc:docChgLst>
     <pc:chgData name="Asher Curtis" userId="494c4f5b-6d11-415a-9d9e-829c1135aa91" providerId="ADAL" clId="{FDEDEEF3-7275-4161-A24C-7071BE30F9A7}"/>
-    <pc:docChg chg="modSld">
-      <pc:chgData name="Asher Curtis" userId="494c4f5b-6d11-415a-9d9e-829c1135aa91" providerId="ADAL" clId="{FDEDEEF3-7275-4161-A24C-7071BE30F9A7}" dt="2026-04-02T21:21:11.936" v="12" actId="2711"/>
+    <pc:docChg chg="addSld delSld modSld sldOrd modSection">
+      <pc:chgData name="Asher Curtis" userId="494c4f5b-6d11-415a-9d9e-829c1135aa91" providerId="ADAL" clId="{FDEDEEF3-7275-4161-A24C-7071BE30F9A7}" dt="2026-04-02T23:45:22.441" v="22" actId="108"/>
       <pc:docMkLst>
         <pc:docMk/>
       </pc:docMkLst>
       <pc:sldChg chg="modSp mod">
-        <pc:chgData name="Asher Curtis" userId="494c4f5b-6d11-415a-9d9e-829c1135aa91" providerId="ADAL" clId="{FDEDEEF3-7275-4161-A24C-7071BE30F9A7}" dt="2026-04-02T21:21:11.936" v="12" actId="2711"/>
+        <pc:chgData name="Asher Curtis" userId="494c4f5b-6d11-415a-9d9e-829c1135aa91" providerId="ADAL" clId="{FDEDEEF3-7275-4161-A24C-7071BE30F9A7}" dt="2026-04-02T23:43:46.929" v="13" actId="20578"/>
         <pc:sldMkLst>
           <pc:docMk/>
           <pc:sldMk cId="3277751441" sldId="398"/>
         </pc:sldMkLst>
         <pc:spChg chg="mod">
-          <ac:chgData name="Asher Curtis" userId="494c4f5b-6d11-415a-9d9e-829c1135aa91" providerId="ADAL" clId="{FDEDEEF3-7275-4161-A24C-7071BE30F9A7}" dt="2026-04-02T21:21:11.936" v="12" actId="2711"/>
+          <ac:chgData name="Asher Curtis" userId="494c4f5b-6d11-415a-9d9e-829c1135aa91" providerId="ADAL" clId="{FDEDEEF3-7275-4161-A24C-7071BE30F9A7}" dt="2026-04-02T23:43:46.929" v="13" actId="20578"/>
           <ac:spMkLst>
             <pc:docMk/>
             <pc:sldMk cId="3277751441" sldId="398"/>
@@ -306,13 +314,13 @@
         </pc:spChg>
       </pc:sldChg>
       <pc:sldChg chg="modSp mod">
-        <pc:chgData name="Asher Curtis" userId="494c4f5b-6d11-415a-9d9e-829c1135aa91" providerId="ADAL" clId="{FDEDEEF3-7275-4161-A24C-7071BE30F9A7}" dt="2026-04-02T21:20:54.612" v="11" actId="2711"/>
+        <pc:chgData name="Asher Curtis" userId="494c4f5b-6d11-415a-9d9e-829c1135aa91" providerId="ADAL" clId="{FDEDEEF3-7275-4161-A24C-7071BE30F9A7}" dt="2026-04-02T23:43:52.876" v="14" actId="20578"/>
         <pc:sldMkLst>
           <pc:docMk/>
           <pc:sldMk cId="884361781" sldId="416"/>
         </pc:sldMkLst>
         <pc:spChg chg="mod">
-          <ac:chgData name="Asher Curtis" userId="494c4f5b-6d11-415a-9d9e-829c1135aa91" providerId="ADAL" clId="{FDEDEEF3-7275-4161-A24C-7071BE30F9A7}" dt="2026-04-02T21:20:54.612" v="11" actId="2711"/>
+          <ac:chgData name="Asher Curtis" userId="494c4f5b-6d11-415a-9d9e-829c1135aa91" providerId="ADAL" clId="{FDEDEEF3-7275-4161-A24C-7071BE30F9A7}" dt="2026-04-02T23:43:52.876" v="14" actId="20578"/>
           <ac:spMkLst>
             <pc:docMk/>
             <pc:sldMk cId="884361781" sldId="416"/>
@@ -320,8 +328,23 @@
           </ac:spMkLst>
         </pc:spChg>
       </pc:sldChg>
-      <pc:sldChg chg="modSp mod">
-        <pc:chgData name="Asher Curtis" userId="494c4f5b-6d11-415a-9d9e-829c1135aa91" providerId="ADAL" clId="{FDEDEEF3-7275-4161-A24C-7071BE30F9A7}" dt="2026-04-02T21:20:16.846" v="8" actId="2711"/>
+      <pc:sldChg chg="modSp add mod">
+        <pc:chgData name="Asher Curtis" userId="494c4f5b-6d11-415a-9d9e-829c1135aa91" providerId="ADAL" clId="{FDEDEEF3-7275-4161-A24C-7071BE30F9A7}" dt="2026-04-02T23:45:22.441" v="22" actId="108"/>
+        <pc:sldMkLst>
+          <pc:docMk/>
+          <pc:sldMk cId="2189794146" sldId="417"/>
+        </pc:sldMkLst>
+        <pc:spChg chg="mod">
+          <ac:chgData name="Asher Curtis" userId="494c4f5b-6d11-415a-9d9e-829c1135aa91" providerId="ADAL" clId="{FDEDEEF3-7275-4161-A24C-7071BE30F9A7}" dt="2026-04-02T23:45:22.441" v="22" actId="108"/>
+          <ac:spMkLst>
+            <pc:docMk/>
+            <pc:sldMk cId="2189794146" sldId="417"/>
+            <ac:spMk id="4" creationId="{39008292-F3D4-B9CE-708B-DC1AF38E8CA5}"/>
+          </ac:spMkLst>
+        </pc:spChg>
+      </pc:sldChg>
+      <pc:sldChg chg="modSp del mod">
+        <pc:chgData name="Asher Curtis" userId="494c4f5b-6d11-415a-9d9e-829c1135aa91" providerId="ADAL" clId="{FDEDEEF3-7275-4161-A24C-7071BE30F9A7}" dt="2026-04-02T23:44:22.472" v="17" actId="2696"/>
         <pc:sldMkLst>
           <pc:docMk/>
           <pc:sldMk cId="3013072866" sldId="417"/>
@@ -332,6 +355,21 @@
             <pc:docMk/>
             <pc:sldMk cId="3013072866" sldId="417"/>
             <ac:spMk id="4" creationId="{39008292-F3D4-B9CE-708B-DC1AF38E8CA5}"/>
+          </ac:spMkLst>
+        </pc:spChg>
+      </pc:sldChg>
+      <pc:sldChg chg="modSp mod">
+        <pc:chgData name="Asher Curtis" userId="494c4f5b-6d11-415a-9d9e-829c1135aa91" providerId="ADAL" clId="{FDEDEEF3-7275-4161-A24C-7071BE30F9A7}" dt="2026-04-02T23:44:44.607" v="20" actId="207"/>
+        <pc:sldMkLst>
+          <pc:docMk/>
+          <pc:sldMk cId="2852297331" sldId="418"/>
+        </pc:sldMkLst>
+        <pc:spChg chg="mod">
+          <ac:chgData name="Asher Curtis" userId="494c4f5b-6d11-415a-9d9e-829c1135aa91" providerId="ADAL" clId="{FDEDEEF3-7275-4161-A24C-7071BE30F9A7}" dt="2026-04-02T23:44:44.607" v="20" actId="207"/>
+          <ac:spMkLst>
+            <pc:docMk/>
+            <pc:sldMk cId="2852297331" sldId="418"/>
+            <ac:spMk id="4" creationId="{76877959-0351-47DF-AC5A-CA71B939A875}"/>
           </ac:spMkLst>
         </pc:spChg>
       </pc:sldChg>
@@ -430,8 +468,15 @@
           </ac:spMkLst>
         </pc:spChg>
       </pc:sldChg>
-      <pc:sldChg chg="modSp mod">
-        <pc:chgData name="Asher Curtis" userId="494c4f5b-6d11-415a-9d9e-829c1135aa91" providerId="ADAL" clId="{FDEDEEF3-7275-4161-A24C-7071BE30F9A7}" dt="2026-04-02T21:18:59.159" v="4" actId="2711"/>
+      <pc:sldChg chg="add">
+        <pc:chgData name="Asher Curtis" userId="494c4f5b-6d11-415a-9d9e-829c1135aa91" providerId="ADAL" clId="{FDEDEEF3-7275-4161-A24C-7071BE30F9A7}" dt="2026-04-02T23:44:29.048" v="18"/>
+        <pc:sldMkLst>
+          <pc:docMk/>
+          <pc:sldMk cId="1601452149" sldId="889"/>
+        </pc:sldMkLst>
+      </pc:sldChg>
+      <pc:sldChg chg="modSp del mod">
+        <pc:chgData name="Asher Curtis" userId="494c4f5b-6d11-415a-9d9e-829c1135aa91" providerId="ADAL" clId="{FDEDEEF3-7275-4161-A24C-7071BE30F9A7}" dt="2026-04-02T23:44:22.472" v="17" actId="2696"/>
         <pc:sldMkLst>
           <pc:docMk/>
           <pc:sldMk cId="2985108975" sldId="889"/>
@@ -444,6 +489,160 @@
             <ac:spMk id="4" creationId="{F60C9AB5-9F56-2649-A5AC-B9A909A891F6}"/>
           </ac:spMkLst>
         </pc:spChg>
+      </pc:sldChg>
+      <pc:sldChg chg="add">
+        <pc:chgData name="Asher Curtis" userId="494c4f5b-6d11-415a-9d9e-829c1135aa91" providerId="ADAL" clId="{FDEDEEF3-7275-4161-A24C-7071BE30F9A7}" dt="2026-04-02T23:44:29.048" v="18"/>
+        <pc:sldMkLst>
+          <pc:docMk/>
+          <pc:sldMk cId="1125645462" sldId="890"/>
+        </pc:sldMkLst>
+      </pc:sldChg>
+      <pc:sldChg chg="del">
+        <pc:chgData name="Asher Curtis" userId="494c4f5b-6d11-415a-9d9e-829c1135aa91" providerId="ADAL" clId="{FDEDEEF3-7275-4161-A24C-7071BE30F9A7}" dt="2026-04-02T23:44:22.472" v="17" actId="2696"/>
+        <pc:sldMkLst>
+          <pc:docMk/>
+          <pc:sldMk cId="4040727172" sldId="890"/>
+        </pc:sldMkLst>
+      </pc:sldChg>
+      <pc:sldChg chg="del">
+        <pc:chgData name="Asher Curtis" userId="494c4f5b-6d11-415a-9d9e-829c1135aa91" providerId="ADAL" clId="{FDEDEEF3-7275-4161-A24C-7071BE30F9A7}" dt="2026-04-02T23:44:22.472" v="17" actId="2696"/>
+        <pc:sldMkLst>
+          <pc:docMk/>
+          <pc:sldMk cId="1603366011" sldId="891"/>
+        </pc:sldMkLst>
+      </pc:sldChg>
+      <pc:sldChg chg="add">
+        <pc:chgData name="Asher Curtis" userId="494c4f5b-6d11-415a-9d9e-829c1135aa91" providerId="ADAL" clId="{FDEDEEF3-7275-4161-A24C-7071BE30F9A7}" dt="2026-04-02T23:44:29.048" v="18"/>
+        <pc:sldMkLst>
+          <pc:docMk/>
+          <pc:sldMk cId="3815325191" sldId="891"/>
+        </pc:sldMkLst>
+      </pc:sldChg>
+      <pc:sldChg chg="del">
+        <pc:chgData name="Asher Curtis" userId="494c4f5b-6d11-415a-9d9e-829c1135aa91" providerId="ADAL" clId="{FDEDEEF3-7275-4161-A24C-7071BE30F9A7}" dt="2026-04-02T23:44:22.472" v="17" actId="2696"/>
+        <pc:sldMkLst>
+          <pc:docMk/>
+          <pc:sldMk cId="867823952" sldId="892"/>
+        </pc:sldMkLst>
+      </pc:sldChg>
+      <pc:sldChg chg="add">
+        <pc:chgData name="Asher Curtis" userId="494c4f5b-6d11-415a-9d9e-829c1135aa91" providerId="ADAL" clId="{FDEDEEF3-7275-4161-A24C-7071BE30F9A7}" dt="2026-04-02T23:44:29.048" v="18"/>
+        <pc:sldMkLst>
+          <pc:docMk/>
+          <pc:sldMk cId="3498084261" sldId="892"/>
+        </pc:sldMkLst>
+      </pc:sldChg>
+      <pc:sldChg chg="add">
+        <pc:chgData name="Asher Curtis" userId="494c4f5b-6d11-415a-9d9e-829c1135aa91" providerId="ADAL" clId="{FDEDEEF3-7275-4161-A24C-7071BE30F9A7}" dt="2026-04-02T23:44:29.048" v="18"/>
+        <pc:sldMkLst>
+          <pc:docMk/>
+          <pc:sldMk cId="781574969" sldId="893"/>
+        </pc:sldMkLst>
+      </pc:sldChg>
+      <pc:sldChg chg="del">
+        <pc:chgData name="Asher Curtis" userId="494c4f5b-6d11-415a-9d9e-829c1135aa91" providerId="ADAL" clId="{FDEDEEF3-7275-4161-A24C-7071BE30F9A7}" dt="2026-04-02T23:44:22.472" v="17" actId="2696"/>
+        <pc:sldMkLst>
+          <pc:docMk/>
+          <pc:sldMk cId="1980054654" sldId="893"/>
+        </pc:sldMkLst>
+      </pc:sldChg>
+      <pc:sldChg chg="add">
+        <pc:chgData name="Asher Curtis" userId="494c4f5b-6d11-415a-9d9e-829c1135aa91" providerId="ADAL" clId="{FDEDEEF3-7275-4161-A24C-7071BE30F9A7}" dt="2026-04-02T23:44:29.048" v="18"/>
+        <pc:sldMkLst>
+          <pc:docMk/>
+          <pc:sldMk cId="251210638" sldId="896"/>
+        </pc:sldMkLst>
+      </pc:sldChg>
+      <pc:sldChg chg="del">
+        <pc:chgData name="Asher Curtis" userId="494c4f5b-6d11-415a-9d9e-829c1135aa91" providerId="ADAL" clId="{FDEDEEF3-7275-4161-A24C-7071BE30F9A7}" dt="2026-04-02T23:44:22.472" v="17" actId="2696"/>
+        <pc:sldMkLst>
+          <pc:docMk/>
+          <pc:sldMk cId="3188428957" sldId="896"/>
+        </pc:sldMkLst>
+      </pc:sldChg>
+      <pc:sldChg chg="del">
+        <pc:chgData name="Asher Curtis" userId="494c4f5b-6d11-415a-9d9e-829c1135aa91" providerId="ADAL" clId="{FDEDEEF3-7275-4161-A24C-7071BE30F9A7}" dt="2026-04-02T23:44:22.472" v="17" actId="2696"/>
+        <pc:sldMkLst>
+          <pc:docMk/>
+          <pc:sldMk cId="1139421399" sldId="897"/>
+        </pc:sldMkLst>
+      </pc:sldChg>
+      <pc:sldChg chg="add">
+        <pc:chgData name="Asher Curtis" userId="494c4f5b-6d11-415a-9d9e-829c1135aa91" providerId="ADAL" clId="{FDEDEEF3-7275-4161-A24C-7071BE30F9A7}" dt="2026-04-02T23:44:29.048" v="18"/>
+        <pc:sldMkLst>
+          <pc:docMk/>
+          <pc:sldMk cId="3208249095" sldId="897"/>
+        </pc:sldMkLst>
+      </pc:sldChg>
+      <pc:sldChg chg="del ord">
+        <pc:chgData name="Asher Curtis" userId="494c4f5b-6d11-415a-9d9e-829c1135aa91" providerId="ADAL" clId="{FDEDEEF3-7275-4161-A24C-7071BE30F9A7}" dt="2026-04-02T23:44:22.472" v="17" actId="2696"/>
+        <pc:sldMkLst>
+          <pc:docMk/>
+          <pc:sldMk cId="850055485" sldId="899"/>
+        </pc:sldMkLst>
+      </pc:sldChg>
+      <pc:sldChg chg="add">
+        <pc:chgData name="Asher Curtis" userId="494c4f5b-6d11-415a-9d9e-829c1135aa91" providerId="ADAL" clId="{FDEDEEF3-7275-4161-A24C-7071BE30F9A7}" dt="2026-04-02T23:44:29.048" v="18"/>
+        <pc:sldMkLst>
+          <pc:docMk/>
+          <pc:sldMk cId="1157585926" sldId="899"/>
+        </pc:sldMkLst>
+      </pc:sldChg>
+      <pc:sldChg chg="del">
+        <pc:chgData name="Asher Curtis" userId="494c4f5b-6d11-415a-9d9e-829c1135aa91" providerId="ADAL" clId="{FDEDEEF3-7275-4161-A24C-7071BE30F9A7}" dt="2026-04-02T23:44:22.472" v="17" actId="2696"/>
+        <pc:sldMkLst>
+          <pc:docMk/>
+          <pc:sldMk cId="734014933" sldId="900"/>
+        </pc:sldMkLst>
+      </pc:sldChg>
+      <pc:sldChg chg="add">
+        <pc:chgData name="Asher Curtis" userId="494c4f5b-6d11-415a-9d9e-829c1135aa91" providerId="ADAL" clId="{FDEDEEF3-7275-4161-A24C-7071BE30F9A7}" dt="2026-04-02T23:44:29.048" v="18"/>
+        <pc:sldMkLst>
+          <pc:docMk/>
+          <pc:sldMk cId="3092253010" sldId="900"/>
+        </pc:sldMkLst>
+      </pc:sldChg>
+      <pc:sldChg chg="add">
+        <pc:chgData name="Asher Curtis" userId="494c4f5b-6d11-415a-9d9e-829c1135aa91" providerId="ADAL" clId="{FDEDEEF3-7275-4161-A24C-7071BE30F9A7}" dt="2026-04-02T23:44:29.048" v="18"/>
+        <pc:sldMkLst>
+          <pc:docMk/>
+          <pc:sldMk cId="207688830" sldId="901"/>
+        </pc:sldMkLst>
+      </pc:sldChg>
+      <pc:sldChg chg="del">
+        <pc:chgData name="Asher Curtis" userId="494c4f5b-6d11-415a-9d9e-829c1135aa91" providerId="ADAL" clId="{FDEDEEF3-7275-4161-A24C-7071BE30F9A7}" dt="2026-04-02T23:44:22.472" v="17" actId="2696"/>
+        <pc:sldMkLst>
+          <pc:docMk/>
+          <pc:sldMk cId="1717167708" sldId="901"/>
+        </pc:sldMkLst>
+      </pc:sldChg>
+      <pc:sldChg chg="add">
+        <pc:chgData name="Asher Curtis" userId="494c4f5b-6d11-415a-9d9e-829c1135aa91" providerId="ADAL" clId="{FDEDEEF3-7275-4161-A24C-7071BE30F9A7}" dt="2026-04-02T23:44:29.048" v="18"/>
+        <pc:sldMkLst>
+          <pc:docMk/>
+          <pc:sldMk cId="1728750101" sldId="902"/>
+        </pc:sldMkLst>
+      </pc:sldChg>
+      <pc:sldChg chg="del">
+        <pc:chgData name="Asher Curtis" userId="494c4f5b-6d11-415a-9d9e-829c1135aa91" providerId="ADAL" clId="{FDEDEEF3-7275-4161-A24C-7071BE30F9A7}" dt="2026-04-02T23:44:22.472" v="17" actId="2696"/>
+        <pc:sldMkLst>
+          <pc:docMk/>
+          <pc:sldMk cId="3701789503" sldId="902"/>
+        </pc:sldMkLst>
+      </pc:sldChg>
+      <pc:sldChg chg="add">
+        <pc:chgData name="Asher Curtis" userId="494c4f5b-6d11-415a-9d9e-829c1135aa91" providerId="ADAL" clId="{FDEDEEF3-7275-4161-A24C-7071BE30F9A7}" dt="2026-04-02T23:44:29.048" v="18"/>
+        <pc:sldMkLst>
+          <pc:docMk/>
+          <pc:sldMk cId="1420062400" sldId="903"/>
+        </pc:sldMkLst>
+      </pc:sldChg>
+      <pc:sldChg chg="del">
+        <pc:chgData name="Asher Curtis" userId="494c4f5b-6d11-415a-9d9e-829c1135aa91" providerId="ADAL" clId="{FDEDEEF3-7275-4161-A24C-7071BE30F9A7}" dt="2026-04-02T23:44:22.472" v="17" actId="2696"/>
+        <pc:sldMkLst>
+          <pc:docMk/>
+          <pc:sldMk cId="2647879583" sldId="903"/>
+        </pc:sldMkLst>
       </pc:sldChg>
       <pc:sldChg chg="modSp mod">
         <pc:chgData name="Asher Curtis" userId="494c4f5b-6d11-415a-9d9e-829c1135aa91" providerId="ADAL" clId="{FDEDEEF3-7275-4161-A24C-7071BE30F9A7}" dt="2026-04-02T21:19:51.017" v="7" actId="20577"/>
@@ -1408,7 +1607,7 @@
     </p:spTree>
     <p:extLst>
       <p:ext uri="{BB962C8B-B14F-4D97-AF65-F5344CB8AC3E}">
-        <p14:creationId xmlns:p14="http://schemas.microsoft.com/office/powerpoint/2010/main" val="1297058143"/>
+        <p14:creationId xmlns:p14="http://schemas.microsoft.com/office/powerpoint/2010/main" val="2391893762"/>
       </p:ext>
     </p:extLst>
   </p:cSld>
@@ -1498,7 +1697,7 @@
     </p:spTree>
     <p:extLst>
       <p:ext uri="{BB962C8B-B14F-4D97-AF65-F5344CB8AC3E}">
-        <p14:creationId xmlns:p14="http://schemas.microsoft.com/office/powerpoint/2010/main" val="1873881792"/>
+        <p14:creationId xmlns:p14="http://schemas.microsoft.com/office/powerpoint/2010/main" val="3545686944"/>
       </p:ext>
     </p:extLst>
   </p:cSld>
@@ -1588,7 +1787,7 @@
     </p:spTree>
     <p:extLst>
       <p:ext uri="{BB962C8B-B14F-4D97-AF65-F5344CB8AC3E}">
-        <p14:creationId xmlns:p14="http://schemas.microsoft.com/office/powerpoint/2010/main" val="1858439097"/>
+        <p14:creationId xmlns:p14="http://schemas.microsoft.com/office/powerpoint/2010/main" val="2661510306"/>
       </p:ext>
     </p:extLst>
   </p:cSld>
@@ -1678,7 +1877,7 @@
     </p:spTree>
     <p:extLst>
       <p:ext uri="{BB962C8B-B14F-4D97-AF65-F5344CB8AC3E}">
-        <p14:creationId xmlns:p14="http://schemas.microsoft.com/office/powerpoint/2010/main" val="2577383125"/>
+        <p14:creationId xmlns:p14="http://schemas.microsoft.com/office/powerpoint/2010/main" val="3045750390"/>
       </p:ext>
     </p:extLst>
   </p:cSld>
@@ -1768,7 +1967,7 @@
     </p:spTree>
     <p:extLst>
       <p:ext uri="{BB962C8B-B14F-4D97-AF65-F5344CB8AC3E}">
-        <p14:creationId xmlns:p14="http://schemas.microsoft.com/office/powerpoint/2010/main" val="387430227"/>
+        <p14:creationId xmlns:p14="http://schemas.microsoft.com/office/powerpoint/2010/main" val="3468696944"/>
       </p:ext>
     </p:extLst>
   </p:cSld>
@@ -1858,7 +2057,7 @@
     </p:spTree>
     <p:extLst>
       <p:ext uri="{BB962C8B-B14F-4D97-AF65-F5344CB8AC3E}">
-        <p14:creationId xmlns:p14="http://schemas.microsoft.com/office/powerpoint/2010/main" val="2966585518"/>
+        <p14:creationId xmlns:p14="http://schemas.microsoft.com/office/powerpoint/2010/main" val="1185967043"/>
       </p:ext>
     </p:extLst>
   </p:cSld>
@@ -1948,7 +2147,7 @@
     </p:spTree>
     <p:extLst>
       <p:ext uri="{BB962C8B-B14F-4D97-AF65-F5344CB8AC3E}">
-        <p14:creationId xmlns:p14="http://schemas.microsoft.com/office/powerpoint/2010/main" val="918569495"/>
+        <p14:creationId xmlns:p14="http://schemas.microsoft.com/office/powerpoint/2010/main" val="2903873064"/>
       </p:ext>
     </p:extLst>
   </p:cSld>
@@ -2038,7 +2237,7 @@
     </p:spTree>
     <p:extLst>
       <p:ext uri="{BB962C8B-B14F-4D97-AF65-F5344CB8AC3E}">
-        <p14:creationId xmlns:p14="http://schemas.microsoft.com/office/powerpoint/2010/main" val="1381534003"/>
+        <p14:creationId xmlns:p14="http://schemas.microsoft.com/office/powerpoint/2010/main" val="1763359046"/>
       </p:ext>
     </p:extLst>
   </p:cSld>
@@ -2128,7 +2327,7 @@
     </p:spTree>
     <p:extLst>
       <p:ext uri="{BB962C8B-B14F-4D97-AF65-F5344CB8AC3E}">
-        <p14:creationId xmlns:p14="http://schemas.microsoft.com/office/powerpoint/2010/main" val="1405706955"/>
+        <p14:creationId xmlns:p14="http://schemas.microsoft.com/office/powerpoint/2010/main" val="1733492578"/>
       </p:ext>
     </p:extLst>
   </p:cSld>
@@ -2308,7 +2507,7 @@
     </p:spTree>
     <p:extLst>
       <p:ext uri="{BB962C8B-B14F-4D97-AF65-F5344CB8AC3E}">
-        <p14:creationId xmlns:p14="http://schemas.microsoft.com/office/powerpoint/2010/main" val="4000621183"/>
+        <p14:creationId xmlns:p14="http://schemas.microsoft.com/office/powerpoint/2010/main" val="4231557975"/>
       </p:ext>
     </p:extLst>
   </p:cSld>
@@ -2398,7 +2597,7 @@
     </p:spTree>
     <p:extLst>
       <p:ext uri="{BB962C8B-B14F-4D97-AF65-F5344CB8AC3E}">
-        <p14:creationId xmlns:p14="http://schemas.microsoft.com/office/powerpoint/2010/main" val="3549428771"/>
+        <p14:creationId xmlns:p14="http://schemas.microsoft.com/office/powerpoint/2010/main" val="3310921877"/>
       </p:ext>
     </p:extLst>
   </p:cSld>
@@ -2488,7 +2687,7 @@
     </p:spTree>
     <p:extLst>
       <p:ext uri="{BB962C8B-B14F-4D97-AF65-F5344CB8AC3E}">
-        <p14:creationId xmlns:p14="http://schemas.microsoft.com/office/powerpoint/2010/main" val="575904078"/>
+        <p14:creationId xmlns:p14="http://schemas.microsoft.com/office/powerpoint/2010/main" val="4252060737"/>
       </p:ext>
     </p:extLst>
   </p:cSld>
@@ -2578,7 +2777,7 @@
     </p:spTree>
     <p:extLst>
       <p:ext uri="{BB962C8B-B14F-4D97-AF65-F5344CB8AC3E}">
-        <p14:creationId xmlns:p14="http://schemas.microsoft.com/office/powerpoint/2010/main" val="3535884851"/>
+        <p14:creationId xmlns:p14="http://schemas.microsoft.com/office/powerpoint/2010/main" val="1727030588"/>
       </p:ext>
     </p:extLst>
   </p:cSld>
@@ -2668,7 +2867,7 @@
     </p:spTree>
     <p:extLst>
       <p:ext uri="{BB962C8B-B14F-4D97-AF65-F5344CB8AC3E}">
-        <p14:creationId xmlns:p14="http://schemas.microsoft.com/office/powerpoint/2010/main" val="2391893762"/>
+        <p14:creationId xmlns:p14="http://schemas.microsoft.com/office/powerpoint/2010/main" val="3797040034"/>
       </p:ext>
     </p:extLst>
   </p:cSld>
@@ -2758,7 +2957,7 @@
     </p:spTree>
     <p:extLst>
       <p:ext uri="{BB962C8B-B14F-4D97-AF65-F5344CB8AC3E}">
-        <p14:creationId xmlns:p14="http://schemas.microsoft.com/office/powerpoint/2010/main" val="3545686944"/>
+        <p14:creationId xmlns:p14="http://schemas.microsoft.com/office/powerpoint/2010/main" val="1297807781"/>
       </p:ext>
     </p:extLst>
   </p:cSld>
@@ -2848,7 +3047,7 @@
     </p:spTree>
     <p:extLst>
       <p:ext uri="{BB962C8B-B14F-4D97-AF65-F5344CB8AC3E}">
-        <p14:creationId xmlns:p14="http://schemas.microsoft.com/office/powerpoint/2010/main" val="2661510306"/>
+        <p14:creationId xmlns:p14="http://schemas.microsoft.com/office/powerpoint/2010/main" val="3393295295"/>
       </p:ext>
     </p:extLst>
   </p:cSld>
@@ -2938,7 +3137,7 @@
     </p:spTree>
     <p:extLst>
       <p:ext uri="{BB962C8B-B14F-4D97-AF65-F5344CB8AC3E}">
-        <p14:creationId xmlns:p14="http://schemas.microsoft.com/office/powerpoint/2010/main" val="3045750390"/>
+        <p14:creationId xmlns:p14="http://schemas.microsoft.com/office/powerpoint/2010/main" val="930623129"/>
       </p:ext>
     </p:extLst>
   </p:cSld>
@@ -3028,7 +3227,7 @@
     </p:spTree>
     <p:extLst>
       <p:ext uri="{BB962C8B-B14F-4D97-AF65-F5344CB8AC3E}">
-        <p14:creationId xmlns:p14="http://schemas.microsoft.com/office/powerpoint/2010/main" val="3468696944"/>
+        <p14:creationId xmlns:p14="http://schemas.microsoft.com/office/powerpoint/2010/main" val="3329529688"/>
       </p:ext>
     </p:extLst>
   </p:cSld>
@@ -7989,6 +8188,773 @@
         <p:cNvPr id="1" name="">
           <a:extLst>
             <a:ext uri="{FF2B5EF4-FFF2-40B4-BE49-F238E27FC236}">
+              <a16:creationId xmlns:a16="http://schemas.microsoft.com/office/drawing/2014/main" id="{137B1BB0-B423-8864-C408-9491B376DEC6}"/>
+            </a:ext>
+          </a:extLst>
+        </p:cNvPr>
+        <p:cNvGrpSpPr/>
+        <p:nvPr/>
+      </p:nvGrpSpPr>
+      <p:grpSpPr>
+        <a:xfrm>
+          <a:off x="0" y="0"/>
+          <a:ext cx="0" cy="0"/>
+          <a:chOff x="0" y="0"/>
+          <a:chExt cx="0" cy="0"/>
+        </a:xfrm>
+      </p:grpSpPr>
+      <p:pic>
+        <p:nvPicPr>
+          <p:cNvPr id="6" name="Picture Placeholder 5">
+            <a:extLst>
+              <a:ext uri="{FF2B5EF4-FFF2-40B4-BE49-F238E27FC236}">
+                <a16:creationId xmlns:a16="http://schemas.microsoft.com/office/drawing/2014/main" id="{D08F1A33-1B43-F3E1-8C35-7B10F6422CE0}"/>
+              </a:ext>
+            </a:extLst>
+          </p:cNvPr>
+          <p:cNvPicPr>
+            <a:picLocks noGrp="1" noChangeAspect="1"/>
+          </p:cNvPicPr>
+          <p:nvPr>
+            <p:ph type="pic" sz="quarter" idx="12"/>
+          </p:nvPr>
+        </p:nvPicPr>
+        <p:blipFill>
+          <a:blip r:embed="rId3"/>
+          <a:srcRect l="26893" r="26893"/>
+          <a:stretch/>
+        </p:blipFill>
+        <p:spPr>
+          <a:prstGeom prst="rect">
+            <a:avLst/>
+          </a:prstGeom>
+          <a:noFill/>
+        </p:spPr>
+      </p:pic>
+      <p:sp>
+        <p:nvSpPr>
+          <p:cNvPr id="3" name="Title 2">
+            <a:extLst>
+              <a:ext uri="{FF2B5EF4-FFF2-40B4-BE49-F238E27FC236}">
+                <a16:creationId xmlns:a16="http://schemas.microsoft.com/office/drawing/2014/main" id="{C2A05060-E2AC-9269-44AF-BC222BA4E065}"/>
+              </a:ext>
+            </a:extLst>
+          </p:cNvPr>
+          <p:cNvSpPr>
+            <a:spLocks noGrp="1"/>
+          </p:cNvSpPr>
+          <p:nvPr>
+            <p:ph type="title"/>
+          </p:nvPr>
+        </p:nvSpPr>
+        <p:spPr/>
+        <p:txBody>
+          <a:bodyPr/>
+          <a:lstStyle/>
+          <a:p>
+            <a:r>
+              <a:rPr lang="en-US" dirty="0"/>
+              <a:t>What will we do today?</a:t>
+            </a:r>
+          </a:p>
+        </p:txBody>
+      </p:sp>
+      <p:sp>
+        <p:nvSpPr>
+          <p:cNvPr id="4" name="Text Placeholder 3">
+            <a:extLst>
+              <a:ext uri="{FF2B5EF4-FFF2-40B4-BE49-F238E27FC236}">
+                <a16:creationId xmlns:a16="http://schemas.microsoft.com/office/drawing/2014/main" id="{76877959-0351-47DF-AC5A-CA71B939A875}"/>
+              </a:ext>
+            </a:extLst>
+          </p:cNvPr>
+          <p:cNvSpPr>
+            <a:spLocks noGrp="1"/>
+          </p:cNvSpPr>
+          <p:nvPr>
+            <p:ph type="body" sz="quarter" idx="13"/>
+          </p:nvPr>
+        </p:nvSpPr>
+        <p:spPr>
+          <a:xfrm>
+            <a:off x="470430" y="1085336"/>
+            <a:ext cx="4872038" cy="3003406"/>
+          </a:xfrm>
+        </p:spPr>
+        <p:txBody>
+          <a:bodyPr/>
+          <a:lstStyle/>
+          <a:p>
+            <a:pPr marL="285750" indent="-285750">
+              <a:buFont typeface="Arial" panose="020B0604020202020204" pitchFamily="34" charset="0"/>
+              <a:buChar char="•"/>
+            </a:pPr>
+            <a:r>
+              <a:rPr lang="en-US" dirty="0">
+                <a:solidFill>
+                  <a:schemeClr val="tx1">
+                    <a:lumMod val="50000"/>
+                    <a:lumOff val="50000"/>
+                  </a:schemeClr>
+                </a:solidFill>
+              </a:rPr>
+              <a:t>Course Overview</a:t>
+            </a:r>
+          </a:p>
+          <a:p>
+            <a:pPr marL="285750" indent="-285750">
+              <a:buFont typeface="Arial" panose="020B0604020202020204" pitchFamily="34" charset="0"/>
+              <a:buChar char="•"/>
+            </a:pPr>
+            <a:r>
+              <a:rPr lang="en-US" b="1" dirty="0">
+                <a:solidFill>
+                  <a:srgbClr val="361F6D"/>
+                </a:solidFill>
+              </a:rPr>
+              <a:t>Introduction to Accounting &amp; Finance Analytics</a:t>
+            </a:r>
+          </a:p>
+          <a:p>
+            <a:pPr marL="801688" lvl="1" indent="-285750"/>
+            <a:r>
+              <a:rPr lang="en-US" dirty="0">
+                <a:solidFill>
+                  <a:schemeClr val="tx1">
+                    <a:lumMod val="50000"/>
+                    <a:lumOff val="50000"/>
+                  </a:schemeClr>
+                </a:solidFill>
+              </a:rPr>
+              <a:t>Define the scope of the Accounting &amp; Finance Function</a:t>
+            </a:r>
+          </a:p>
+          <a:p>
+            <a:pPr marL="801688" lvl="1" indent="-285750"/>
+            <a:r>
+              <a:rPr lang="en-US" b="1" dirty="0">
+                <a:solidFill>
+                  <a:srgbClr val="361F6D"/>
+                </a:solidFill>
+              </a:rPr>
+              <a:t>Analyze Transaction Level Data</a:t>
+            </a:r>
+          </a:p>
+          <a:p>
+            <a:pPr marL="801688" lvl="1" indent="-285750"/>
+            <a:r>
+              <a:rPr lang="en-US" dirty="0"/>
+              <a:t>Analyze Public Disclosures</a:t>
+            </a:r>
+          </a:p>
+          <a:p>
+            <a:pPr marL="801688" lvl="1" indent="-285750"/>
+            <a:r>
+              <a:rPr lang="en-US" dirty="0"/>
+              <a:t>Provide a Solution to Disclosure Decision</a:t>
+            </a:r>
+          </a:p>
+          <a:p>
+            <a:pPr marL="801688" lvl="1" indent="-285750"/>
+            <a:endParaRPr lang="en-US" dirty="0"/>
+          </a:p>
+          <a:p>
+            <a:pPr marL="285750" indent="-285750">
+              <a:buFont typeface="Arial" panose="020B0604020202020204" pitchFamily="34" charset="0"/>
+              <a:buChar char="•"/>
+            </a:pPr>
+            <a:endParaRPr lang="en-US" dirty="0"/>
+          </a:p>
+        </p:txBody>
+      </p:sp>
+    </p:spTree>
+    <p:extLst>
+      <p:ext uri="{BB962C8B-B14F-4D97-AF65-F5344CB8AC3E}">
+        <p14:creationId xmlns:p14="http://schemas.microsoft.com/office/powerpoint/2010/main" val="2852297331"/>
+      </p:ext>
+    </p:extLst>
+  </p:cSld>
+  <p:clrMapOvr>
+    <a:masterClrMapping/>
+  </p:clrMapOvr>
+  <p:transition>
+    <p:fade/>
+  </p:transition>
+</p:sld>
+</file>
+
+<file path=ppt/slides/slide12.xml><?xml version="1.0" encoding="utf-8"?>
+<p:sld xmlns:a="http://schemas.openxmlformats.org/drawingml/2006/main" xmlns:r="http://schemas.openxmlformats.org/officeDocument/2006/relationships" xmlns:p="http://schemas.openxmlformats.org/presentationml/2006/main">
+  <p:cSld>
+    <p:spTree>
+      <p:nvGrpSpPr>
+        <p:cNvPr id="1" name=""/>
+        <p:cNvGrpSpPr/>
+        <p:nvPr/>
+      </p:nvGrpSpPr>
+      <p:grpSpPr>
+        <a:xfrm>
+          <a:off x="0" y="0"/>
+          <a:ext cx="0" cy="0"/>
+          <a:chOff x="0" y="0"/>
+          <a:chExt cx="0" cy="0"/>
+        </a:xfrm>
+      </p:grpSpPr>
+      <p:sp>
+        <p:nvSpPr>
+          <p:cNvPr id="2" name="Title 1">
+            <a:extLst>
+              <a:ext uri="{FF2B5EF4-FFF2-40B4-BE49-F238E27FC236}">
+                <a16:creationId xmlns:a16="http://schemas.microsoft.com/office/drawing/2014/main" id="{AF13DC8F-500C-6FAE-8AA0-6C8A523BAA63}"/>
+              </a:ext>
+            </a:extLst>
+          </p:cNvPr>
+          <p:cNvSpPr>
+            <a:spLocks noGrp="1"/>
+          </p:cNvSpPr>
+          <p:nvPr>
+            <p:ph type="title"/>
+          </p:nvPr>
+        </p:nvSpPr>
+        <p:spPr/>
+        <p:txBody>
+          <a:bodyPr/>
+          <a:lstStyle/>
+          <a:p>
+            <a:r>
+              <a:rPr lang="en-US" dirty="0"/>
+              <a:t>Transaction analysis</a:t>
+            </a:r>
+          </a:p>
+        </p:txBody>
+      </p:sp>
+      <p:sp>
+        <p:nvSpPr>
+          <p:cNvPr id="3" name="Content Placeholder 2">
+            <a:extLst>
+              <a:ext uri="{FF2B5EF4-FFF2-40B4-BE49-F238E27FC236}">
+                <a16:creationId xmlns:a16="http://schemas.microsoft.com/office/drawing/2014/main" id="{550C5F61-20EF-2AB6-EE32-33B72469B4F5}"/>
+              </a:ext>
+            </a:extLst>
+          </p:cNvPr>
+          <p:cNvSpPr>
+            <a:spLocks noGrp="1"/>
+          </p:cNvSpPr>
+          <p:nvPr>
+            <p:ph idx="1"/>
+          </p:nvPr>
+        </p:nvSpPr>
+        <p:spPr>
+          <a:xfrm>
+            <a:off x="469445" y="1083527"/>
+            <a:ext cx="7641967" cy="2084481"/>
+          </a:xfrm>
+        </p:spPr>
+        <p:txBody>
+          <a:bodyPr/>
+          <a:lstStyle/>
+          <a:p>
+            <a:r>
+              <a:rPr lang="en-US" dirty="0"/>
+              <a:t>Transactions are events that affect the operations or finances of an organization. </a:t>
+            </a:r>
+          </a:p>
+          <a:p>
+            <a:endParaRPr lang="en-US" dirty="0"/>
+          </a:p>
+          <a:p>
+            <a:pPr marL="285750" indent="-285750">
+              <a:buFont typeface="Arial" panose="020B0604020202020204" pitchFamily="34" charset="0"/>
+              <a:buChar char="•"/>
+            </a:pPr>
+            <a:r>
+              <a:rPr lang="en-US" dirty="0"/>
+              <a:t>Accounting systems record transactions using a double-entry system using debits and credits. </a:t>
+            </a:r>
+          </a:p>
+          <a:p>
+            <a:pPr marL="285750" indent="-285750">
+              <a:buFont typeface="Arial" panose="020B0604020202020204" pitchFamily="34" charset="0"/>
+              <a:buChar char="•"/>
+            </a:pPr>
+            <a:r>
+              <a:rPr lang="en-US" dirty="0"/>
+              <a:t>Transactions are recorded using the accounting equation: </a:t>
+            </a:r>
+          </a:p>
+          <a:p>
+            <a:pPr marL="801688" lvl="1" indent="-285750"/>
+            <a:r>
+              <a:rPr lang="en-US" altLang="ko-KR" b="1" dirty="0">
+                <a:solidFill>
+                  <a:schemeClr val="tx2"/>
+                </a:solidFill>
+                <a:latin typeface="Arial" panose="020B0604020202020204" pitchFamily="34" charset="0"/>
+                <a:ea typeface="Gulim" panose="020B0600000101010101" pitchFamily="34" charset="-127"/>
+                <a:cs typeface="Arial" panose="020B0604020202020204" pitchFamily="34" charset="0"/>
+              </a:rPr>
+              <a:t>Assets = Liability + Equity</a:t>
+            </a:r>
+          </a:p>
+          <a:p>
+            <a:pPr marL="285750" indent="-285750">
+              <a:buFont typeface="Arial" panose="020B0604020202020204" pitchFamily="34" charset="0"/>
+              <a:buChar char="•"/>
+            </a:pPr>
+            <a:endParaRPr lang="en-US" dirty="0"/>
+          </a:p>
+          <a:p>
+            <a:pPr marL="285750" indent="-285750">
+              <a:buFont typeface="Arial" panose="020B0604020202020204" pitchFamily="34" charset="0"/>
+              <a:buChar char="•"/>
+            </a:pPr>
+            <a:r>
+              <a:rPr lang="en-US" dirty="0"/>
+              <a:t>For example, increases to assets are debit entries  </a:t>
+            </a:r>
+          </a:p>
+          <a:p>
+            <a:endParaRPr lang="en-US" dirty="0"/>
+          </a:p>
+          <a:p>
+            <a:endParaRPr lang="en-US" dirty="0"/>
+          </a:p>
+        </p:txBody>
+      </p:sp>
+    </p:spTree>
+    <p:extLst>
+      <p:ext uri="{BB962C8B-B14F-4D97-AF65-F5344CB8AC3E}">
+        <p14:creationId xmlns:p14="http://schemas.microsoft.com/office/powerpoint/2010/main" val="1852058721"/>
+      </p:ext>
+    </p:extLst>
+  </p:cSld>
+  <p:clrMapOvr>
+    <a:masterClrMapping/>
+  </p:clrMapOvr>
+  <p:transition>
+    <p:fade/>
+  </p:transition>
+</p:sld>
+</file>
+
+<file path=ppt/slides/slide13.xml><?xml version="1.0" encoding="utf-8"?>
+<p:sld xmlns:a="http://schemas.openxmlformats.org/drawingml/2006/main" xmlns:r="http://schemas.openxmlformats.org/officeDocument/2006/relationships" xmlns:p="http://schemas.openxmlformats.org/presentationml/2006/main">
+  <p:cSld>
+    <p:spTree>
+      <p:nvGrpSpPr>
+        <p:cNvPr id="1" name="">
+          <a:extLst>
+            <a:ext uri="{FF2B5EF4-FFF2-40B4-BE49-F238E27FC236}">
+              <a16:creationId xmlns:a16="http://schemas.microsoft.com/office/drawing/2014/main" id="{E41A40B9-BBDA-99A5-FD42-BABDAD466736}"/>
+            </a:ext>
+          </a:extLst>
+        </p:cNvPr>
+        <p:cNvGrpSpPr/>
+        <p:nvPr/>
+      </p:nvGrpSpPr>
+      <p:grpSpPr>
+        <a:xfrm>
+          <a:off x="0" y="0"/>
+          <a:ext cx="0" cy="0"/>
+          <a:chOff x="0" y="0"/>
+          <a:chExt cx="0" cy="0"/>
+        </a:xfrm>
+      </p:grpSpPr>
+      <p:sp>
+        <p:nvSpPr>
+          <p:cNvPr id="2" name="Title 1">
+            <a:extLst>
+              <a:ext uri="{FF2B5EF4-FFF2-40B4-BE49-F238E27FC236}">
+                <a16:creationId xmlns:a16="http://schemas.microsoft.com/office/drawing/2014/main" id="{CB84F894-53AC-B70E-505C-E25AE1B2E214}"/>
+              </a:ext>
+            </a:extLst>
+          </p:cNvPr>
+          <p:cNvSpPr>
+            <a:spLocks noGrp="1"/>
+          </p:cNvSpPr>
+          <p:nvPr>
+            <p:ph type="title"/>
+          </p:nvPr>
+        </p:nvSpPr>
+        <p:spPr/>
+        <p:txBody>
+          <a:bodyPr/>
+          <a:lstStyle/>
+          <a:p>
+            <a:r>
+              <a:rPr lang="en-US" dirty="0"/>
+              <a:t>Transaction analysis</a:t>
+            </a:r>
+          </a:p>
+        </p:txBody>
+      </p:sp>
+      <p:sp>
+        <p:nvSpPr>
+          <p:cNvPr id="3" name="Content Placeholder 2">
+            <a:extLst>
+              <a:ext uri="{FF2B5EF4-FFF2-40B4-BE49-F238E27FC236}">
+                <a16:creationId xmlns:a16="http://schemas.microsoft.com/office/drawing/2014/main" id="{E2C7B4D4-9761-456E-11D8-01B7A7DABE79}"/>
+              </a:ext>
+            </a:extLst>
+          </p:cNvPr>
+          <p:cNvSpPr>
+            <a:spLocks noGrp="1"/>
+          </p:cNvSpPr>
+          <p:nvPr>
+            <p:ph idx="1"/>
+          </p:nvPr>
+        </p:nvSpPr>
+        <p:spPr>
+          <a:xfrm>
+            <a:off x="469445" y="1083527"/>
+            <a:ext cx="7641967" cy="2084481"/>
+          </a:xfrm>
+        </p:spPr>
+        <p:txBody>
+          <a:bodyPr/>
+          <a:lstStyle/>
+          <a:p>
+            <a:r>
+              <a:rPr lang="en-US" dirty="0"/>
+              <a:t>Transactions record the economic activities of the firm so that firms can report meaningful economic aggregates like net income, revenue, cost of goods/services sold, R&amp;D expense, cash, inventory, what they owe (payables, debt), what they are owed (receivables, prepaid services).</a:t>
+            </a:r>
+          </a:p>
+          <a:p>
+            <a:endParaRPr lang="en-US" dirty="0"/>
+          </a:p>
+          <a:p>
+            <a:endParaRPr lang="en-US" dirty="0"/>
+          </a:p>
+        </p:txBody>
+      </p:sp>
+    </p:spTree>
+    <p:extLst>
+      <p:ext uri="{BB962C8B-B14F-4D97-AF65-F5344CB8AC3E}">
+        <p14:creationId xmlns:p14="http://schemas.microsoft.com/office/powerpoint/2010/main" val="1487627096"/>
+      </p:ext>
+    </p:extLst>
+  </p:cSld>
+  <p:clrMapOvr>
+    <a:masterClrMapping/>
+  </p:clrMapOvr>
+  <p:transition>
+    <p:fade/>
+  </p:transition>
+</p:sld>
+</file>
+
+<file path=ppt/slides/slide14.xml><?xml version="1.0" encoding="utf-8"?>
+<p:sld xmlns:a="http://schemas.openxmlformats.org/drawingml/2006/main" xmlns:r="http://schemas.openxmlformats.org/officeDocument/2006/relationships" xmlns:p="http://schemas.openxmlformats.org/presentationml/2006/main">
+  <p:cSld>
+    <p:spTree>
+      <p:nvGrpSpPr>
+        <p:cNvPr id="1" name=""/>
+        <p:cNvGrpSpPr/>
+        <p:nvPr/>
+      </p:nvGrpSpPr>
+      <p:grpSpPr>
+        <a:xfrm>
+          <a:off x="0" y="0"/>
+          <a:ext cx="0" cy="0"/>
+          <a:chOff x="0" y="0"/>
+          <a:chExt cx="0" cy="0"/>
+        </a:xfrm>
+      </p:grpSpPr>
+      <p:sp>
+        <p:nvSpPr>
+          <p:cNvPr id="2" name="Title 1">
+            <a:extLst>
+              <a:ext uri="{FF2B5EF4-FFF2-40B4-BE49-F238E27FC236}">
+                <a16:creationId xmlns:a16="http://schemas.microsoft.com/office/drawing/2014/main" id="{FAE40584-CAA3-A003-AD74-44616FB66582}"/>
+              </a:ext>
+            </a:extLst>
+          </p:cNvPr>
+          <p:cNvSpPr>
+            <a:spLocks noGrp="1"/>
+          </p:cNvSpPr>
+          <p:nvPr>
+            <p:ph type="title"/>
+          </p:nvPr>
+        </p:nvSpPr>
+        <p:spPr/>
+        <p:txBody>
+          <a:bodyPr/>
+          <a:lstStyle/>
+          <a:p>
+            <a:r>
+              <a:rPr lang="en-US" dirty="0"/>
+              <a:t>Peach State University</a:t>
+            </a:r>
+          </a:p>
+        </p:txBody>
+      </p:sp>
+      <p:sp>
+        <p:nvSpPr>
+          <p:cNvPr id="3" name="Content Placeholder 2">
+            <a:extLst>
+              <a:ext uri="{FF2B5EF4-FFF2-40B4-BE49-F238E27FC236}">
+                <a16:creationId xmlns:a16="http://schemas.microsoft.com/office/drawing/2014/main" id="{302C74F5-8A57-2DDD-8EA5-DF6E117F8867}"/>
+              </a:ext>
+            </a:extLst>
+          </p:cNvPr>
+          <p:cNvSpPr>
+            <a:spLocks noGrp="1"/>
+          </p:cNvSpPr>
+          <p:nvPr>
+            <p:ph idx="1"/>
+          </p:nvPr>
+        </p:nvSpPr>
+        <p:spPr>
+          <a:xfrm>
+            <a:off x="469445" y="1083527"/>
+            <a:ext cx="8319992" cy="2084481"/>
+          </a:xfrm>
+        </p:spPr>
+        <p:txBody>
+          <a:bodyPr/>
+          <a:lstStyle/>
+          <a:p>
+            <a:r>
+              <a:rPr lang="en-US" dirty="0"/>
+              <a:t>We undertake an analysis of Peach State University Hotel (a real hotel’s transactions with the name changed). </a:t>
+            </a:r>
+          </a:p>
+          <a:p>
+            <a:endParaRPr lang="en-US" dirty="0"/>
+          </a:p>
+          <a:p>
+            <a:r>
+              <a:rPr lang="en-US" dirty="0"/>
+              <a:t>Three-part case with reference readings for each part. </a:t>
+            </a:r>
+          </a:p>
+          <a:p>
+            <a:endParaRPr lang="en-US" dirty="0"/>
+          </a:p>
+          <a:p>
+            <a:r>
+              <a:rPr lang="en-US" dirty="0"/>
+              <a:t>Data analytics tool: Tableau</a:t>
+            </a:r>
+          </a:p>
+          <a:p>
+            <a:pPr marL="285750" indent="-285750">
+              <a:buFont typeface="Arial" panose="020B0604020202020204" pitchFamily="34" charset="0"/>
+              <a:buChar char="•"/>
+            </a:pPr>
+            <a:r>
+              <a:rPr lang="en-US" dirty="0"/>
+              <a:t>Set-up in FSB remote labs using </a:t>
+            </a:r>
+            <a:r>
+              <a:rPr lang="en-US" dirty="0">
+                <a:hlinkClick r:id="rId3"/>
+              </a:rPr>
+              <a:t>https://fprod-hcs.foster.uw.edu/</a:t>
+            </a:r>
+            <a:r>
+              <a:rPr lang="en-US" dirty="0"/>
+              <a:t> </a:t>
+            </a:r>
+          </a:p>
+          <a:p>
+            <a:pPr marL="285750" indent="-285750">
+              <a:buFont typeface="Arial" panose="020B0604020202020204" pitchFamily="34" charset="0"/>
+              <a:buChar char="•"/>
+            </a:pPr>
+            <a:r>
+              <a:rPr lang="en-US" dirty="0"/>
+              <a:t>In the u-drive use </a:t>
+            </a:r>
+            <a:r>
+              <a:rPr lang="en-US" dirty="0" err="1"/>
+              <a:t>cmd</a:t>
+            </a:r>
+            <a:r>
+              <a:rPr lang="en-US" dirty="0"/>
+              <a:t> to </a:t>
+            </a:r>
+          </a:p>
+          <a:p>
+            <a:pPr marL="285750" indent="-285750">
+              <a:buFont typeface="Arial" panose="020B0604020202020204" pitchFamily="34" charset="0"/>
+              <a:buChar char="•"/>
+            </a:pPr>
+            <a:r>
+              <a:rPr lang="en-US" dirty="0"/>
+              <a:t>git clone https://github.com/ashercurtis/datasets.io</a:t>
+            </a:r>
+          </a:p>
+        </p:txBody>
+      </p:sp>
+    </p:spTree>
+    <p:extLst>
+      <p:ext uri="{BB962C8B-B14F-4D97-AF65-F5344CB8AC3E}">
+        <p14:creationId xmlns:p14="http://schemas.microsoft.com/office/powerpoint/2010/main" val="3823684404"/>
+      </p:ext>
+    </p:extLst>
+  </p:cSld>
+  <p:clrMapOvr>
+    <a:masterClrMapping/>
+  </p:clrMapOvr>
+  <p:transition>
+    <p:fade/>
+  </p:transition>
+</p:sld>
+</file>
+
+<file path=ppt/slides/slide15.xml><?xml version="1.0" encoding="utf-8"?>
+<p:sld xmlns:a="http://schemas.openxmlformats.org/drawingml/2006/main" xmlns:r="http://schemas.openxmlformats.org/officeDocument/2006/relationships" xmlns:p="http://schemas.openxmlformats.org/presentationml/2006/main">
+  <p:cSld>
+    <p:spTree>
+      <p:nvGrpSpPr>
+        <p:cNvPr id="1" name="">
+          <a:extLst>
+            <a:ext uri="{FF2B5EF4-FFF2-40B4-BE49-F238E27FC236}">
+              <a16:creationId xmlns:a16="http://schemas.microsoft.com/office/drawing/2014/main" id="{2070BCFE-DDEC-D2C7-131F-51F1536BC48C}"/>
+            </a:ext>
+          </a:extLst>
+        </p:cNvPr>
+        <p:cNvGrpSpPr/>
+        <p:nvPr/>
+      </p:nvGrpSpPr>
+      <p:grpSpPr>
+        <a:xfrm>
+          <a:off x="0" y="0"/>
+          <a:ext cx="0" cy="0"/>
+          <a:chOff x="0" y="0"/>
+          <a:chExt cx="0" cy="0"/>
+        </a:xfrm>
+      </p:grpSpPr>
+      <p:sp>
+        <p:nvSpPr>
+          <p:cNvPr id="2" name="Title 1">
+            <a:extLst>
+              <a:ext uri="{FF2B5EF4-FFF2-40B4-BE49-F238E27FC236}">
+                <a16:creationId xmlns:a16="http://schemas.microsoft.com/office/drawing/2014/main" id="{B75048D7-D0E7-FB17-DA4E-6078575DEFAE}"/>
+              </a:ext>
+            </a:extLst>
+          </p:cNvPr>
+          <p:cNvSpPr>
+            <a:spLocks noGrp="1"/>
+          </p:cNvSpPr>
+          <p:nvPr>
+            <p:ph type="title"/>
+          </p:nvPr>
+        </p:nvSpPr>
+        <p:spPr/>
+        <p:txBody>
+          <a:bodyPr/>
+          <a:lstStyle/>
+          <a:p>
+            <a:r>
+              <a:rPr lang="en-US" dirty="0"/>
+              <a:t>Peach State University</a:t>
+            </a:r>
+          </a:p>
+        </p:txBody>
+      </p:sp>
+      <p:sp>
+        <p:nvSpPr>
+          <p:cNvPr id="3" name="Content Placeholder 2">
+            <a:extLst>
+              <a:ext uri="{FF2B5EF4-FFF2-40B4-BE49-F238E27FC236}">
+                <a16:creationId xmlns:a16="http://schemas.microsoft.com/office/drawing/2014/main" id="{4A1D9570-DBEF-29F1-17B0-4849FF6CF31B}"/>
+              </a:ext>
+            </a:extLst>
+          </p:cNvPr>
+          <p:cNvSpPr>
+            <a:spLocks noGrp="1"/>
+          </p:cNvSpPr>
+          <p:nvPr>
+            <p:ph idx="1"/>
+          </p:nvPr>
+        </p:nvSpPr>
+        <p:spPr>
+          <a:xfrm>
+            <a:off x="469445" y="1083527"/>
+            <a:ext cx="8319992" cy="2084481"/>
+          </a:xfrm>
+        </p:spPr>
+        <p:txBody>
+          <a:bodyPr/>
+          <a:lstStyle/>
+          <a:p>
+            <a:r>
+              <a:rPr lang="en-US" dirty="0"/>
+              <a:t>Part 1. Familiarity with the tool. Reference: </a:t>
+            </a:r>
+            <a:r>
+              <a:rPr lang="en-US" dirty="0">
+                <a:hlinkClick r:id="rId3"/>
+              </a:rPr>
+              <a:t>Analytics_mindset_case_studies_PSU_Hotel_understanding_audit_analytics</a:t>
+            </a:r>
+            <a:endParaRPr lang="en-US" dirty="0"/>
+          </a:p>
+          <a:p>
+            <a:endParaRPr lang="en-US" b="1" dirty="0"/>
+          </a:p>
+          <a:p>
+            <a:r>
+              <a:rPr lang="en-US" dirty="0"/>
+              <a:t>Part 2: Understanding sources of revenue. Reference: </a:t>
+            </a:r>
+            <a:r>
+              <a:rPr lang="en-US" dirty="0" err="1">
+                <a:hlinkClick r:id="rId4"/>
+              </a:rPr>
+              <a:t>Analytics_mindset_case_studies_PSU_Hotel_Revenue</a:t>
+            </a:r>
+            <a:endParaRPr lang="en-US" dirty="0"/>
+          </a:p>
+          <a:p>
+            <a:endParaRPr lang="en-US" dirty="0"/>
+          </a:p>
+          <a:p>
+            <a:r>
+              <a:rPr lang="en-US" dirty="0"/>
+              <a:t>Part 3: You will act as an advisor to identify events / transactions / transaction  categories to craft the firm’s non-GAAP earnings number. Reference:</a:t>
+            </a:r>
+          </a:p>
+          <a:p>
+            <a:r>
+              <a:rPr lang="en-US" dirty="0" err="1">
+                <a:hlinkClick r:id="rId5"/>
+              </a:rPr>
+              <a:t>Analytics_mindset_case_studies_PSU_Hotel_background</a:t>
+            </a:r>
+            <a:r>
+              <a:rPr lang="en-US" dirty="0"/>
+              <a:t> (hint: search for events)</a:t>
+            </a:r>
+          </a:p>
+        </p:txBody>
+      </p:sp>
+    </p:spTree>
+    <p:extLst>
+      <p:ext uri="{BB962C8B-B14F-4D97-AF65-F5344CB8AC3E}">
+        <p14:creationId xmlns:p14="http://schemas.microsoft.com/office/powerpoint/2010/main" val="4214750385"/>
+      </p:ext>
+    </p:extLst>
+  </p:cSld>
+  <p:clrMapOvr>
+    <a:masterClrMapping/>
+  </p:clrMapOvr>
+  <p:transition>
+    <p:fade/>
+  </p:transition>
+</p:sld>
+</file>
+
+<file path=ppt/slides/slide16.xml><?xml version="1.0" encoding="utf-8"?>
+<p:sld xmlns:a="http://schemas.openxmlformats.org/drawingml/2006/main" xmlns:r="http://schemas.openxmlformats.org/officeDocument/2006/relationships" xmlns:p="http://schemas.openxmlformats.org/presentationml/2006/main">
+  <p:cSld>
+    <p:spTree>
+      <p:nvGrpSpPr>
+        <p:cNvPr id="1" name="">
+          <a:extLst>
+            <a:ext uri="{FF2B5EF4-FFF2-40B4-BE49-F238E27FC236}">
               <a16:creationId xmlns:a16="http://schemas.microsoft.com/office/drawing/2014/main" id="{0E04725B-E88E-7B83-2830-70915E6201C1}"/>
             </a:ext>
           </a:extLst>
@@ -8136,6 +9102,21 @@
           <a:p>
             <a:pPr marL="801688" lvl="1" indent="-285750"/>
             <a:r>
+              <a:rPr lang="en-US" dirty="0">
+                <a:solidFill>
+                  <a:schemeClr val="tx1">
+                    <a:lumMod val="50000"/>
+                    <a:lumOff val="50000"/>
+                  </a:schemeClr>
+                </a:solidFill>
+                <a:latin typeface="+mn-lt"/>
+              </a:rPr>
+              <a:t>Analyze Transaction Level Data</a:t>
+            </a:r>
+          </a:p>
+          <a:p>
+            <a:pPr marL="801688" lvl="1" indent="-285750"/>
+            <a:r>
               <a:rPr lang="en-US" b="1" dirty="0">
                 <a:solidFill>
                   <a:srgbClr val="361F6D"/>
@@ -8143,15 +9124,6 @@
                 <a:latin typeface="+mn-lt"/>
               </a:rPr>
               <a:t>Analyze Public Disclosures</a:t>
-            </a:r>
-          </a:p>
-          <a:p>
-            <a:pPr marL="801688" lvl="1" indent="-285750"/>
-            <a:r>
-              <a:rPr lang="en-US" dirty="0">
-                <a:latin typeface="+mn-lt"/>
-              </a:rPr>
-              <a:t>Analyze Transaction Level Data</a:t>
             </a:r>
           </a:p>
           <a:p>
@@ -8179,7 +9151,7 @@
     </p:spTree>
     <p:extLst>
       <p:ext uri="{BB962C8B-B14F-4D97-AF65-F5344CB8AC3E}">
-        <p14:creationId xmlns:p14="http://schemas.microsoft.com/office/powerpoint/2010/main" val="3013072866"/>
+        <p14:creationId xmlns:p14="http://schemas.microsoft.com/office/powerpoint/2010/main" val="2189794146"/>
       </p:ext>
     </p:extLst>
   </p:cSld>
@@ -8192,7 +9164,7 @@
 </p:sld>
 </file>
 
-<file path=ppt/slides/slide12.xml><?xml version="1.0" encoding="utf-8"?>
+<file path=ppt/slides/slide17.xml><?xml version="1.0" encoding="utf-8"?>
 <p:sld xmlns:a="http://schemas.openxmlformats.org/drawingml/2006/main" xmlns:r="http://schemas.openxmlformats.org/officeDocument/2006/relationships" xmlns:p="http://schemas.openxmlformats.org/presentationml/2006/main">
   <p:cSld>
     <p:spTree>
@@ -8393,836 +9365,7 @@
     </p:spTree>
     <p:extLst>
       <p:ext uri="{BB962C8B-B14F-4D97-AF65-F5344CB8AC3E}">
-        <p14:creationId xmlns:p14="http://schemas.microsoft.com/office/powerpoint/2010/main" val="2985108975"/>
-      </p:ext>
-    </p:extLst>
-  </p:cSld>
-  <p:clrMapOvr>
-    <a:masterClrMapping/>
-  </p:clrMapOvr>
-  <p:transition>
-    <p:fade/>
-  </p:transition>
-</p:sld>
-</file>
-
-<file path=ppt/slides/slide13.xml><?xml version="1.0" encoding="utf-8"?>
-<p:sld xmlns:a="http://schemas.openxmlformats.org/drawingml/2006/main" xmlns:r="http://schemas.openxmlformats.org/officeDocument/2006/relationships" xmlns:p="http://schemas.openxmlformats.org/presentationml/2006/main">
-  <p:cSld>
-    <p:spTree>
-      <p:nvGrpSpPr>
-        <p:cNvPr id="1" name=""/>
-        <p:cNvGrpSpPr/>
-        <p:nvPr/>
-      </p:nvGrpSpPr>
-      <p:grpSpPr>
-        <a:xfrm>
-          <a:off x="0" y="0"/>
-          <a:ext cx="0" cy="0"/>
-          <a:chOff x="0" y="0"/>
-          <a:chExt cx="0" cy="0"/>
-        </a:xfrm>
-      </p:grpSpPr>
-      <p:sp>
-        <p:nvSpPr>
-          <p:cNvPr id="5" name="Title 4">
-            <a:extLst>
-              <a:ext uri="{FF2B5EF4-FFF2-40B4-BE49-F238E27FC236}">
-                <a16:creationId xmlns:a16="http://schemas.microsoft.com/office/drawing/2014/main" id="{A5E2A244-60F9-889E-C455-CD39AAC56AE3}"/>
-              </a:ext>
-            </a:extLst>
-          </p:cNvPr>
-          <p:cNvSpPr>
-            <a:spLocks noGrp="1"/>
-          </p:cNvSpPr>
-          <p:nvPr>
-            <p:ph type="title"/>
-          </p:nvPr>
-        </p:nvSpPr>
-        <p:spPr/>
-        <p:txBody>
-          <a:bodyPr/>
-          <a:lstStyle/>
-          <a:p>
-            <a:r>
-              <a:rPr lang="en-US" dirty="0"/>
-              <a:t>What is accounting income?</a:t>
-            </a:r>
-          </a:p>
-        </p:txBody>
-      </p:sp>
-      <p:sp>
-        <p:nvSpPr>
-          <p:cNvPr id="6" name="Content Placeholder 5">
-            <a:extLst>
-              <a:ext uri="{FF2B5EF4-FFF2-40B4-BE49-F238E27FC236}">
-                <a16:creationId xmlns:a16="http://schemas.microsoft.com/office/drawing/2014/main" id="{6A57A959-C0C5-C827-E2EF-D543C893D12B}"/>
-              </a:ext>
-            </a:extLst>
-          </p:cNvPr>
-          <p:cNvSpPr>
-            <a:spLocks noGrp="1"/>
-          </p:cNvSpPr>
-          <p:nvPr>
-            <p:ph idx="1"/>
-          </p:nvPr>
-        </p:nvSpPr>
-        <p:spPr>
-          <a:xfrm>
-            <a:off x="1458490" y="1718008"/>
-            <a:ext cx="6134555" cy="2084481"/>
-          </a:xfrm>
-        </p:spPr>
-        <p:txBody>
-          <a:bodyPr/>
-          <a:lstStyle/>
-          <a:p>
-            <a:r>
-              <a:rPr lang="en-US" sz="2400" b="1" dirty="0">
-                <a:solidFill>
-                  <a:schemeClr val="tx2"/>
-                </a:solidFill>
-              </a:rPr>
-              <a:t>Net Income = Revenues – Expenses</a:t>
-            </a:r>
-          </a:p>
-          <a:p>
-            <a:endParaRPr lang="en-US" dirty="0"/>
-          </a:p>
-          <a:p>
-            <a:endParaRPr lang="en-US" dirty="0"/>
-          </a:p>
-          <a:p>
-            <a:r>
-              <a:rPr lang="en-US" dirty="0"/>
-              <a:t>For an accounting period (often reported quarterly, and annually)</a:t>
-            </a:r>
-          </a:p>
-        </p:txBody>
-      </p:sp>
-    </p:spTree>
-    <p:extLst>
-      <p:ext uri="{BB962C8B-B14F-4D97-AF65-F5344CB8AC3E}">
-        <p14:creationId xmlns:p14="http://schemas.microsoft.com/office/powerpoint/2010/main" val="734014933"/>
-      </p:ext>
-    </p:extLst>
-  </p:cSld>
-  <p:clrMapOvr>
-    <a:masterClrMapping/>
-  </p:clrMapOvr>
-  <p:transition>
-    <p:fade/>
-  </p:transition>
-</p:sld>
-</file>
-
-<file path=ppt/slides/slide14.xml><?xml version="1.0" encoding="utf-8"?>
-<p:sld xmlns:a="http://schemas.openxmlformats.org/drawingml/2006/main" xmlns:r="http://schemas.openxmlformats.org/officeDocument/2006/relationships" xmlns:p="http://schemas.openxmlformats.org/presentationml/2006/main">
-  <p:cSld>
-    <p:spTree>
-      <p:nvGrpSpPr>
-        <p:cNvPr id="1" name=""/>
-        <p:cNvGrpSpPr/>
-        <p:nvPr/>
-      </p:nvGrpSpPr>
-      <p:grpSpPr>
-        <a:xfrm>
-          <a:off x="0" y="0"/>
-          <a:ext cx="0" cy="0"/>
-          <a:chOff x="0" y="0"/>
-          <a:chExt cx="0" cy="0"/>
-        </a:xfrm>
-      </p:grpSpPr>
-      <p:sp>
-        <p:nvSpPr>
-          <p:cNvPr id="2" name="Title 1">
-            <a:extLst>
-              <a:ext uri="{FF2B5EF4-FFF2-40B4-BE49-F238E27FC236}">
-                <a16:creationId xmlns:a16="http://schemas.microsoft.com/office/drawing/2014/main" id="{DEC9A585-84F5-A222-23E5-F0BE3EC54E20}"/>
-              </a:ext>
-            </a:extLst>
-          </p:cNvPr>
-          <p:cNvSpPr>
-            <a:spLocks noGrp="1"/>
-          </p:cNvSpPr>
-          <p:nvPr>
-            <p:ph type="title"/>
-          </p:nvPr>
-        </p:nvSpPr>
-        <p:spPr/>
-        <p:txBody>
-          <a:bodyPr/>
-          <a:lstStyle/>
-          <a:p>
-            <a:r>
-              <a:rPr lang="en-US" dirty="0"/>
-              <a:t>The Income Statement</a:t>
-            </a:r>
-          </a:p>
-        </p:txBody>
-      </p:sp>
-      <p:sp>
-        <p:nvSpPr>
-          <p:cNvPr id="3" name="Content Placeholder 2">
-            <a:extLst>
-              <a:ext uri="{FF2B5EF4-FFF2-40B4-BE49-F238E27FC236}">
-                <a16:creationId xmlns:a16="http://schemas.microsoft.com/office/drawing/2014/main" id="{67E4407E-FD98-D1EC-8919-665AE6082521}"/>
-              </a:ext>
-            </a:extLst>
-          </p:cNvPr>
-          <p:cNvSpPr>
-            <a:spLocks noGrp="1"/>
-          </p:cNvSpPr>
-          <p:nvPr>
-            <p:ph idx="1"/>
-          </p:nvPr>
-        </p:nvSpPr>
-        <p:spPr>
-          <a:xfrm>
-            <a:off x="469445" y="1083527"/>
-            <a:ext cx="8394637" cy="2084481"/>
-          </a:xfrm>
-        </p:spPr>
-        <p:txBody>
-          <a:bodyPr/>
-          <a:lstStyle/>
-          <a:p>
-            <a:r>
-              <a:rPr lang="en-US" dirty="0"/>
-              <a:t>Displays financial performance derived from business operations over a specific accounting period by reporting:</a:t>
-            </a:r>
-          </a:p>
-          <a:p>
-            <a:pPr marL="285750" indent="-285750">
-              <a:buFont typeface="Arial" panose="020B0604020202020204" pitchFamily="34" charset="0"/>
-              <a:buChar char="•"/>
-            </a:pPr>
-            <a:r>
-              <a:rPr lang="en-US" b="1" dirty="0"/>
-              <a:t>Revenue</a:t>
-            </a:r>
-            <a:r>
-              <a:rPr lang="en-US" dirty="0"/>
-              <a:t>: inflows of economic benefits that increase shareholders equity.</a:t>
-            </a:r>
-          </a:p>
-          <a:p>
-            <a:pPr marL="801688" lvl="1" indent="-285750"/>
-            <a:r>
-              <a:rPr lang="en-US" dirty="0"/>
-              <a:t>e.g., sales revenue, service revenue, fees earned</a:t>
-            </a:r>
-          </a:p>
-          <a:p>
-            <a:pPr marL="285750" indent="-285750">
-              <a:buFont typeface="Arial" panose="020B0604020202020204" pitchFamily="34" charset="0"/>
-              <a:buChar char="•"/>
-            </a:pPr>
-            <a:r>
-              <a:rPr lang="en-US" b="1" dirty="0"/>
-              <a:t>Expenses</a:t>
-            </a:r>
-            <a:r>
-              <a:rPr lang="en-US" dirty="0"/>
-              <a:t>: Use or loss of economic benefits that decrease shareholders equity.  </a:t>
-            </a:r>
-          </a:p>
-          <a:p>
-            <a:pPr marL="801688" lvl="1" indent="-285750"/>
-            <a:r>
-              <a:rPr lang="en-US" dirty="0"/>
-              <a:t>Incurred when you use resources to generate revenue, e.g., cost of goods sold, wages and salaries</a:t>
-            </a:r>
-          </a:p>
-          <a:p>
-            <a:r>
-              <a:rPr lang="en-US" dirty="0"/>
-              <a:t>If revenues are greater than expenses, a </a:t>
-            </a:r>
-            <a:r>
-              <a:rPr lang="en-US" b="1" dirty="0">
-                <a:solidFill>
-                  <a:schemeClr val="tx2"/>
-                </a:solidFill>
-              </a:rPr>
-              <a:t>net profit</a:t>
-            </a:r>
-            <a:r>
-              <a:rPr lang="en-US" dirty="0"/>
-              <a:t> is reported</a:t>
-            </a:r>
-          </a:p>
-          <a:p>
-            <a:r>
-              <a:rPr lang="en-US" dirty="0"/>
-              <a:t>If revenues are less than expenses, a </a:t>
-            </a:r>
-            <a:r>
-              <a:rPr lang="en-US" b="1" dirty="0"/>
-              <a:t>net loss</a:t>
-            </a:r>
-            <a:r>
-              <a:rPr lang="en-US" dirty="0"/>
-              <a:t> is reported</a:t>
-            </a:r>
-          </a:p>
-          <a:p>
-            <a:endParaRPr lang="en-US" dirty="0"/>
-          </a:p>
-        </p:txBody>
-      </p:sp>
-    </p:spTree>
-    <p:extLst>
-      <p:ext uri="{BB962C8B-B14F-4D97-AF65-F5344CB8AC3E}">
-        <p14:creationId xmlns:p14="http://schemas.microsoft.com/office/powerpoint/2010/main" val="1717167708"/>
-      </p:ext>
-    </p:extLst>
-  </p:cSld>
-  <p:clrMapOvr>
-    <a:masterClrMapping/>
-  </p:clrMapOvr>
-  <p:transition>
-    <p:fade/>
-  </p:transition>
-</p:sld>
-</file>
-
-<file path=ppt/slides/slide15.xml><?xml version="1.0" encoding="utf-8"?>
-<p:sld xmlns:a="http://schemas.openxmlformats.org/drawingml/2006/main" xmlns:r="http://schemas.openxmlformats.org/officeDocument/2006/relationships" xmlns:p="http://schemas.openxmlformats.org/presentationml/2006/main">
-  <p:cSld>
-    <p:spTree>
-      <p:nvGrpSpPr>
-        <p:cNvPr id="1" name=""/>
-        <p:cNvGrpSpPr/>
-        <p:nvPr/>
-      </p:nvGrpSpPr>
-      <p:grpSpPr>
-        <a:xfrm>
-          <a:off x="0" y="0"/>
-          <a:ext cx="0" cy="0"/>
-          <a:chOff x="0" y="0"/>
-          <a:chExt cx="0" cy="0"/>
-        </a:xfrm>
-      </p:grpSpPr>
-      <p:sp>
-        <p:nvSpPr>
-          <p:cNvPr id="2" name="Title 1">
-            <a:extLst>
-              <a:ext uri="{FF2B5EF4-FFF2-40B4-BE49-F238E27FC236}">
-                <a16:creationId xmlns:a16="http://schemas.microsoft.com/office/drawing/2014/main" id="{527B5F98-FC74-2C26-ACBF-C4F61D54928A}"/>
-              </a:ext>
-            </a:extLst>
-          </p:cNvPr>
-          <p:cNvSpPr>
-            <a:spLocks noGrp="1"/>
-          </p:cNvSpPr>
-          <p:nvPr>
-            <p:ph type="title"/>
-          </p:nvPr>
-        </p:nvSpPr>
-        <p:spPr/>
-        <p:txBody>
-          <a:bodyPr/>
-          <a:lstStyle/>
-          <a:p>
-            <a:r>
-              <a:rPr lang="en-US" dirty="0"/>
-              <a:t>Analyzing Public Disclosures</a:t>
-            </a:r>
-          </a:p>
-        </p:txBody>
-      </p:sp>
-      <p:pic>
-        <p:nvPicPr>
-          <p:cNvPr id="5" name="Picture 4" descr="Histogram displaying frequency distribution of earnings intervals ranging from -0.25 to 0.35, with a notable spike just above zero around 0.05. The graph highlights a sharp increase in frequency at positive earnings intervals, suggesting clustering or concentration of earnings data near this value.">
-            <a:extLst>
-              <a:ext uri="{FF2B5EF4-FFF2-40B4-BE49-F238E27FC236}">
-                <a16:creationId xmlns:a16="http://schemas.microsoft.com/office/drawing/2014/main" id="{48EEAA61-C874-5B4A-43BB-CC3270324E1C}"/>
-              </a:ext>
-            </a:extLst>
-          </p:cNvPr>
-          <p:cNvPicPr>
-            <a:picLocks noChangeAspect="1" noChangeArrowheads="1"/>
-          </p:cNvPicPr>
-          <p:nvPr/>
-        </p:nvPicPr>
-        <p:blipFill>
-          <a:blip r:embed="rId3" cstate="print"/>
-          <a:srcRect/>
-          <a:stretch>
-            <a:fillRect/>
-          </a:stretch>
-        </p:blipFill>
-        <p:spPr bwMode="auto">
-          <a:xfrm>
-            <a:off x="1562100" y="924119"/>
-            <a:ext cx="6019800" cy="3581400"/>
-          </a:xfrm>
-          <a:prstGeom prst="rect">
-            <a:avLst/>
-          </a:prstGeom>
-          <a:noFill/>
-          <a:ln w="9525">
-            <a:noFill/>
-            <a:miter lim="800000"/>
-            <a:headEnd/>
-            <a:tailEnd/>
-          </a:ln>
-        </p:spPr>
-      </p:pic>
-      <p:sp>
-        <p:nvSpPr>
-          <p:cNvPr id="6" name="Rectangle 5">
-            <a:extLst>
-              <a:ext uri="{FF2B5EF4-FFF2-40B4-BE49-F238E27FC236}">
-                <a16:creationId xmlns:a16="http://schemas.microsoft.com/office/drawing/2014/main" id="{592A8537-E58C-7A75-5030-DEF9AF6E2AC5}"/>
-              </a:ext>
-            </a:extLst>
-          </p:cNvPr>
-          <p:cNvSpPr>
-            <a:spLocks noChangeArrowheads="1"/>
-          </p:cNvSpPr>
-          <p:nvPr/>
-        </p:nvSpPr>
-        <p:spPr bwMode="auto">
-          <a:xfrm>
-            <a:off x="122076" y="4505519"/>
-            <a:ext cx="8763000" cy="533400"/>
-          </a:xfrm>
-          <a:prstGeom prst="rect">
-            <a:avLst/>
-          </a:prstGeom>
-          <a:noFill/>
-          <a:ln w="9525">
-            <a:noFill/>
-            <a:miter lim="800000"/>
-            <a:headEnd/>
-            <a:tailEnd/>
-          </a:ln>
-        </p:spPr>
-        <p:txBody>
-          <a:bodyPr/>
-          <a:lstStyle>
-            <a:defPPr>
-              <a:defRPr lang="en-US"/>
-            </a:defPPr>
-            <a:lvl1pPr marL="0" algn="l" defTabSz="457200" rtl="0" eaLnBrk="1" latinLnBrk="0" hangingPunct="1">
-              <a:defRPr sz="1800" kern="1200">
-                <a:solidFill>
-                  <a:schemeClr val="tx1"/>
-                </a:solidFill>
-                <a:latin typeface="+mn-lt"/>
-                <a:ea typeface="+mn-ea"/>
-                <a:cs typeface="+mn-cs"/>
-              </a:defRPr>
-            </a:lvl1pPr>
-            <a:lvl2pPr marL="457200" algn="l" defTabSz="457200" rtl="0" eaLnBrk="1" latinLnBrk="0" hangingPunct="1">
-              <a:defRPr sz="1800" kern="1200">
-                <a:solidFill>
-                  <a:schemeClr val="tx1"/>
-                </a:solidFill>
-                <a:latin typeface="+mn-lt"/>
-                <a:ea typeface="+mn-ea"/>
-                <a:cs typeface="+mn-cs"/>
-              </a:defRPr>
-            </a:lvl2pPr>
-            <a:lvl3pPr marL="914400" algn="l" defTabSz="457200" rtl="0" eaLnBrk="1" latinLnBrk="0" hangingPunct="1">
-              <a:defRPr sz="1800" kern="1200">
-                <a:solidFill>
-                  <a:schemeClr val="tx1"/>
-                </a:solidFill>
-                <a:latin typeface="+mn-lt"/>
-                <a:ea typeface="+mn-ea"/>
-                <a:cs typeface="+mn-cs"/>
-              </a:defRPr>
-            </a:lvl3pPr>
-            <a:lvl4pPr marL="1371600" algn="l" defTabSz="457200" rtl="0" eaLnBrk="1" latinLnBrk="0" hangingPunct="1">
-              <a:defRPr sz="1800" kern="1200">
-                <a:solidFill>
-                  <a:schemeClr val="tx1"/>
-                </a:solidFill>
-                <a:latin typeface="+mn-lt"/>
-                <a:ea typeface="+mn-ea"/>
-                <a:cs typeface="+mn-cs"/>
-              </a:defRPr>
-            </a:lvl4pPr>
-            <a:lvl5pPr marL="1828800" algn="l" defTabSz="457200" rtl="0" eaLnBrk="1" latinLnBrk="0" hangingPunct="1">
-              <a:defRPr sz="1800" kern="1200">
-                <a:solidFill>
-                  <a:schemeClr val="tx1"/>
-                </a:solidFill>
-                <a:latin typeface="+mn-lt"/>
-                <a:ea typeface="+mn-ea"/>
-                <a:cs typeface="+mn-cs"/>
-              </a:defRPr>
-            </a:lvl5pPr>
-            <a:lvl6pPr marL="2286000" algn="l" defTabSz="457200" rtl="0" eaLnBrk="1" latinLnBrk="0" hangingPunct="1">
-              <a:defRPr sz="1800" kern="1200">
-                <a:solidFill>
-                  <a:schemeClr val="tx1"/>
-                </a:solidFill>
-                <a:latin typeface="+mn-lt"/>
-                <a:ea typeface="+mn-ea"/>
-                <a:cs typeface="+mn-cs"/>
-              </a:defRPr>
-            </a:lvl6pPr>
-            <a:lvl7pPr marL="2743200" algn="l" defTabSz="457200" rtl="0" eaLnBrk="1" latinLnBrk="0" hangingPunct="1">
-              <a:defRPr sz="1800" kern="1200">
-                <a:solidFill>
-                  <a:schemeClr val="tx1"/>
-                </a:solidFill>
-                <a:latin typeface="+mn-lt"/>
-                <a:ea typeface="+mn-ea"/>
-                <a:cs typeface="+mn-cs"/>
-              </a:defRPr>
-            </a:lvl7pPr>
-            <a:lvl8pPr marL="3200400" algn="l" defTabSz="457200" rtl="0" eaLnBrk="1" latinLnBrk="0" hangingPunct="1">
-              <a:defRPr sz="1800" kern="1200">
-                <a:solidFill>
-                  <a:schemeClr val="tx1"/>
-                </a:solidFill>
-                <a:latin typeface="+mn-lt"/>
-                <a:ea typeface="+mn-ea"/>
-                <a:cs typeface="+mn-cs"/>
-              </a:defRPr>
-            </a:lvl8pPr>
-            <a:lvl9pPr marL="3657600" algn="l" defTabSz="457200" rtl="0" eaLnBrk="1" latinLnBrk="0" hangingPunct="1">
-              <a:defRPr sz="1800" kern="1200">
-                <a:solidFill>
-                  <a:schemeClr val="tx1"/>
-                </a:solidFill>
-                <a:latin typeface="+mn-lt"/>
-                <a:ea typeface="+mn-ea"/>
-                <a:cs typeface="+mn-cs"/>
-              </a:defRPr>
-            </a:lvl9pPr>
-          </a:lstStyle>
-          <a:p>
-            <a:pPr marL="342900" indent="-342900" eaLnBrk="1" hangingPunct="1">
-              <a:spcBef>
-                <a:spcPct val="20000"/>
-              </a:spcBef>
-            </a:pPr>
-            <a:r>
-              <a:rPr lang="en-US" sz="2000" b="1" dirty="0"/>
-              <a:t>Source: Burgstahler and </a:t>
-            </a:r>
-            <a:r>
-              <a:rPr lang="en-US" sz="2000" b="1" dirty="0" err="1"/>
-              <a:t>Dichev</a:t>
-            </a:r>
-            <a:r>
-              <a:rPr lang="en-US" sz="2000" b="1" dirty="0"/>
-              <a:t>, 1997 </a:t>
-            </a:r>
-            <a:r>
-              <a:rPr lang="en-US" sz="2000" b="1" i="1" dirty="0"/>
-              <a:t>J. of Accounting &amp; Economics</a:t>
-            </a:r>
-            <a:r>
-              <a:rPr lang="en-US" sz="3200" b="1" dirty="0"/>
-              <a:t> </a:t>
-            </a:r>
-          </a:p>
-        </p:txBody>
-      </p:sp>
-    </p:spTree>
-    <p:extLst>
-      <p:ext uri="{BB962C8B-B14F-4D97-AF65-F5344CB8AC3E}">
-        <p14:creationId xmlns:p14="http://schemas.microsoft.com/office/powerpoint/2010/main" val="4040727172"/>
-      </p:ext>
-    </p:extLst>
-  </p:cSld>
-  <p:clrMapOvr>
-    <a:masterClrMapping/>
-  </p:clrMapOvr>
-  <p:transition>
-    <p:fade/>
-  </p:transition>
-</p:sld>
-</file>
-
-<file path=ppt/slides/slide16.xml><?xml version="1.0" encoding="utf-8"?>
-<p:sld xmlns:a="http://schemas.openxmlformats.org/drawingml/2006/main" xmlns:r="http://schemas.openxmlformats.org/officeDocument/2006/relationships" xmlns:p="http://schemas.openxmlformats.org/presentationml/2006/main">
-  <p:cSld>
-    <p:spTree>
-      <p:nvGrpSpPr>
-        <p:cNvPr id="1" name=""/>
-        <p:cNvGrpSpPr/>
-        <p:nvPr/>
-      </p:nvGrpSpPr>
-      <p:grpSpPr>
-        <a:xfrm>
-          <a:off x="0" y="0"/>
-          <a:ext cx="0" cy="0"/>
-          <a:chOff x="0" y="0"/>
-          <a:chExt cx="0" cy="0"/>
-        </a:xfrm>
-      </p:grpSpPr>
-      <p:sp>
-        <p:nvSpPr>
-          <p:cNvPr id="2" name="Title 1">
-            <a:extLst>
-              <a:ext uri="{FF2B5EF4-FFF2-40B4-BE49-F238E27FC236}">
-                <a16:creationId xmlns:a16="http://schemas.microsoft.com/office/drawing/2014/main" id="{AED3BC00-A0D4-5953-1138-165E477B9F08}"/>
-              </a:ext>
-            </a:extLst>
-          </p:cNvPr>
-          <p:cNvSpPr>
-            <a:spLocks noGrp="1"/>
-          </p:cNvSpPr>
-          <p:nvPr>
-            <p:ph type="title"/>
-          </p:nvPr>
-        </p:nvSpPr>
-        <p:spPr/>
-        <p:txBody>
-          <a:bodyPr/>
-          <a:lstStyle/>
-          <a:p>
-            <a:r>
-              <a:rPr lang="en-US" dirty="0"/>
-              <a:t>Analyzing Public Disclosures</a:t>
-            </a:r>
-          </a:p>
-        </p:txBody>
-      </p:sp>
-      <p:sp>
-        <p:nvSpPr>
-          <p:cNvPr id="4" name="Text Placeholder 3">
-            <a:extLst>
-              <a:ext uri="{FF2B5EF4-FFF2-40B4-BE49-F238E27FC236}">
-                <a16:creationId xmlns:a16="http://schemas.microsoft.com/office/drawing/2014/main" id="{059C59D9-D7D2-844E-9697-C6CE6A44AD29}"/>
-              </a:ext>
-            </a:extLst>
-          </p:cNvPr>
-          <p:cNvSpPr>
-            <a:spLocks noGrp="1"/>
-          </p:cNvSpPr>
-          <p:nvPr>
-            <p:ph type="body" sz="quarter" idx="13"/>
-          </p:nvPr>
-        </p:nvSpPr>
-        <p:spPr/>
-        <p:txBody>
-          <a:bodyPr/>
-          <a:lstStyle/>
-          <a:p>
-            <a:r>
-              <a:rPr lang="en-US" dirty="0"/>
-              <a:t>Team Activity:</a:t>
-            </a:r>
-          </a:p>
-          <a:p>
-            <a:endParaRPr lang="en-US" dirty="0"/>
-          </a:p>
-          <a:p>
-            <a:r>
-              <a:rPr lang="en-US" b="1" dirty="0">
-                <a:solidFill>
-                  <a:schemeClr val="tx2"/>
-                </a:solidFill>
-              </a:rPr>
-              <a:t>Part 1: Analysis of Marriott’s Public Disclosures (as a class).</a:t>
-            </a:r>
-          </a:p>
-          <a:p>
-            <a:r>
-              <a:rPr lang="en-US" dirty="0">
-                <a:hlinkClick r:id="rId3"/>
-              </a:rPr>
-              <a:t>Investor Relations | Marriott International</a:t>
-            </a:r>
-            <a:endParaRPr lang="en-US" dirty="0"/>
-          </a:p>
-          <a:p>
-            <a:endParaRPr lang="en-US" dirty="0"/>
-          </a:p>
-          <a:p>
-            <a:r>
-              <a:rPr lang="en-US" dirty="0"/>
-              <a:t>Part 2: Analysis of other company filings (in teams)</a:t>
-            </a:r>
-          </a:p>
-          <a:p>
-            <a:endParaRPr lang="en-US" dirty="0"/>
-          </a:p>
-          <a:p>
-            <a:endParaRPr lang="en-US" dirty="0"/>
-          </a:p>
-        </p:txBody>
-      </p:sp>
-    </p:spTree>
-    <p:extLst>
-      <p:ext uri="{BB962C8B-B14F-4D97-AF65-F5344CB8AC3E}">
-        <p14:creationId xmlns:p14="http://schemas.microsoft.com/office/powerpoint/2010/main" val="1603366011"/>
-      </p:ext>
-    </p:extLst>
-  </p:cSld>
-  <p:clrMapOvr>
-    <a:masterClrMapping/>
-  </p:clrMapOvr>
-  <p:transition>
-    <p:fade/>
-  </p:transition>
-</p:sld>
-</file>
-
-<file path=ppt/slides/slide17.xml><?xml version="1.0" encoding="utf-8"?>
-<p:sld xmlns:a="http://schemas.openxmlformats.org/drawingml/2006/main" xmlns:r="http://schemas.openxmlformats.org/officeDocument/2006/relationships" xmlns:p="http://schemas.openxmlformats.org/presentationml/2006/main">
-  <p:cSld>
-    <p:spTree>
-      <p:nvGrpSpPr>
-        <p:cNvPr id="1" name=""/>
-        <p:cNvGrpSpPr/>
-        <p:nvPr/>
-      </p:nvGrpSpPr>
-      <p:grpSpPr>
-        <a:xfrm>
-          <a:off x="0" y="0"/>
-          <a:ext cx="0" cy="0"/>
-          <a:chOff x="0" y="0"/>
-          <a:chExt cx="0" cy="0"/>
-        </a:xfrm>
-      </p:grpSpPr>
-      <p:sp>
-        <p:nvSpPr>
-          <p:cNvPr id="2" name="Title 1">
-            <a:extLst>
-              <a:ext uri="{FF2B5EF4-FFF2-40B4-BE49-F238E27FC236}">
-                <a16:creationId xmlns:a16="http://schemas.microsoft.com/office/drawing/2014/main" id="{4769DE2C-BE19-0B42-DC7A-BF2BB9CFA115}"/>
-              </a:ext>
-            </a:extLst>
-          </p:cNvPr>
-          <p:cNvSpPr>
-            <a:spLocks noGrp="1"/>
-          </p:cNvSpPr>
-          <p:nvPr>
-            <p:ph type="title"/>
-          </p:nvPr>
-        </p:nvSpPr>
-        <p:spPr/>
-        <p:txBody>
-          <a:bodyPr/>
-          <a:lstStyle/>
-          <a:p>
-            <a:r>
-              <a:rPr lang="en-US" dirty="0"/>
-              <a:t>Marriott</a:t>
-            </a:r>
-          </a:p>
-        </p:txBody>
-      </p:sp>
-      <p:sp>
-        <p:nvSpPr>
-          <p:cNvPr id="4" name="Text Placeholder 3">
-            <a:extLst>
-              <a:ext uri="{FF2B5EF4-FFF2-40B4-BE49-F238E27FC236}">
-                <a16:creationId xmlns:a16="http://schemas.microsoft.com/office/drawing/2014/main" id="{9A881CF1-2D11-75E6-B1A0-AEEC50B97400}"/>
-              </a:ext>
-            </a:extLst>
-          </p:cNvPr>
-          <p:cNvSpPr>
-            <a:spLocks noGrp="1"/>
-          </p:cNvSpPr>
-          <p:nvPr>
-            <p:ph type="body" sz="quarter" idx="13"/>
-          </p:nvPr>
-        </p:nvSpPr>
-        <p:spPr/>
-        <p:txBody>
-          <a:bodyPr/>
-          <a:lstStyle/>
-          <a:p>
-            <a:endParaRPr lang="en-US"/>
-          </a:p>
-        </p:txBody>
-      </p:sp>
-      <p:pic>
-        <p:nvPicPr>
-          <p:cNvPr id="6" name="Picture 5" descr="Line chart showing Marriott International, Inc. (MAR) stock price performance over six months, with a green highlight indicating a 24.40% increase. Chart features yellow key event markers, a mountain-style price graph in teal, volume bars in gray, and current price labeled at 331.30 with a -0.65% change. A yellow rectangle is highlighting the visible spike in market price and trading volume around the most recent earnings announcement.">
-            <a:extLst>
-              <a:ext uri="{FF2B5EF4-FFF2-40B4-BE49-F238E27FC236}">
-                <a16:creationId xmlns:a16="http://schemas.microsoft.com/office/drawing/2014/main" id="{701B3D9A-91D6-F04A-3A38-61AA6C5BC668}"/>
-              </a:ext>
-            </a:extLst>
-          </p:cNvPr>
-          <p:cNvPicPr>
-            <a:picLocks noChangeAspect="1"/>
-          </p:cNvPicPr>
-          <p:nvPr/>
-        </p:nvPicPr>
-        <p:blipFill>
-          <a:blip r:embed="rId3"/>
-          <a:stretch>
-            <a:fillRect/>
-          </a:stretch>
-        </p:blipFill>
-        <p:spPr>
-          <a:xfrm>
-            <a:off x="469446" y="893502"/>
-            <a:ext cx="7868816" cy="3649306"/>
-          </a:xfrm>
-          <a:prstGeom prst="rect">
-            <a:avLst/>
-          </a:prstGeom>
-        </p:spPr>
-      </p:pic>
-      <p:sp>
-        <p:nvSpPr>
-          <p:cNvPr id="7" name="Rectangle 6">
-            <a:extLst>
-              <a:ext uri="{FF2B5EF4-FFF2-40B4-BE49-F238E27FC236}">
-                <a16:creationId xmlns:a16="http://schemas.microsoft.com/office/drawing/2014/main" id="{1FB19BE2-3A08-E9BA-ACEE-9C6721C88528}"/>
-              </a:ext>
-            </a:extLst>
-          </p:cNvPr>
-          <p:cNvSpPr/>
-          <p:nvPr/>
-        </p:nvSpPr>
-        <p:spPr>
-          <a:xfrm>
-            <a:off x="5417976" y="2289110"/>
-            <a:ext cx="304800" cy="1960888"/>
-          </a:xfrm>
-          <a:prstGeom prst="rect">
-            <a:avLst/>
-          </a:prstGeom>
-          <a:noFill/>
-          <a:ln w="28575">
-            <a:solidFill>
-              <a:srgbClr val="C09F29"/>
-            </a:solidFill>
-          </a:ln>
-          <a:effectLst/>
-        </p:spPr>
-        <p:style>
-          <a:lnRef idx="1">
-            <a:schemeClr val="accent1"/>
-          </a:lnRef>
-          <a:fillRef idx="3">
-            <a:schemeClr val="accent1"/>
-          </a:fillRef>
-          <a:effectRef idx="2">
-            <a:schemeClr val="accent1"/>
-          </a:effectRef>
-          <a:fontRef idx="minor">
-            <a:schemeClr val="lt1"/>
-          </a:fontRef>
-        </p:style>
-        <p:txBody>
-          <a:bodyPr rtlCol="0" anchor="ctr"/>
-          <a:lstStyle/>
-          <a:p>
-            <a:pPr algn="ctr"/>
-            <a:endParaRPr lang="en-US"/>
-          </a:p>
-        </p:txBody>
-      </p:sp>
-    </p:spTree>
-    <p:extLst>
-      <p:ext uri="{BB962C8B-B14F-4D97-AF65-F5344CB8AC3E}">
-        <p14:creationId xmlns:p14="http://schemas.microsoft.com/office/powerpoint/2010/main" val="1139421399"/>
+        <p14:creationId xmlns:p14="http://schemas.microsoft.com/office/powerpoint/2010/main" val="1601452149"/>
       </p:ext>
     </p:extLst>
   </p:cSld>
@@ -9240,13 +9383,7 @@
   <p:cSld>
     <p:spTree>
       <p:nvGrpSpPr>
-        <p:cNvPr id="1" name="">
-          <a:extLst>
-            <a:ext uri="{FF2B5EF4-FFF2-40B4-BE49-F238E27FC236}">
-              <a16:creationId xmlns:a16="http://schemas.microsoft.com/office/drawing/2014/main" id="{E503E7D6-3F95-653E-4400-AB4B33797B1A}"/>
-            </a:ext>
-          </a:extLst>
-        </p:cNvPr>
+        <p:cNvPr id="1" name=""/>
         <p:cNvGrpSpPr/>
         <p:nvPr/>
       </p:nvGrpSpPr>
@@ -9260,10 +9397,10 @@
       </p:grpSpPr>
       <p:sp>
         <p:nvSpPr>
-          <p:cNvPr id="2" name="Title 1">
+          <p:cNvPr id="5" name="Title 4">
             <a:extLst>
               <a:ext uri="{FF2B5EF4-FFF2-40B4-BE49-F238E27FC236}">
-                <a16:creationId xmlns:a16="http://schemas.microsoft.com/office/drawing/2014/main" id="{D9C56EA6-25F5-97C1-2DC8-E5E944AA6D56}"/>
+                <a16:creationId xmlns:a16="http://schemas.microsoft.com/office/drawing/2014/main" id="{A5E2A244-60F9-889E-C455-CD39AAC56AE3}"/>
               </a:ext>
             </a:extLst>
           </p:cNvPr>
@@ -9281,17 +9418,17 @@
           <a:p>
             <a:r>
               <a:rPr lang="en-US" dirty="0"/>
-              <a:t>Analyzing Public Disclosures</a:t>
-            </a:r>
-          </a:p>
-        </p:txBody>
-      </p:sp>
-      <p:sp>
-        <p:nvSpPr>
-          <p:cNvPr id="4" name="Text Placeholder 3">
+              <a:t>What is accounting income?</a:t>
+            </a:r>
+          </a:p>
+        </p:txBody>
+      </p:sp>
+      <p:sp>
+        <p:nvSpPr>
+          <p:cNvPr id="6" name="Content Placeholder 5">
             <a:extLst>
               <a:ext uri="{FF2B5EF4-FFF2-40B4-BE49-F238E27FC236}">
-                <a16:creationId xmlns:a16="http://schemas.microsoft.com/office/drawing/2014/main" id="{CB36D306-E6C0-0156-F483-41B9A1399E88}"/>
+                <a16:creationId xmlns:a16="http://schemas.microsoft.com/office/drawing/2014/main" id="{6A57A959-C0C5-C827-E2EF-D543C893D12B}"/>
               </a:ext>
             </a:extLst>
           </p:cNvPr>
@@ -9299,92 +9436,46 @@
             <a:spLocks noGrp="1"/>
           </p:cNvSpPr>
           <p:nvPr>
-            <p:ph type="body" sz="quarter" idx="13"/>
-          </p:nvPr>
-        </p:nvSpPr>
-        <p:spPr/>
+            <p:ph idx="1"/>
+          </p:nvPr>
+        </p:nvSpPr>
+        <p:spPr>
+          <a:xfrm>
+            <a:off x="1458490" y="1718008"/>
+            <a:ext cx="6134555" cy="2084481"/>
+          </a:xfrm>
+        </p:spPr>
         <p:txBody>
           <a:bodyPr/>
           <a:lstStyle/>
           <a:p>
             <a:r>
+              <a:rPr lang="en-US" sz="2400" b="1" dirty="0">
+                <a:solidFill>
+                  <a:schemeClr val="tx2"/>
+                </a:solidFill>
+              </a:rPr>
+              <a:t>Net Income = Revenues – Expenses</a:t>
+            </a:r>
+          </a:p>
+          <a:p>
+            <a:endParaRPr lang="en-US" dirty="0"/>
+          </a:p>
+          <a:p>
+            <a:endParaRPr lang="en-US" dirty="0"/>
+          </a:p>
+          <a:p>
+            <a:r>
               <a:rPr lang="en-US" dirty="0"/>
-              <a:t>Team Activity:</a:t>
-            </a:r>
-          </a:p>
-          <a:p>
-            <a:endParaRPr lang="en-US" dirty="0"/>
-          </a:p>
-          <a:p>
-            <a:r>
-              <a:rPr lang="en-US" dirty="0"/>
-              <a:t>Part 2: Analysis of other company filings (in teams)</a:t>
-            </a:r>
-          </a:p>
-          <a:p>
-            <a:pPr marL="285750" indent="-285750">
-              <a:buFont typeface="Arial" panose="020B0604020202020204" pitchFamily="34" charset="0"/>
-              <a:buChar char="•"/>
-            </a:pPr>
-            <a:r>
-              <a:rPr lang="en-US" dirty="0">
-                <a:hlinkClick r:id="rId3"/>
-              </a:rPr>
-              <a:t>Hilton – Investor Relations</a:t>
-            </a:r>
-            <a:endParaRPr lang="en-US" dirty="0"/>
-          </a:p>
-          <a:p>
-            <a:pPr marL="285750" indent="-285750">
-              <a:buFont typeface="Arial" panose="020B0604020202020204" pitchFamily="34" charset="0"/>
-              <a:buChar char="•"/>
-            </a:pPr>
-            <a:r>
-              <a:rPr lang="en-US" dirty="0">
-                <a:hlinkClick r:id="rId4"/>
-              </a:rPr>
-              <a:t>Hyatt Hotels Corporation - Investor Relations</a:t>
-            </a:r>
-            <a:endParaRPr lang="en-US" dirty="0"/>
-          </a:p>
-          <a:p>
-            <a:pPr marL="285750" indent="-285750">
-              <a:buFont typeface="Arial" panose="020B0604020202020204" pitchFamily="34" charset="0"/>
-              <a:buChar char="•"/>
-            </a:pPr>
-            <a:r>
-              <a:rPr lang="en-US" dirty="0">
-                <a:hlinkClick r:id="rId5"/>
-              </a:rPr>
-              <a:t>Investors - InterContinental Hotels Group PLC</a:t>
-            </a:r>
-            <a:endParaRPr lang="en-US" dirty="0"/>
-          </a:p>
-          <a:p>
-            <a:pPr marL="285750" indent="-285750">
-              <a:buFont typeface="Arial" panose="020B0604020202020204" pitchFamily="34" charset="0"/>
-              <a:buChar char="•"/>
-            </a:pPr>
-            <a:r>
-              <a:rPr lang="en-US" dirty="0">
-                <a:hlinkClick r:id="rId6"/>
-              </a:rPr>
-              <a:t>Wyndham Hotels &amp; Resorts, Inc. (WH)</a:t>
-            </a:r>
-            <a:endParaRPr lang="en-US" dirty="0"/>
-          </a:p>
-          <a:p>
-            <a:endParaRPr lang="en-US" dirty="0"/>
-          </a:p>
-          <a:p>
-            <a:endParaRPr lang="en-US" dirty="0"/>
+              <a:t>For an accounting period (often reported quarterly, and annually)</a:t>
+            </a:r>
           </a:p>
         </p:txBody>
       </p:sp>
     </p:spTree>
     <p:extLst>
       <p:ext uri="{BB962C8B-B14F-4D97-AF65-F5344CB8AC3E}">
-        <p14:creationId xmlns:p14="http://schemas.microsoft.com/office/powerpoint/2010/main" val="850055485"/>
+        <p14:creationId xmlns:p14="http://schemas.microsoft.com/office/powerpoint/2010/main" val="3092253010"/>
       </p:ext>
     </p:extLst>
   </p:cSld>
@@ -9419,7 +9510,7 @@
           <p:cNvPr id="2" name="Title 1">
             <a:extLst>
               <a:ext uri="{FF2B5EF4-FFF2-40B4-BE49-F238E27FC236}">
-                <a16:creationId xmlns:a16="http://schemas.microsoft.com/office/drawing/2014/main" id="{EC14D61C-5264-4857-8BB3-1316C2A05287}"/>
+                <a16:creationId xmlns:a16="http://schemas.microsoft.com/office/drawing/2014/main" id="{DEC9A585-84F5-A222-23E5-F0BE3EC54E20}"/>
               </a:ext>
             </a:extLst>
           </p:cNvPr>
@@ -9437,629 +9528,125 @@
           <a:p>
             <a:r>
               <a:rPr lang="en-US" dirty="0"/>
-              <a:t>GAAP and Non-GAAP</a:t>
-            </a:r>
-          </a:p>
-        </p:txBody>
-      </p:sp>
-      <p:sp>
-        <p:nvSpPr>
-          <p:cNvPr id="5" name="Rectangle 4">
+              <a:t>The Income Statement</a:t>
+            </a:r>
+          </a:p>
+        </p:txBody>
+      </p:sp>
+      <p:sp>
+        <p:nvSpPr>
+          <p:cNvPr id="3" name="Content Placeholder 2">
             <a:extLst>
               <a:ext uri="{FF2B5EF4-FFF2-40B4-BE49-F238E27FC236}">
-                <a16:creationId xmlns:a16="http://schemas.microsoft.com/office/drawing/2014/main" id="{58B5FCE9-EC7C-8690-7021-D6A23CAA8568}"/>
+                <a16:creationId xmlns:a16="http://schemas.microsoft.com/office/drawing/2014/main" id="{67E4407E-FD98-D1EC-8919-665AE6082521}"/>
               </a:ext>
             </a:extLst>
           </p:cNvPr>
-          <p:cNvSpPr/>
-          <p:nvPr/>
+          <p:cNvSpPr>
+            <a:spLocks noGrp="1"/>
+          </p:cNvSpPr>
+          <p:nvPr>
+            <p:ph idx="1"/>
+          </p:nvPr>
         </p:nvSpPr>
         <p:spPr>
           <a:xfrm>
-            <a:off x="544805" y="1009863"/>
-            <a:ext cx="3479802" cy="1295400"/>
+            <a:off x="469445" y="1083527"/>
+            <a:ext cx="8394637" cy="2084481"/>
           </a:xfrm>
-          <a:prstGeom prst="rect">
-            <a:avLst/>
-          </a:prstGeom>
-          <a:solidFill>
-            <a:schemeClr val="tx2"/>
-          </a:solidFill>
         </p:spPr>
-        <p:style>
-          <a:lnRef idx="1">
-            <a:schemeClr val="accent1"/>
-          </a:lnRef>
-          <a:fillRef idx="3">
-            <a:schemeClr val="accent1"/>
-          </a:fillRef>
-          <a:effectRef idx="2">
-            <a:schemeClr val="accent1"/>
-          </a:effectRef>
-          <a:fontRef idx="minor">
-            <a:schemeClr val="lt1"/>
-          </a:fontRef>
-        </p:style>
-        <p:txBody>
-          <a:bodyPr rtlCol="0" anchor="ctr"/>
-          <a:lstStyle>
-            <a:defPPr>
-              <a:defRPr lang="en-US"/>
-            </a:defPPr>
-            <a:lvl1pPr marL="0" algn="l" defTabSz="457200" rtl="0" eaLnBrk="1" latinLnBrk="0" hangingPunct="1">
-              <a:defRPr sz="1800" kern="1200">
-                <a:solidFill>
-                  <a:schemeClr val="lt1"/>
-                </a:solidFill>
-                <a:latin typeface="+mn-lt"/>
-                <a:ea typeface="+mn-ea"/>
-                <a:cs typeface="+mn-cs"/>
-              </a:defRPr>
-            </a:lvl1pPr>
-            <a:lvl2pPr marL="457200" algn="l" defTabSz="457200" rtl="0" eaLnBrk="1" latinLnBrk="0" hangingPunct="1">
-              <a:defRPr sz="1800" kern="1200">
-                <a:solidFill>
-                  <a:schemeClr val="lt1"/>
-                </a:solidFill>
-                <a:latin typeface="+mn-lt"/>
-                <a:ea typeface="+mn-ea"/>
-                <a:cs typeface="+mn-cs"/>
-              </a:defRPr>
-            </a:lvl2pPr>
-            <a:lvl3pPr marL="914400" algn="l" defTabSz="457200" rtl="0" eaLnBrk="1" latinLnBrk="0" hangingPunct="1">
-              <a:defRPr sz="1800" kern="1200">
-                <a:solidFill>
-                  <a:schemeClr val="lt1"/>
-                </a:solidFill>
-                <a:latin typeface="+mn-lt"/>
-                <a:ea typeface="+mn-ea"/>
-                <a:cs typeface="+mn-cs"/>
-              </a:defRPr>
-            </a:lvl3pPr>
-            <a:lvl4pPr marL="1371600" algn="l" defTabSz="457200" rtl="0" eaLnBrk="1" latinLnBrk="0" hangingPunct="1">
-              <a:defRPr sz="1800" kern="1200">
-                <a:solidFill>
-                  <a:schemeClr val="lt1"/>
-                </a:solidFill>
-                <a:latin typeface="+mn-lt"/>
-                <a:ea typeface="+mn-ea"/>
-                <a:cs typeface="+mn-cs"/>
-              </a:defRPr>
-            </a:lvl4pPr>
-            <a:lvl5pPr marL="1828800" algn="l" defTabSz="457200" rtl="0" eaLnBrk="1" latinLnBrk="0" hangingPunct="1">
-              <a:defRPr sz="1800" kern="1200">
-                <a:solidFill>
-                  <a:schemeClr val="lt1"/>
-                </a:solidFill>
-                <a:latin typeface="+mn-lt"/>
-                <a:ea typeface="+mn-ea"/>
-                <a:cs typeface="+mn-cs"/>
-              </a:defRPr>
-            </a:lvl5pPr>
-            <a:lvl6pPr marL="2286000" algn="l" defTabSz="457200" rtl="0" eaLnBrk="1" latinLnBrk="0" hangingPunct="1">
-              <a:defRPr sz="1800" kern="1200">
-                <a:solidFill>
-                  <a:schemeClr val="lt1"/>
-                </a:solidFill>
-                <a:latin typeface="+mn-lt"/>
-                <a:ea typeface="+mn-ea"/>
-                <a:cs typeface="+mn-cs"/>
-              </a:defRPr>
-            </a:lvl6pPr>
-            <a:lvl7pPr marL="2743200" algn="l" defTabSz="457200" rtl="0" eaLnBrk="1" latinLnBrk="0" hangingPunct="1">
-              <a:defRPr sz="1800" kern="1200">
-                <a:solidFill>
-                  <a:schemeClr val="lt1"/>
-                </a:solidFill>
-                <a:latin typeface="+mn-lt"/>
-                <a:ea typeface="+mn-ea"/>
-                <a:cs typeface="+mn-cs"/>
-              </a:defRPr>
-            </a:lvl7pPr>
-            <a:lvl8pPr marL="3200400" algn="l" defTabSz="457200" rtl="0" eaLnBrk="1" latinLnBrk="0" hangingPunct="1">
-              <a:defRPr sz="1800" kern="1200">
-                <a:solidFill>
-                  <a:schemeClr val="lt1"/>
-                </a:solidFill>
-                <a:latin typeface="+mn-lt"/>
-                <a:ea typeface="+mn-ea"/>
-                <a:cs typeface="+mn-cs"/>
-              </a:defRPr>
-            </a:lvl8pPr>
-            <a:lvl9pPr marL="3657600" algn="l" defTabSz="457200" rtl="0" eaLnBrk="1" latinLnBrk="0" hangingPunct="1">
-              <a:defRPr sz="1800" kern="1200">
-                <a:solidFill>
-                  <a:schemeClr val="lt1"/>
-                </a:solidFill>
-                <a:latin typeface="+mn-lt"/>
-                <a:ea typeface="+mn-ea"/>
-                <a:cs typeface="+mn-cs"/>
-              </a:defRPr>
-            </a:lvl9pPr>
-          </a:lstStyle>
-          <a:p>
-            <a:pPr algn="ctr"/>
+        <p:txBody>
+          <a:bodyPr/>
+          <a:lstStyle/>
+          <a:p>
             <a:r>
               <a:rPr lang="en-US" dirty="0"/>
-              <a:t>GAAP EPS</a:t>
-            </a:r>
-          </a:p>
-        </p:txBody>
-      </p:sp>
-      <p:sp>
-        <p:nvSpPr>
-          <p:cNvPr id="6" name="Rectangle 5">
-            <a:extLst>
-              <a:ext uri="{FF2B5EF4-FFF2-40B4-BE49-F238E27FC236}">
-                <a16:creationId xmlns:a16="http://schemas.microsoft.com/office/drawing/2014/main" id="{784404BA-3037-CF1F-8E6B-0C4F0F356A6C}"/>
-              </a:ext>
-            </a:extLst>
-          </p:cNvPr>
-          <p:cNvSpPr/>
-          <p:nvPr/>
-        </p:nvSpPr>
-        <p:spPr>
-          <a:xfrm>
-            <a:off x="4780899" y="1009863"/>
-            <a:ext cx="3386739" cy="1295400"/>
-          </a:xfrm>
-          <a:prstGeom prst="rect">
-            <a:avLst/>
-          </a:prstGeom>
-          <a:solidFill>
-            <a:schemeClr val="tx2"/>
-          </a:solidFill>
-        </p:spPr>
-        <p:style>
-          <a:lnRef idx="1">
-            <a:schemeClr val="accent1"/>
-          </a:lnRef>
-          <a:fillRef idx="3">
-            <a:schemeClr val="accent1"/>
-          </a:fillRef>
-          <a:effectRef idx="2">
-            <a:schemeClr val="accent1"/>
-          </a:effectRef>
-          <a:fontRef idx="minor">
-            <a:schemeClr val="lt1"/>
-          </a:fontRef>
-        </p:style>
-        <p:txBody>
-          <a:bodyPr rtlCol="0" anchor="ctr"/>
-          <a:lstStyle>
-            <a:defPPr>
-              <a:defRPr lang="en-US"/>
-            </a:defPPr>
-            <a:lvl1pPr marL="0" algn="l" defTabSz="457200" rtl="0" eaLnBrk="1" latinLnBrk="0" hangingPunct="1">
-              <a:defRPr sz="1800" kern="1200">
-                <a:solidFill>
-                  <a:schemeClr val="lt1"/>
-                </a:solidFill>
-                <a:latin typeface="+mn-lt"/>
-                <a:ea typeface="+mn-ea"/>
-                <a:cs typeface="+mn-cs"/>
-              </a:defRPr>
-            </a:lvl1pPr>
-            <a:lvl2pPr marL="457200" algn="l" defTabSz="457200" rtl="0" eaLnBrk="1" latinLnBrk="0" hangingPunct="1">
-              <a:defRPr sz="1800" kern="1200">
-                <a:solidFill>
-                  <a:schemeClr val="lt1"/>
-                </a:solidFill>
-                <a:latin typeface="+mn-lt"/>
-                <a:ea typeface="+mn-ea"/>
-                <a:cs typeface="+mn-cs"/>
-              </a:defRPr>
-            </a:lvl2pPr>
-            <a:lvl3pPr marL="914400" algn="l" defTabSz="457200" rtl="0" eaLnBrk="1" latinLnBrk="0" hangingPunct="1">
-              <a:defRPr sz="1800" kern="1200">
-                <a:solidFill>
-                  <a:schemeClr val="lt1"/>
-                </a:solidFill>
-                <a:latin typeface="+mn-lt"/>
-                <a:ea typeface="+mn-ea"/>
-                <a:cs typeface="+mn-cs"/>
-              </a:defRPr>
-            </a:lvl3pPr>
-            <a:lvl4pPr marL="1371600" algn="l" defTabSz="457200" rtl="0" eaLnBrk="1" latinLnBrk="0" hangingPunct="1">
-              <a:defRPr sz="1800" kern="1200">
-                <a:solidFill>
-                  <a:schemeClr val="lt1"/>
-                </a:solidFill>
-                <a:latin typeface="+mn-lt"/>
-                <a:ea typeface="+mn-ea"/>
-                <a:cs typeface="+mn-cs"/>
-              </a:defRPr>
-            </a:lvl4pPr>
-            <a:lvl5pPr marL="1828800" algn="l" defTabSz="457200" rtl="0" eaLnBrk="1" latinLnBrk="0" hangingPunct="1">
-              <a:defRPr sz="1800" kern="1200">
-                <a:solidFill>
-                  <a:schemeClr val="lt1"/>
-                </a:solidFill>
-                <a:latin typeface="+mn-lt"/>
-                <a:ea typeface="+mn-ea"/>
-                <a:cs typeface="+mn-cs"/>
-              </a:defRPr>
-            </a:lvl5pPr>
-            <a:lvl6pPr marL="2286000" algn="l" defTabSz="457200" rtl="0" eaLnBrk="1" latinLnBrk="0" hangingPunct="1">
-              <a:defRPr sz="1800" kern="1200">
-                <a:solidFill>
-                  <a:schemeClr val="lt1"/>
-                </a:solidFill>
-                <a:latin typeface="+mn-lt"/>
-                <a:ea typeface="+mn-ea"/>
-                <a:cs typeface="+mn-cs"/>
-              </a:defRPr>
-            </a:lvl6pPr>
-            <a:lvl7pPr marL="2743200" algn="l" defTabSz="457200" rtl="0" eaLnBrk="1" latinLnBrk="0" hangingPunct="1">
-              <a:defRPr sz="1800" kern="1200">
-                <a:solidFill>
-                  <a:schemeClr val="lt1"/>
-                </a:solidFill>
-                <a:latin typeface="+mn-lt"/>
-                <a:ea typeface="+mn-ea"/>
-                <a:cs typeface="+mn-cs"/>
-              </a:defRPr>
-            </a:lvl7pPr>
-            <a:lvl8pPr marL="3200400" algn="l" defTabSz="457200" rtl="0" eaLnBrk="1" latinLnBrk="0" hangingPunct="1">
-              <a:defRPr sz="1800" kern="1200">
-                <a:solidFill>
-                  <a:schemeClr val="lt1"/>
-                </a:solidFill>
-                <a:latin typeface="+mn-lt"/>
-                <a:ea typeface="+mn-ea"/>
-                <a:cs typeface="+mn-cs"/>
-              </a:defRPr>
-            </a:lvl8pPr>
-            <a:lvl9pPr marL="3657600" algn="l" defTabSz="457200" rtl="0" eaLnBrk="1" latinLnBrk="0" hangingPunct="1">
-              <a:defRPr sz="1800" kern="1200">
-                <a:solidFill>
-                  <a:schemeClr val="lt1"/>
-                </a:solidFill>
-                <a:latin typeface="+mn-lt"/>
-                <a:ea typeface="+mn-ea"/>
-                <a:cs typeface="+mn-cs"/>
-              </a:defRPr>
-            </a:lvl9pPr>
-          </a:lstStyle>
-          <a:p>
-            <a:pPr algn="ctr"/>
+              <a:t>Displays financial performance derived from business operations over a specific accounting period by reporting:</a:t>
+            </a:r>
+          </a:p>
+          <a:p>
+            <a:pPr marL="285750" indent="-285750">
+              <a:buFont typeface="Arial" panose="020B0604020202020204" pitchFamily="34" charset="0"/>
+              <a:buChar char="•"/>
+            </a:pPr>
+            <a:r>
+              <a:rPr lang="en-US" b="1" dirty="0"/>
+              <a:t>Revenue</a:t>
+            </a:r>
             <a:r>
               <a:rPr lang="en-US" dirty="0"/>
-              <a:t>Pro-forma / Non-GAAP EPS</a:t>
-            </a:r>
-          </a:p>
-        </p:txBody>
-      </p:sp>
-      <p:sp>
-        <p:nvSpPr>
-          <p:cNvPr id="8" name="TextBox 9">
-            <a:extLst>
-              <a:ext uri="{FF2B5EF4-FFF2-40B4-BE49-F238E27FC236}">
-                <a16:creationId xmlns:a16="http://schemas.microsoft.com/office/drawing/2014/main" id="{C201E47E-B093-1F3E-BF70-FE41FEE57AFA}"/>
-              </a:ext>
-            </a:extLst>
-          </p:cNvPr>
-          <p:cNvSpPr txBox="1"/>
-          <p:nvPr/>
-        </p:nvSpPr>
-        <p:spPr>
-          <a:xfrm>
-            <a:off x="446834" y="3087224"/>
-            <a:ext cx="3675744" cy="1569660"/>
-          </a:xfrm>
-          <a:prstGeom prst="rect">
-            <a:avLst/>
-          </a:prstGeom>
-          <a:noFill/>
-        </p:spPr>
-        <p:txBody>
-          <a:bodyPr wrap="square" rtlCol="0">
-            <a:spAutoFit/>
-          </a:bodyPr>
-          <a:lstStyle>
-            <a:defPPr>
-              <a:defRPr lang="en-US"/>
-            </a:defPPr>
-            <a:lvl1pPr marL="0" algn="l" defTabSz="457200" rtl="0" eaLnBrk="1" latinLnBrk="0" hangingPunct="1">
-              <a:defRPr sz="1800" kern="1200">
-                <a:solidFill>
-                  <a:schemeClr val="tx1"/>
-                </a:solidFill>
-                <a:latin typeface="+mn-lt"/>
-                <a:ea typeface="+mn-ea"/>
-                <a:cs typeface="+mn-cs"/>
-              </a:defRPr>
-            </a:lvl1pPr>
-            <a:lvl2pPr marL="457200" algn="l" defTabSz="457200" rtl="0" eaLnBrk="1" latinLnBrk="0" hangingPunct="1">
-              <a:defRPr sz="1800" kern="1200">
-                <a:solidFill>
-                  <a:schemeClr val="tx1"/>
-                </a:solidFill>
-                <a:latin typeface="+mn-lt"/>
-                <a:ea typeface="+mn-ea"/>
-                <a:cs typeface="+mn-cs"/>
-              </a:defRPr>
-            </a:lvl2pPr>
-            <a:lvl3pPr marL="914400" algn="l" defTabSz="457200" rtl="0" eaLnBrk="1" latinLnBrk="0" hangingPunct="1">
-              <a:defRPr sz="1800" kern="1200">
-                <a:solidFill>
-                  <a:schemeClr val="tx1"/>
-                </a:solidFill>
-                <a:latin typeface="+mn-lt"/>
-                <a:ea typeface="+mn-ea"/>
-                <a:cs typeface="+mn-cs"/>
-              </a:defRPr>
-            </a:lvl3pPr>
-            <a:lvl4pPr marL="1371600" algn="l" defTabSz="457200" rtl="0" eaLnBrk="1" latinLnBrk="0" hangingPunct="1">
-              <a:defRPr sz="1800" kern="1200">
-                <a:solidFill>
-                  <a:schemeClr val="tx1"/>
-                </a:solidFill>
-                <a:latin typeface="+mn-lt"/>
-                <a:ea typeface="+mn-ea"/>
-                <a:cs typeface="+mn-cs"/>
-              </a:defRPr>
-            </a:lvl4pPr>
-            <a:lvl5pPr marL="1828800" algn="l" defTabSz="457200" rtl="0" eaLnBrk="1" latinLnBrk="0" hangingPunct="1">
-              <a:defRPr sz="1800" kern="1200">
-                <a:solidFill>
-                  <a:schemeClr val="tx1"/>
-                </a:solidFill>
-                <a:latin typeface="+mn-lt"/>
-                <a:ea typeface="+mn-ea"/>
-                <a:cs typeface="+mn-cs"/>
-              </a:defRPr>
-            </a:lvl5pPr>
-            <a:lvl6pPr marL="2286000" algn="l" defTabSz="457200" rtl="0" eaLnBrk="1" latinLnBrk="0" hangingPunct="1">
-              <a:defRPr sz="1800" kern="1200">
-                <a:solidFill>
-                  <a:schemeClr val="tx1"/>
-                </a:solidFill>
-                <a:latin typeface="+mn-lt"/>
-                <a:ea typeface="+mn-ea"/>
-                <a:cs typeface="+mn-cs"/>
-              </a:defRPr>
-            </a:lvl6pPr>
-            <a:lvl7pPr marL="2743200" algn="l" defTabSz="457200" rtl="0" eaLnBrk="1" latinLnBrk="0" hangingPunct="1">
-              <a:defRPr sz="1800" kern="1200">
-                <a:solidFill>
-                  <a:schemeClr val="tx1"/>
-                </a:solidFill>
-                <a:latin typeface="+mn-lt"/>
-                <a:ea typeface="+mn-ea"/>
-                <a:cs typeface="+mn-cs"/>
-              </a:defRPr>
-            </a:lvl7pPr>
-            <a:lvl8pPr marL="3200400" algn="l" defTabSz="457200" rtl="0" eaLnBrk="1" latinLnBrk="0" hangingPunct="1">
-              <a:defRPr sz="1800" kern="1200">
-                <a:solidFill>
-                  <a:schemeClr val="tx1"/>
-                </a:solidFill>
-                <a:latin typeface="+mn-lt"/>
-                <a:ea typeface="+mn-ea"/>
-                <a:cs typeface="+mn-cs"/>
-              </a:defRPr>
-            </a:lvl8pPr>
-            <a:lvl9pPr marL="3657600" algn="l" defTabSz="457200" rtl="0" eaLnBrk="1" latinLnBrk="0" hangingPunct="1">
-              <a:defRPr sz="1800" kern="1200">
-                <a:solidFill>
-                  <a:schemeClr val="tx1"/>
-                </a:solidFill>
-                <a:latin typeface="+mn-lt"/>
-                <a:ea typeface="+mn-ea"/>
-                <a:cs typeface="+mn-cs"/>
-              </a:defRPr>
-            </a:lvl9pPr>
-          </a:lstStyle>
+              <a:t>: inflows of economic benefits that increase shareholders equity.</a:t>
+            </a:r>
+          </a:p>
+          <a:p>
+            <a:pPr marL="801688" lvl="1" indent="-285750"/>
+            <a:r>
+              <a:rPr lang="en-US" dirty="0"/>
+              <a:t>e.g., sales revenue, service revenue, fees earned</a:t>
+            </a:r>
+          </a:p>
           <a:p>
             <a:pPr marL="285750" indent="-285750">
-              <a:buFont typeface="Wingdings" pitchFamily="2" charset="2"/>
-              <a:buChar char="ü"/>
+              <a:buFont typeface="Arial" panose="020B0604020202020204" pitchFamily="34" charset="0"/>
+              <a:buChar char="•"/>
             </a:pPr>
             <a:r>
-              <a:rPr lang="en-US" sz="1600" dirty="0"/>
-              <a:t>Measured according to well established rules (GAAP)</a:t>
-            </a:r>
-          </a:p>
-          <a:p>
-            <a:pPr marL="285750" indent="-285750">
-              <a:buFont typeface="Wingdings" pitchFamily="2" charset="2"/>
-              <a:buChar char="ü"/>
-            </a:pPr>
-            <a:r>
-              <a:rPr lang="en-US" sz="1600" dirty="0"/>
-              <a:t>Often comparable across firms</a:t>
-            </a:r>
-          </a:p>
-          <a:p>
-            <a:pPr marL="285750" indent="-285750">
-              <a:buFont typeface="Wingdings" pitchFamily="2" charset="2"/>
-              <a:buChar char="ü"/>
-            </a:pPr>
-            <a:r>
-              <a:rPr lang="en-US" sz="1600" dirty="0"/>
-              <a:t>Includes transitory items, discontinued operations and extraordinary items</a:t>
-            </a:r>
-          </a:p>
-        </p:txBody>
-      </p:sp>
-      <p:sp>
-        <p:nvSpPr>
-          <p:cNvPr id="10" name="TextBox 11">
-            <a:extLst>
-              <a:ext uri="{FF2B5EF4-FFF2-40B4-BE49-F238E27FC236}">
-                <a16:creationId xmlns:a16="http://schemas.microsoft.com/office/drawing/2014/main" id="{15791F63-95C7-C8C2-6E6A-ED2448C41112}"/>
-              </a:ext>
-            </a:extLst>
-          </p:cNvPr>
-          <p:cNvSpPr txBox="1"/>
-          <p:nvPr/>
-        </p:nvSpPr>
-        <p:spPr>
-          <a:xfrm>
-            <a:off x="4816147" y="3087224"/>
-            <a:ext cx="3881019" cy="1815882"/>
-          </a:xfrm>
-          <a:prstGeom prst="rect">
-            <a:avLst/>
-          </a:prstGeom>
-          <a:noFill/>
-        </p:spPr>
-        <p:txBody>
-          <a:bodyPr wrap="square" rtlCol="0">
-            <a:spAutoFit/>
-          </a:bodyPr>
-          <a:lstStyle>
-            <a:defPPr>
-              <a:defRPr lang="en-US"/>
-            </a:defPPr>
-            <a:lvl1pPr marL="0" algn="l" defTabSz="457200" rtl="0" eaLnBrk="1" latinLnBrk="0" hangingPunct="1">
-              <a:defRPr sz="1800" kern="1200">
-                <a:solidFill>
-                  <a:schemeClr val="tx1"/>
-                </a:solidFill>
-                <a:latin typeface="+mn-lt"/>
-                <a:ea typeface="+mn-ea"/>
-                <a:cs typeface="+mn-cs"/>
-              </a:defRPr>
-            </a:lvl1pPr>
-            <a:lvl2pPr marL="457200" algn="l" defTabSz="457200" rtl="0" eaLnBrk="1" latinLnBrk="0" hangingPunct="1">
-              <a:defRPr sz="1800" kern="1200">
-                <a:solidFill>
-                  <a:schemeClr val="tx1"/>
-                </a:solidFill>
-                <a:latin typeface="+mn-lt"/>
-                <a:ea typeface="+mn-ea"/>
-                <a:cs typeface="+mn-cs"/>
-              </a:defRPr>
-            </a:lvl2pPr>
-            <a:lvl3pPr marL="914400" algn="l" defTabSz="457200" rtl="0" eaLnBrk="1" latinLnBrk="0" hangingPunct="1">
-              <a:defRPr sz="1800" kern="1200">
-                <a:solidFill>
-                  <a:schemeClr val="tx1"/>
-                </a:solidFill>
-                <a:latin typeface="+mn-lt"/>
-                <a:ea typeface="+mn-ea"/>
-                <a:cs typeface="+mn-cs"/>
-              </a:defRPr>
-            </a:lvl3pPr>
-            <a:lvl4pPr marL="1371600" algn="l" defTabSz="457200" rtl="0" eaLnBrk="1" latinLnBrk="0" hangingPunct="1">
-              <a:defRPr sz="1800" kern="1200">
-                <a:solidFill>
-                  <a:schemeClr val="tx1"/>
-                </a:solidFill>
-                <a:latin typeface="+mn-lt"/>
-                <a:ea typeface="+mn-ea"/>
-                <a:cs typeface="+mn-cs"/>
-              </a:defRPr>
-            </a:lvl4pPr>
-            <a:lvl5pPr marL="1828800" algn="l" defTabSz="457200" rtl="0" eaLnBrk="1" latinLnBrk="0" hangingPunct="1">
-              <a:defRPr sz="1800" kern="1200">
-                <a:solidFill>
-                  <a:schemeClr val="tx1"/>
-                </a:solidFill>
-                <a:latin typeface="+mn-lt"/>
-                <a:ea typeface="+mn-ea"/>
-                <a:cs typeface="+mn-cs"/>
-              </a:defRPr>
-            </a:lvl5pPr>
-            <a:lvl6pPr marL="2286000" algn="l" defTabSz="457200" rtl="0" eaLnBrk="1" latinLnBrk="0" hangingPunct="1">
-              <a:defRPr sz="1800" kern="1200">
-                <a:solidFill>
-                  <a:schemeClr val="tx1"/>
-                </a:solidFill>
-                <a:latin typeface="+mn-lt"/>
-                <a:ea typeface="+mn-ea"/>
-                <a:cs typeface="+mn-cs"/>
-              </a:defRPr>
-            </a:lvl6pPr>
-            <a:lvl7pPr marL="2743200" algn="l" defTabSz="457200" rtl="0" eaLnBrk="1" latinLnBrk="0" hangingPunct="1">
-              <a:defRPr sz="1800" kern="1200">
-                <a:solidFill>
-                  <a:schemeClr val="tx1"/>
-                </a:solidFill>
-                <a:latin typeface="+mn-lt"/>
-                <a:ea typeface="+mn-ea"/>
-                <a:cs typeface="+mn-cs"/>
-              </a:defRPr>
-            </a:lvl7pPr>
-            <a:lvl8pPr marL="3200400" algn="l" defTabSz="457200" rtl="0" eaLnBrk="1" latinLnBrk="0" hangingPunct="1">
-              <a:defRPr sz="1800" kern="1200">
-                <a:solidFill>
-                  <a:schemeClr val="tx1"/>
-                </a:solidFill>
-                <a:latin typeface="+mn-lt"/>
-                <a:ea typeface="+mn-ea"/>
-                <a:cs typeface="+mn-cs"/>
-              </a:defRPr>
-            </a:lvl8pPr>
-            <a:lvl9pPr marL="3657600" algn="l" defTabSz="457200" rtl="0" eaLnBrk="1" latinLnBrk="0" hangingPunct="1">
-              <a:defRPr sz="1800" kern="1200">
-                <a:solidFill>
-                  <a:schemeClr val="tx1"/>
-                </a:solidFill>
-                <a:latin typeface="+mn-lt"/>
-                <a:ea typeface="+mn-ea"/>
-                <a:cs typeface="+mn-cs"/>
-              </a:defRPr>
-            </a:lvl9pPr>
-          </a:lstStyle>
-          <a:p>
-            <a:pPr marL="285750" indent="-285750">
-              <a:buFont typeface="Wingdings" pitchFamily="2" charset="2"/>
-              <a:buChar char="ü"/>
-            </a:pPr>
-            <a:r>
-              <a:rPr lang="en-US" sz="1600" dirty="0"/>
-              <a:t>Based on managers discretion</a:t>
-            </a:r>
-          </a:p>
-          <a:p>
-            <a:pPr marL="285750" indent="-285750">
-              <a:buFont typeface="Wingdings" pitchFamily="2" charset="2"/>
-              <a:buChar char="ü"/>
-            </a:pPr>
-            <a:r>
-              <a:rPr lang="en-US" sz="1600" dirty="0"/>
-              <a:t>Not often comparable across firms</a:t>
-            </a:r>
-          </a:p>
-          <a:p>
-            <a:pPr marL="285750" indent="-285750">
-              <a:buFont typeface="Wingdings" pitchFamily="2" charset="2"/>
-              <a:buChar char="ü"/>
-            </a:pPr>
-            <a:r>
-              <a:rPr lang="en-US" sz="1600" dirty="0"/>
-              <a:t>Highlighted by the SEC as a potential fraud risk</a:t>
-            </a:r>
-          </a:p>
-          <a:p>
-            <a:pPr marL="285750" indent="-285750">
-              <a:buFont typeface="Wingdings" pitchFamily="2" charset="2"/>
-              <a:buChar char="ü"/>
-            </a:pPr>
-            <a:r>
-              <a:rPr lang="en-US" sz="1600" dirty="0"/>
-              <a:t>Measures core earnings, / the firm’s own measure of performance</a:t>
-            </a:r>
-          </a:p>
-          <a:p>
-            <a:pPr marL="285750" indent="-285750">
-              <a:buFont typeface="Wingdings" pitchFamily="2" charset="2"/>
-              <a:buChar char="ü"/>
-            </a:pPr>
-            <a:r>
-              <a:rPr lang="en-US" sz="1600" dirty="0"/>
-              <a:t>Often used in CEO compensation</a:t>
-            </a:r>
+              <a:rPr lang="en-US" b="1" dirty="0"/>
+              <a:t>Expenses</a:t>
+            </a:r>
+            <a:r>
+              <a:rPr lang="en-US" dirty="0"/>
+              <a:t>: Use or loss of economic benefits that decrease shareholders equity.  </a:t>
+            </a:r>
+          </a:p>
+          <a:p>
+            <a:pPr marL="801688" lvl="1" indent="-285750"/>
+            <a:r>
+              <a:rPr lang="en-US" dirty="0"/>
+              <a:t>Incurred when you use resources to generate revenue, e.g., cost of goods sold, wages and salaries</a:t>
+            </a:r>
+          </a:p>
+          <a:p>
+            <a:r>
+              <a:rPr lang="en-US" dirty="0"/>
+              <a:t>If revenues are greater than expenses, a </a:t>
+            </a:r>
+            <a:r>
+              <a:rPr lang="en-US" b="1" dirty="0">
+                <a:solidFill>
+                  <a:schemeClr val="tx2"/>
+                </a:solidFill>
+              </a:rPr>
+              <a:t>net profit</a:t>
+            </a:r>
+            <a:r>
+              <a:rPr lang="en-US" dirty="0"/>
+              <a:t> is reported</a:t>
+            </a:r>
+          </a:p>
+          <a:p>
+            <a:r>
+              <a:rPr lang="en-US" dirty="0"/>
+              <a:t>If revenues are less than expenses, a </a:t>
+            </a:r>
+            <a:r>
+              <a:rPr lang="en-US" b="1" dirty="0"/>
+              <a:t>net loss</a:t>
+            </a:r>
+            <a:r>
+              <a:rPr lang="en-US" dirty="0"/>
+              <a:t> is reported</a:t>
+            </a:r>
+          </a:p>
+          <a:p>
+            <a:endParaRPr lang="en-US" dirty="0"/>
           </a:p>
         </p:txBody>
       </p:sp>
     </p:spTree>
     <p:extLst>
       <p:ext uri="{BB962C8B-B14F-4D97-AF65-F5344CB8AC3E}">
-        <p14:creationId xmlns:p14="http://schemas.microsoft.com/office/powerpoint/2010/main" val="1980054654"/>
+        <p14:creationId xmlns:p14="http://schemas.microsoft.com/office/powerpoint/2010/main" val="207688830"/>
       </p:ext>
     </p:extLst>
   </p:cSld>
@@ -10215,7 +9802,7 @@
               <a:rPr lang="en-US" dirty="0">
                 <a:latin typeface="+mn-lt"/>
               </a:rPr>
-              <a:t>Analyze Public Disclosures</a:t>
+              <a:t>Analyze Transaction Level Data</a:t>
             </a:r>
           </a:p>
           <a:p>
@@ -10224,7 +9811,7 @@
               <a:rPr lang="en-US" dirty="0">
                 <a:latin typeface="+mn-lt"/>
               </a:rPr>
-              <a:t>Analyze Transaction Level Data</a:t>
+              <a:t>Analyze Public Disclosures</a:t>
             </a:r>
           </a:p>
           <a:p>
@@ -10284,6 +9871,1229 @@
       </p:grpSpPr>
       <p:sp>
         <p:nvSpPr>
+          <p:cNvPr id="2" name="Title 1">
+            <a:extLst>
+              <a:ext uri="{FF2B5EF4-FFF2-40B4-BE49-F238E27FC236}">
+                <a16:creationId xmlns:a16="http://schemas.microsoft.com/office/drawing/2014/main" id="{527B5F98-FC74-2C26-ACBF-C4F61D54928A}"/>
+              </a:ext>
+            </a:extLst>
+          </p:cNvPr>
+          <p:cNvSpPr>
+            <a:spLocks noGrp="1"/>
+          </p:cNvSpPr>
+          <p:nvPr>
+            <p:ph type="title"/>
+          </p:nvPr>
+        </p:nvSpPr>
+        <p:spPr/>
+        <p:txBody>
+          <a:bodyPr/>
+          <a:lstStyle/>
+          <a:p>
+            <a:r>
+              <a:rPr lang="en-US" dirty="0"/>
+              <a:t>Analyzing Public Disclosures</a:t>
+            </a:r>
+          </a:p>
+        </p:txBody>
+      </p:sp>
+      <p:pic>
+        <p:nvPicPr>
+          <p:cNvPr id="5" name="Picture 4" descr="Histogram displaying frequency distribution of earnings intervals ranging from -0.25 to 0.35, with a notable spike just above zero around 0.05. The graph highlights a sharp increase in frequency at positive earnings intervals, suggesting clustering or concentration of earnings data near this value.">
+            <a:extLst>
+              <a:ext uri="{FF2B5EF4-FFF2-40B4-BE49-F238E27FC236}">
+                <a16:creationId xmlns:a16="http://schemas.microsoft.com/office/drawing/2014/main" id="{48EEAA61-C874-5B4A-43BB-CC3270324E1C}"/>
+              </a:ext>
+            </a:extLst>
+          </p:cNvPr>
+          <p:cNvPicPr>
+            <a:picLocks noChangeAspect="1" noChangeArrowheads="1"/>
+          </p:cNvPicPr>
+          <p:nvPr/>
+        </p:nvPicPr>
+        <p:blipFill>
+          <a:blip r:embed="rId3" cstate="print"/>
+          <a:srcRect/>
+          <a:stretch>
+            <a:fillRect/>
+          </a:stretch>
+        </p:blipFill>
+        <p:spPr bwMode="auto">
+          <a:xfrm>
+            <a:off x="1562100" y="924119"/>
+            <a:ext cx="6019800" cy="3581400"/>
+          </a:xfrm>
+          <a:prstGeom prst="rect">
+            <a:avLst/>
+          </a:prstGeom>
+          <a:noFill/>
+          <a:ln w="9525">
+            <a:noFill/>
+            <a:miter lim="800000"/>
+            <a:headEnd/>
+            <a:tailEnd/>
+          </a:ln>
+        </p:spPr>
+      </p:pic>
+      <p:sp>
+        <p:nvSpPr>
+          <p:cNvPr id="6" name="Rectangle 5">
+            <a:extLst>
+              <a:ext uri="{FF2B5EF4-FFF2-40B4-BE49-F238E27FC236}">
+                <a16:creationId xmlns:a16="http://schemas.microsoft.com/office/drawing/2014/main" id="{592A8537-E58C-7A75-5030-DEF9AF6E2AC5}"/>
+              </a:ext>
+            </a:extLst>
+          </p:cNvPr>
+          <p:cNvSpPr>
+            <a:spLocks noChangeArrowheads="1"/>
+          </p:cNvSpPr>
+          <p:nvPr/>
+        </p:nvSpPr>
+        <p:spPr bwMode="auto">
+          <a:xfrm>
+            <a:off x="122076" y="4505519"/>
+            <a:ext cx="8763000" cy="533400"/>
+          </a:xfrm>
+          <a:prstGeom prst="rect">
+            <a:avLst/>
+          </a:prstGeom>
+          <a:noFill/>
+          <a:ln w="9525">
+            <a:noFill/>
+            <a:miter lim="800000"/>
+            <a:headEnd/>
+            <a:tailEnd/>
+          </a:ln>
+        </p:spPr>
+        <p:txBody>
+          <a:bodyPr/>
+          <a:lstStyle>
+            <a:defPPr>
+              <a:defRPr lang="en-US"/>
+            </a:defPPr>
+            <a:lvl1pPr marL="0" algn="l" defTabSz="457200" rtl="0" eaLnBrk="1" latinLnBrk="0" hangingPunct="1">
+              <a:defRPr sz="1800" kern="1200">
+                <a:solidFill>
+                  <a:schemeClr val="tx1"/>
+                </a:solidFill>
+                <a:latin typeface="+mn-lt"/>
+                <a:ea typeface="+mn-ea"/>
+                <a:cs typeface="+mn-cs"/>
+              </a:defRPr>
+            </a:lvl1pPr>
+            <a:lvl2pPr marL="457200" algn="l" defTabSz="457200" rtl="0" eaLnBrk="1" latinLnBrk="0" hangingPunct="1">
+              <a:defRPr sz="1800" kern="1200">
+                <a:solidFill>
+                  <a:schemeClr val="tx1"/>
+                </a:solidFill>
+                <a:latin typeface="+mn-lt"/>
+                <a:ea typeface="+mn-ea"/>
+                <a:cs typeface="+mn-cs"/>
+              </a:defRPr>
+            </a:lvl2pPr>
+            <a:lvl3pPr marL="914400" algn="l" defTabSz="457200" rtl="0" eaLnBrk="1" latinLnBrk="0" hangingPunct="1">
+              <a:defRPr sz="1800" kern="1200">
+                <a:solidFill>
+                  <a:schemeClr val="tx1"/>
+                </a:solidFill>
+                <a:latin typeface="+mn-lt"/>
+                <a:ea typeface="+mn-ea"/>
+                <a:cs typeface="+mn-cs"/>
+              </a:defRPr>
+            </a:lvl3pPr>
+            <a:lvl4pPr marL="1371600" algn="l" defTabSz="457200" rtl="0" eaLnBrk="1" latinLnBrk="0" hangingPunct="1">
+              <a:defRPr sz="1800" kern="1200">
+                <a:solidFill>
+                  <a:schemeClr val="tx1"/>
+                </a:solidFill>
+                <a:latin typeface="+mn-lt"/>
+                <a:ea typeface="+mn-ea"/>
+                <a:cs typeface="+mn-cs"/>
+              </a:defRPr>
+            </a:lvl4pPr>
+            <a:lvl5pPr marL="1828800" algn="l" defTabSz="457200" rtl="0" eaLnBrk="1" latinLnBrk="0" hangingPunct="1">
+              <a:defRPr sz="1800" kern="1200">
+                <a:solidFill>
+                  <a:schemeClr val="tx1"/>
+                </a:solidFill>
+                <a:latin typeface="+mn-lt"/>
+                <a:ea typeface="+mn-ea"/>
+                <a:cs typeface="+mn-cs"/>
+              </a:defRPr>
+            </a:lvl5pPr>
+            <a:lvl6pPr marL="2286000" algn="l" defTabSz="457200" rtl="0" eaLnBrk="1" latinLnBrk="0" hangingPunct="1">
+              <a:defRPr sz="1800" kern="1200">
+                <a:solidFill>
+                  <a:schemeClr val="tx1"/>
+                </a:solidFill>
+                <a:latin typeface="+mn-lt"/>
+                <a:ea typeface="+mn-ea"/>
+                <a:cs typeface="+mn-cs"/>
+              </a:defRPr>
+            </a:lvl6pPr>
+            <a:lvl7pPr marL="2743200" algn="l" defTabSz="457200" rtl="0" eaLnBrk="1" latinLnBrk="0" hangingPunct="1">
+              <a:defRPr sz="1800" kern="1200">
+                <a:solidFill>
+                  <a:schemeClr val="tx1"/>
+                </a:solidFill>
+                <a:latin typeface="+mn-lt"/>
+                <a:ea typeface="+mn-ea"/>
+                <a:cs typeface="+mn-cs"/>
+              </a:defRPr>
+            </a:lvl7pPr>
+            <a:lvl8pPr marL="3200400" algn="l" defTabSz="457200" rtl="0" eaLnBrk="1" latinLnBrk="0" hangingPunct="1">
+              <a:defRPr sz="1800" kern="1200">
+                <a:solidFill>
+                  <a:schemeClr val="tx1"/>
+                </a:solidFill>
+                <a:latin typeface="+mn-lt"/>
+                <a:ea typeface="+mn-ea"/>
+                <a:cs typeface="+mn-cs"/>
+              </a:defRPr>
+            </a:lvl8pPr>
+            <a:lvl9pPr marL="3657600" algn="l" defTabSz="457200" rtl="0" eaLnBrk="1" latinLnBrk="0" hangingPunct="1">
+              <a:defRPr sz="1800" kern="1200">
+                <a:solidFill>
+                  <a:schemeClr val="tx1"/>
+                </a:solidFill>
+                <a:latin typeface="+mn-lt"/>
+                <a:ea typeface="+mn-ea"/>
+                <a:cs typeface="+mn-cs"/>
+              </a:defRPr>
+            </a:lvl9pPr>
+          </a:lstStyle>
+          <a:p>
+            <a:pPr marL="342900" indent="-342900" eaLnBrk="1" hangingPunct="1">
+              <a:spcBef>
+                <a:spcPct val="20000"/>
+              </a:spcBef>
+            </a:pPr>
+            <a:r>
+              <a:rPr lang="en-US" sz="2000" b="1" dirty="0"/>
+              <a:t>Source: Burgstahler and </a:t>
+            </a:r>
+            <a:r>
+              <a:rPr lang="en-US" sz="2000" b="1" dirty="0" err="1"/>
+              <a:t>Dichev</a:t>
+            </a:r>
+            <a:r>
+              <a:rPr lang="en-US" sz="2000" b="1" dirty="0"/>
+              <a:t>, 1997 </a:t>
+            </a:r>
+            <a:r>
+              <a:rPr lang="en-US" sz="2000" b="1" i="1" dirty="0"/>
+              <a:t>J. of Accounting &amp; Economics</a:t>
+            </a:r>
+            <a:r>
+              <a:rPr lang="en-US" sz="3200" b="1" dirty="0"/>
+              <a:t> </a:t>
+            </a:r>
+          </a:p>
+        </p:txBody>
+      </p:sp>
+    </p:spTree>
+    <p:extLst>
+      <p:ext uri="{BB962C8B-B14F-4D97-AF65-F5344CB8AC3E}">
+        <p14:creationId xmlns:p14="http://schemas.microsoft.com/office/powerpoint/2010/main" val="1125645462"/>
+      </p:ext>
+    </p:extLst>
+  </p:cSld>
+  <p:clrMapOvr>
+    <a:masterClrMapping/>
+  </p:clrMapOvr>
+  <p:transition>
+    <p:fade/>
+  </p:transition>
+</p:sld>
+</file>
+
+<file path=ppt/slides/slide21.xml><?xml version="1.0" encoding="utf-8"?>
+<p:sld xmlns:a="http://schemas.openxmlformats.org/drawingml/2006/main" xmlns:r="http://schemas.openxmlformats.org/officeDocument/2006/relationships" xmlns:p="http://schemas.openxmlformats.org/presentationml/2006/main">
+  <p:cSld>
+    <p:spTree>
+      <p:nvGrpSpPr>
+        <p:cNvPr id="1" name=""/>
+        <p:cNvGrpSpPr/>
+        <p:nvPr/>
+      </p:nvGrpSpPr>
+      <p:grpSpPr>
+        <a:xfrm>
+          <a:off x="0" y="0"/>
+          <a:ext cx="0" cy="0"/>
+          <a:chOff x="0" y="0"/>
+          <a:chExt cx="0" cy="0"/>
+        </a:xfrm>
+      </p:grpSpPr>
+      <p:sp>
+        <p:nvSpPr>
+          <p:cNvPr id="2" name="Title 1">
+            <a:extLst>
+              <a:ext uri="{FF2B5EF4-FFF2-40B4-BE49-F238E27FC236}">
+                <a16:creationId xmlns:a16="http://schemas.microsoft.com/office/drawing/2014/main" id="{AED3BC00-A0D4-5953-1138-165E477B9F08}"/>
+              </a:ext>
+            </a:extLst>
+          </p:cNvPr>
+          <p:cNvSpPr>
+            <a:spLocks noGrp="1"/>
+          </p:cNvSpPr>
+          <p:nvPr>
+            <p:ph type="title"/>
+          </p:nvPr>
+        </p:nvSpPr>
+        <p:spPr/>
+        <p:txBody>
+          <a:bodyPr/>
+          <a:lstStyle/>
+          <a:p>
+            <a:r>
+              <a:rPr lang="en-US" dirty="0"/>
+              <a:t>Analyzing Public Disclosures</a:t>
+            </a:r>
+          </a:p>
+        </p:txBody>
+      </p:sp>
+      <p:sp>
+        <p:nvSpPr>
+          <p:cNvPr id="4" name="Text Placeholder 3">
+            <a:extLst>
+              <a:ext uri="{FF2B5EF4-FFF2-40B4-BE49-F238E27FC236}">
+                <a16:creationId xmlns:a16="http://schemas.microsoft.com/office/drawing/2014/main" id="{059C59D9-D7D2-844E-9697-C6CE6A44AD29}"/>
+              </a:ext>
+            </a:extLst>
+          </p:cNvPr>
+          <p:cNvSpPr>
+            <a:spLocks noGrp="1"/>
+          </p:cNvSpPr>
+          <p:nvPr>
+            <p:ph type="body" sz="quarter" idx="13"/>
+          </p:nvPr>
+        </p:nvSpPr>
+        <p:spPr/>
+        <p:txBody>
+          <a:bodyPr/>
+          <a:lstStyle/>
+          <a:p>
+            <a:r>
+              <a:rPr lang="en-US" dirty="0"/>
+              <a:t>Team Activity:</a:t>
+            </a:r>
+          </a:p>
+          <a:p>
+            <a:endParaRPr lang="en-US" dirty="0"/>
+          </a:p>
+          <a:p>
+            <a:r>
+              <a:rPr lang="en-US" b="1" dirty="0">
+                <a:solidFill>
+                  <a:schemeClr val="tx2"/>
+                </a:solidFill>
+              </a:rPr>
+              <a:t>Part 1: Analysis of Marriott’s Public Disclosures (as a class).</a:t>
+            </a:r>
+          </a:p>
+          <a:p>
+            <a:r>
+              <a:rPr lang="en-US" dirty="0">
+                <a:hlinkClick r:id="rId3"/>
+              </a:rPr>
+              <a:t>Investor Relations | Marriott International</a:t>
+            </a:r>
+            <a:endParaRPr lang="en-US" dirty="0"/>
+          </a:p>
+          <a:p>
+            <a:endParaRPr lang="en-US" dirty="0"/>
+          </a:p>
+          <a:p>
+            <a:r>
+              <a:rPr lang="en-US" dirty="0"/>
+              <a:t>Part 2: Analysis of other company filings (in teams)</a:t>
+            </a:r>
+          </a:p>
+          <a:p>
+            <a:endParaRPr lang="en-US" dirty="0"/>
+          </a:p>
+          <a:p>
+            <a:endParaRPr lang="en-US" dirty="0"/>
+          </a:p>
+        </p:txBody>
+      </p:sp>
+    </p:spTree>
+    <p:extLst>
+      <p:ext uri="{BB962C8B-B14F-4D97-AF65-F5344CB8AC3E}">
+        <p14:creationId xmlns:p14="http://schemas.microsoft.com/office/powerpoint/2010/main" val="3815325191"/>
+      </p:ext>
+    </p:extLst>
+  </p:cSld>
+  <p:clrMapOvr>
+    <a:masterClrMapping/>
+  </p:clrMapOvr>
+  <p:transition>
+    <p:fade/>
+  </p:transition>
+</p:sld>
+</file>
+
+<file path=ppt/slides/slide22.xml><?xml version="1.0" encoding="utf-8"?>
+<p:sld xmlns:a="http://schemas.openxmlformats.org/drawingml/2006/main" xmlns:r="http://schemas.openxmlformats.org/officeDocument/2006/relationships" xmlns:p="http://schemas.openxmlformats.org/presentationml/2006/main">
+  <p:cSld>
+    <p:spTree>
+      <p:nvGrpSpPr>
+        <p:cNvPr id="1" name=""/>
+        <p:cNvGrpSpPr/>
+        <p:nvPr/>
+      </p:nvGrpSpPr>
+      <p:grpSpPr>
+        <a:xfrm>
+          <a:off x="0" y="0"/>
+          <a:ext cx="0" cy="0"/>
+          <a:chOff x="0" y="0"/>
+          <a:chExt cx="0" cy="0"/>
+        </a:xfrm>
+      </p:grpSpPr>
+      <p:sp>
+        <p:nvSpPr>
+          <p:cNvPr id="2" name="Title 1">
+            <a:extLst>
+              <a:ext uri="{FF2B5EF4-FFF2-40B4-BE49-F238E27FC236}">
+                <a16:creationId xmlns:a16="http://schemas.microsoft.com/office/drawing/2014/main" id="{4769DE2C-BE19-0B42-DC7A-BF2BB9CFA115}"/>
+              </a:ext>
+            </a:extLst>
+          </p:cNvPr>
+          <p:cNvSpPr>
+            <a:spLocks noGrp="1"/>
+          </p:cNvSpPr>
+          <p:nvPr>
+            <p:ph type="title"/>
+          </p:nvPr>
+        </p:nvSpPr>
+        <p:spPr/>
+        <p:txBody>
+          <a:bodyPr/>
+          <a:lstStyle/>
+          <a:p>
+            <a:r>
+              <a:rPr lang="en-US" dirty="0"/>
+              <a:t>Marriott</a:t>
+            </a:r>
+          </a:p>
+        </p:txBody>
+      </p:sp>
+      <p:sp>
+        <p:nvSpPr>
+          <p:cNvPr id="4" name="Text Placeholder 3">
+            <a:extLst>
+              <a:ext uri="{FF2B5EF4-FFF2-40B4-BE49-F238E27FC236}">
+                <a16:creationId xmlns:a16="http://schemas.microsoft.com/office/drawing/2014/main" id="{9A881CF1-2D11-75E6-B1A0-AEEC50B97400}"/>
+              </a:ext>
+            </a:extLst>
+          </p:cNvPr>
+          <p:cNvSpPr>
+            <a:spLocks noGrp="1"/>
+          </p:cNvSpPr>
+          <p:nvPr>
+            <p:ph type="body" sz="quarter" idx="13"/>
+          </p:nvPr>
+        </p:nvSpPr>
+        <p:spPr/>
+        <p:txBody>
+          <a:bodyPr/>
+          <a:lstStyle/>
+          <a:p>
+            <a:endParaRPr lang="en-US"/>
+          </a:p>
+        </p:txBody>
+      </p:sp>
+      <p:pic>
+        <p:nvPicPr>
+          <p:cNvPr id="6" name="Picture 5" descr="Line chart showing Marriott International, Inc. (MAR) stock price performance over six months, with a green highlight indicating a 24.40% increase. Chart features yellow key event markers, a mountain-style price graph in teal, volume bars in gray, and current price labeled at 331.30 with a -0.65% change. A yellow rectangle is highlighting the visible spike in market price and trading volume around the most recent earnings announcement.">
+            <a:extLst>
+              <a:ext uri="{FF2B5EF4-FFF2-40B4-BE49-F238E27FC236}">
+                <a16:creationId xmlns:a16="http://schemas.microsoft.com/office/drawing/2014/main" id="{701B3D9A-91D6-F04A-3A38-61AA6C5BC668}"/>
+              </a:ext>
+            </a:extLst>
+          </p:cNvPr>
+          <p:cNvPicPr>
+            <a:picLocks noChangeAspect="1"/>
+          </p:cNvPicPr>
+          <p:nvPr/>
+        </p:nvPicPr>
+        <p:blipFill>
+          <a:blip r:embed="rId3"/>
+          <a:stretch>
+            <a:fillRect/>
+          </a:stretch>
+        </p:blipFill>
+        <p:spPr>
+          <a:xfrm>
+            <a:off x="469446" y="893502"/>
+            <a:ext cx="7868816" cy="3649306"/>
+          </a:xfrm>
+          <a:prstGeom prst="rect">
+            <a:avLst/>
+          </a:prstGeom>
+        </p:spPr>
+      </p:pic>
+      <p:sp>
+        <p:nvSpPr>
+          <p:cNvPr id="7" name="Rectangle 6">
+            <a:extLst>
+              <a:ext uri="{FF2B5EF4-FFF2-40B4-BE49-F238E27FC236}">
+                <a16:creationId xmlns:a16="http://schemas.microsoft.com/office/drawing/2014/main" id="{1FB19BE2-3A08-E9BA-ACEE-9C6721C88528}"/>
+              </a:ext>
+            </a:extLst>
+          </p:cNvPr>
+          <p:cNvSpPr/>
+          <p:nvPr/>
+        </p:nvSpPr>
+        <p:spPr>
+          <a:xfrm>
+            <a:off x="5417976" y="2289110"/>
+            <a:ext cx="304800" cy="1960888"/>
+          </a:xfrm>
+          <a:prstGeom prst="rect">
+            <a:avLst/>
+          </a:prstGeom>
+          <a:noFill/>
+          <a:ln w="28575">
+            <a:solidFill>
+              <a:srgbClr val="C09F29"/>
+            </a:solidFill>
+          </a:ln>
+          <a:effectLst/>
+        </p:spPr>
+        <p:style>
+          <a:lnRef idx="1">
+            <a:schemeClr val="accent1"/>
+          </a:lnRef>
+          <a:fillRef idx="3">
+            <a:schemeClr val="accent1"/>
+          </a:fillRef>
+          <a:effectRef idx="2">
+            <a:schemeClr val="accent1"/>
+          </a:effectRef>
+          <a:fontRef idx="minor">
+            <a:schemeClr val="lt1"/>
+          </a:fontRef>
+        </p:style>
+        <p:txBody>
+          <a:bodyPr rtlCol="0" anchor="ctr"/>
+          <a:lstStyle/>
+          <a:p>
+            <a:pPr algn="ctr"/>
+            <a:endParaRPr lang="en-US"/>
+          </a:p>
+        </p:txBody>
+      </p:sp>
+    </p:spTree>
+    <p:extLst>
+      <p:ext uri="{BB962C8B-B14F-4D97-AF65-F5344CB8AC3E}">
+        <p14:creationId xmlns:p14="http://schemas.microsoft.com/office/powerpoint/2010/main" val="3208249095"/>
+      </p:ext>
+    </p:extLst>
+  </p:cSld>
+  <p:clrMapOvr>
+    <a:masterClrMapping/>
+  </p:clrMapOvr>
+  <p:transition>
+    <p:fade/>
+  </p:transition>
+</p:sld>
+</file>
+
+<file path=ppt/slides/slide23.xml><?xml version="1.0" encoding="utf-8"?>
+<p:sld xmlns:a="http://schemas.openxmlformats.org/drawingml/2006/main" xmlns:r="http://schemas.openxmlformats.org/officeDocument/2006/relationships" xmlns:p="http://schemas.openxmlformats.org/presentationml/2006/main">
+  <p:cSld>
+    <p:spTree>
+      <p:nvGrpSpPr>
+        <p:cNvPr id="1" name=""/>
+        <p:cNvGrpSpPr/>
+        <p:nvPr/>
+      </p:nvGrpSpPr>
+      <p:grpSpPr>
+        <a:xfrm>
+          <a:off x="0" y="0"/>
+          <a:ext cx="0" cy="0"/>
+          <a:chOff x="0" y="0"/>
+          <a:chExt cx="0" cy="0"/>
+        </a:xfrm>
+      </p:grpSpPr>
+      <p:sp>
+        <p:nvSpPr>
+          <p:cNvPr id="2" name="Title 1">
+            <a:extLst>
+              <a:ext uri="{FF2B5EF4-FFF2-40B4-BE49-F238E27FC236}">
+                <a16:creationId xmlns:a16="http://schemas.microsoft.com/office/drawing/2014/main" id="{EC14D61C-5264-4857-8BB3-1316C2A05287}"/>
+              </a:ext>
+            </a:extLst>
+          </p:cNvPr>
+          <p:cNvSpPr>
+            <a:spLocks noGrp="1"/>
+          </p:cNvSpPr>
+          <p:nvPr>
+            <p:ph type="title"/>
+          </p:nvPr>
+        </p:nvSpPr>
+        <p:spPr/>
+        <p:txBody>
+          <a:bodyPr/>
+          <a:lstStyle/>
+          <a:p>
+            <a:r>
+              <a:rPr lang="en-US" dirty="0"/>
+              <a:t>GAAP and Non-GAAP</a:t>
+            </a:r>
+          </a:p>
+        </p:txBody>
+      </p:sp>
+      <p:sp>
+        <p:nvSpPr>
+          <p:cNvPr id="5" name="Rectangle 4">
+            <a:extLst>
+              <a:ext uri="{FF2B5EF4-FFF2-40B4-BE49-F238E27FC236}">
+                <a16:creationId xmlns:a16="http://schemas.microsoft.com/office/drawing/2014/main" id="{58B5FCE9-EC7C-8690-7021-D6A23CAA8568}"/>
+              </a:ext>
+            </a:extLst>
+          </p:cNvPr>
+          <p:cNvSpPr/>
+          <p:nvPr/>
+        </p:nvSpPr>
+        <p:spPr>
+          <a:xfrm>
+            <a:off x="544805" y="1009863"/>
+            <a:ext cx="3479802" cy="1295400"/>
+          </a:xfrm>
+          <a:prstGeom prst="rect">
+            <a:avLst/>
+          </a:prstGeom>
+          <a:solidFill>
+            <a:schemeClr val="tx2"/>
+          </a:solidFill>
+        </p:spPr>
+        <p:style>
+          <a:lnRef idx="1">
+            <a:schemeClr val="accent1"/>
+          </a:lnRef>
+          <a:fillRef idx="3">
+            <a:schemeClr val="accent1"/>
+          </a:fillRef>
+          <a:effectRef idx="2">
+            <a:schemeClr val="accent1"/>
+          </a:effectRef>
+          <a:fontRef idx="minor">
+            <a:schemeClr val="lt1"/>
+          </a:fontRef>
+        </p:style>
+        <p:txBody>
+          <a:bodyPr rtlCol="0" anchor="ctr"/>
+          <a:lstStyle>
+            <a:defPPr>
+              <a:defRPr lang="en-US"/>
+            </a:defPPr>
+            <a:lvl1pPr marL="0" algn="l" defTabSz="457200" rtl="0" eaLnBrk="1" latinLnBrk="0" hangingPunct="1">
+              <a:defRPr sz="1800" kern="1200">
+                <a:solidFill>
+                  <a:schemeClr val="lt1"/>
+                </a:solidFill>
+                <a:latin typeface="+mn-lt"/>
+                <a:ea typeface="+mn-ea"/>
+                <a:cs typeface="+mn-cs"/>
+              </a:defRPr>
+            </a:lvl1pPr>
+            <a:lvl2pPr marL="457200" algn="l" defTabSz="457200" rtl="0" eaLnBrk="1" latinLnBrk="0" hangingPunct="1">
+              <a:defRPr sz="1800" kern="1200">
+                <a:solidFill>
+                  <a:schemeClr val="lt1"/>
+                </a:solidFill>
+                <a:latin typeface="+mn-lt"/>
+                <a:ea typeface="+mn-ea"/>
+                <a:cs typeface="+mn-cs"/>
+              </a:defRPr>
+            </a:lvl2pPr>
+            <a:lvl3pPr marL="914400" algn="l" defTabSz="457200" rtl="0" eaLnBrk="1" latinLnBrk="0" hangingPunct="1">
+              <a:defRPr sz="1800" kern="1200">
+                <a:solidFill>
+                  <a:schemeClr val="lt1"/>
+                </a:solidFill>
+                <a:latin typeface="+mn-lt"/>
+                <a:ea typeface="+mn-ea"/>
+                <a:cs typeface="+mn-cs"/>
+              </a:defRPr>
+            </a:lvl3pPr>
+            <a:lvl4pPr marL="1371600" algn="l" defTabSz="457200" rtl="0" eaLnBrk="1" latinLnBrk="0" hangingPunct="1">
+              <a:defRPr sz="1800" kern="1200">
+                <a:solidFill>
+                  <a:schemeClr val="lt1"/>
+                </a:solidFill>
+                <a:latin typeface="+mn-lt"/>
+                <a:ea typeface="+mn-ea"/>
+                <a:cs typeface="+mn-cs"/>
+              </a:defRPr>
+            </a:lvl4pPr>
+            <a:lvl5pPr marL="1828800" algn="l" defTabSz="457200" rtl="0" eaLnBrk="1" latinLnBrk="0" hangingPunct="1">
+              <a:defRPr sz="1800" kern="1200">
+                <a:solidFill>
+                  <a:schemeClr val="lt1"/>
+                </a:solidFill>
+                <a:latin typeface="+mn-lt"/>
+                <a:ea typeface="+mn-ea"/>
+                <a:cs typeface="+mn-cs"/>
+              </a:defRPr>
+            </a:lvl5pPr>
+            <a:lvl6pPr marL="2286000" algn="l" defTabSz="457200" rtl="0" eaLnBrk="1" latinLnBrk="0" hangingPunct="1">
+              <a:defRPr sz="1800" kern="1200">
+                <a:solidFill>
+                  <a:schemeClr val="lt1"/>
+                </a:solidFill>
+                <a:latin typeface="+mn-lt"/>
+                <a:ea typeface="+mn-ea"/>
+                <a:cs typeface="+mn-cs"/>
+              </a:defRPr>
+            </a:lvl6pPr>
+            <a:lvl7pPr marL="2743200" algn="l" defTabSz="457200" rtl="0" eaLnBrk="1" latinLnBrk="0" hangingPunct="1">
+              <a:defRPr sz="1800" kern="1200">
+                <a:solidFill>
+                  <a:schemeClr val="lt1"/>
+                </a:solidFill>
+                <a:latin typeface="+mn-lt"/>
+                <a:ea typeface="+mn-ea"/>
+                <a:cs typeface="+mn-cs"/>
+              </a:defRPr>
+            </a:lvl7pPr>
+            <a:lvl8pPr marL="3200400" algn="l" defTabSz="457200" rtl="0" eaLnBrk="1" latinLnBrk="0" hangingPunct="1">
+              <a:defRPr sz="1800" kern="1200">
+                <a:solidFill>
+                  <a:schemeClr val="lt1"/>
+                </a:solidFill>
+                <a:latin typeface="+mn-lt"/>
+                <a:ea typeface="+mn-ea"/>
+                <a:cs typeface="+mn-cs"/>
+              </a:defRPr>
+            </a:lvl8pPr>
+            <a:lvl9pPr marL="3657600" algn="l" defTabSz="457200" rtl="0" eaLnBrk="1" latinLnBrk="0" hangingPunct="1">
+              <a:defRPr sz="1800" kern="1200">
+                <a:solidFill>
+                  <a:schemeClr val="lt1"/>
+                </a:solidFill>
+                <a:latin typeface="+mn-lt"/>
+                <a:ea typeface="+mn-ea"/>
+                <a:cs typeface="+mn-cs"/>
+              </a:defRPr>
+            </a:lvl9pPr>
+          </a:lstStyle>
+          <a:p>
+            <a:pPr algn="ctr"/>
+            <a:r>
+              <a:rPr lang="en-US" dirty="0"/>
+              <a:t>GAAP EPS</a:t>
+            </a:r>
+          </a:p>
+        </p:txBody>
+      </p:sp>
+      <p:sp>
+        <p:nvSpPr>
+          <p:cNvPr id="6" name="Rectangle 5">
+            <a:extLst>
+              <a:ext uri="{FF2B5EF4-FFF2-40B4-BE49-F238E27FC236}">
+                <a16:creationId xmlns:a16="http://schemas.microsoft.com/office/drawing/2014/main" id="{784404BA-3037-CF1F-8E6B-0C4F0F356A6C}"/>
+              </a:ext>
+            </a:extLst>
+          </p:cNvPr>
+          <p:cNvSpPr/>
+          <p:nvPr/>
+        </p:nvSpPr>
+        <p:spPr>
+          <a:xfrm>
+            <a:off x="4780899" y="1009863"/>
+            <a:ext cx="3386739" cy="1295400"/>
+          </a:xfrm>
+          <a:prstGeom prst="rect">
+            <a:avLst/>
+          </a:prstGeom>
+          <a:solidFill>
+            <a:schemeClr val="tx2"/>
+          </a:solidFill>
+        </p:spPr>
+        <p:style>
+          <a:lnRef idx="1">
+            <a:schemeClr val="accent1"/>
+          </a:lnRef>
+          <a:fillRef idx="3">
+            <a:schemeClr val="accent1"/>
+          </a:fillRef>
+          <a:effectRef idx="2">
+            <a:schemeClr val="accent1"/>
+          </a:effectRef>
+          <a:fontRef idx="minor">
+            <a:schemeClr val="lt1"/>
+          </a:fontRef>
+        </p:style>
+        <p:txBody>
+          <a:bodyPr rtlCol="0" anchor="ctr"/>
+          <a:lstStyle>
+            <a:defPPr>
+              <a:defRPr lang="en-US"/>
+            </a:defPPr>
+            <a:lvl1pPr marL="0" algn="l" defTabSz="457200" rtl="0" eaLnBrk="1" latinLnBrk="0" hangingPunct="1">
+              <a:defRPr sz="1800" kern="1200">
+                <a:solidFill>
+                  <a:schemeClr val="lt1"/>
+                </a:solidFill>
+                <a:latin typeface="+mn-lt"/>
+                <a:ea typeface="+mn-ea"/>
+                <a:cs typeface="+mn-cs"/>
+              </a:defRPr>
+            </a:lvl1pPr>
+            <a:lvl2pPr marL="457200" algn="l" defTabSz="457200" rtl="0" eaLnBrk="1" latinLnBrk="0" hangingPunct="1">
+              <a:defRPr sz="1800" kern="1200">
+                <a:solidFill>
+                  <a:schemeClr val="lt1"/>
+                </a:solidFill>
+                <a:latin typeface="+mn-lt"/>
+                <a:ea typeface="+mn-ea"/>
+                <a:cs typeface="+mn-cs"/>
+              </a:defRPr>
+            </a:lvl2pPr>
+            <a:lvl3pPr marL="914400" algn="l" defTabSz="457200" rtl="0" eaLnBrk="1" latinLnBrk="0" hangingPunct="1">
+              <a:defRPr sz="1800" kern="1200">
+                <a:solidFill>
+                  <a:schemeClr val="lt1"/>
+                </a:solidFill>
+                <a:latin typeface="+mn-lt"/>
+                <a:ea typeface="+mn-ea"/>
+                <a:cs typeface="+mn-cs"/>
+              </a:defRPr>
+            </a:lvl3pPr>
+            <a:lvl4pPr marL="1371600" algn="l" defTabSz="457200" rtl="0" eaLnBrk="1" latinLnBrk="0" hangingPunct="1">
+              <a:defRPr sz="1800" kern="1200">
+                <a:solidFill>
+                  <a:schemeClr val="lt1"/>
+                </a:solidFill>
+                <a:latin typeface="+mn-lt"/>
+                <a:ea typeface="+mn-ea"/>
+                <a:cs typeface="+mn-cs"/>
+              </a:defRPr>
+            </a:lvl4pPr>
+            <a:lvl5pPr marL="1828800" algn="l" defTabSz="457200" rtl="0" eaLnBrk="1" latinLnBrk="0" hangingPunct="1">
+              <a:defRPr sz="1800" kern="1200">
+                <a:solidFill>
+                  <a:schemeClr val="lt1"/>
+                </a:solidFill>
+                <a:latin typeface="+mn-lt"/>
+                <a:ea typeface="+mn-ea"/>
+                <a:cs typeface="+mn-cs"/>
+              </a:defRPr>
+            </a:lvl5pPr>
+            <a:lvl6pPr marL="2286000" algn="l" defTabSz="457200" rtl="0" eaLnBrk="1" latinLnBrk="0" hangingPunct="1">
+              <a:defRPr sz="1800" kern="1200">
+                <a:solidFill>
+                  <a:schemeClr val="lt1"/>
+                </a:solidFill>
+                <a:latin typeface="+mn-lt"/>
+                <a:ea typeface="+mn-ea"/>
+                <a:cs typeface="+mn-cs"/>
+              </a:defRPr>
+            </a:lvl6pPr>
+            <a:lvl7pPr marL="2743200" algn="l" defTabSz="457200" rtl="0" eaLnBrk="1" latinLnBrk="0" hangingPunct="1">
+              <a:defRPr sz="1800" kern="1200">
+                <a:solidFill>
+                  <a:schemeClr val="lt1"/>
+                </a:solidFill>
+                <a:latin typeface="+mn-lt"/>
+                <a:ea typeface="+mn-ea"/>
+                <a:cs typeface="+mn-cs"/>
+              </a:defRPr>
+            </a:lvl7pPr>
+            <a:lvl8pPr marL="3200400" algn="l" defTabSz="457200" rtl="0" eaLnBrk="1" latinLnBrk="0" hangingPunct="1">
+              <a:defRPr sz="1800" kern="1200">
+                <a:solidFill>
+                  <a:schemeClr val="lt1"/>
+                </a:solidFill>
+                <a:latin typeface="+mn-lt"/>
+                <a:ea typeface="+mn-ea"/>
+                <a:cs typeface="+mn-cs"/>
+              </a:defRPr>
+            </a:lvl8pPr>
+            <a:lvl9pPr marL="3657600" algn="l" defTabSz="457200" rtl="0" eaLnBrk="1" latinLnBrk="0" hangingPunct="1">
+              <a:defRPr sz="1800" kern="1200">
+                <a:solidFill>
+                  <a:schemeClr val="lt1"/>
+                </a:solidFill>
+                <a:latin typeface="+mn-lt"/>
+                <a:ea typeface="+mn-ea"/>
+                <a:cs typeface="+mn-cs"/>
+              </a:defRPr>
+            </a:lvl9pPr>
+          </a:lstStyle>
+          <a:p>
+            <a:pPr algn="ctr"/>
+            <a:r>
+              <a:rPr lang="en-US" dirty="0"/>
+              <a:t>Pro-forma / Non-GAAP EPS</a:t>
+            </a:r>
+          </a:p>
+        </p:txBody>
+      </p:sp>
+      <p:sp>
+        <p:nvSpPr>
+          <p:cNvPr id="8" name="TextBox 9">
+            <a:extLst>
+              <a:ext uri="{FF2B5EF4-FFF2-40B4-BE49-F238E27FC236}">
+                <a16:creationId xmlns:a16="http://schemas.microsoft.com/office/drawing/2014/main" id="{C201E47E-B093-1F3E-BF70-FE41FEE57AFA}"/>
+              </a:ext>
+            </a:extLst>
+          </p:cNvPr>
+          <p:cNvSpPr txBox="1"/>
+          <p:nvPr/>
+        </p:nvSpPr>
+        <p:spPr>
+          <a:xfrm>
+            <a:off x="446834" y="3087224"/>
+            <a:ext cx="3675744" cy="1569660"/>
+          </a:xfrm>
+          <a:prstGeom prst="rect">
+            <a:avLst/>
+          </a:prstGeom>
+          <a:noFill/>
+        </p:spPr>
+        <p:txBody>
+          <a:bodyPr wrap="square" rtlCol="0">
+            <a:spAutoFit/>
+          </a:bodyPr>
+          <a:lstStyle>
+            <a:defPPr>
+              <a:defRPr lang="en-US"/>
+            </a:defPPr>
+            <a:lvl1pPr marL="0" algn="l" defTabSz="457200" rtl="0" eaLnBrk="1" latinLnBrk="0" hangingPunct="1">
+              <a:defRPr sz="1800" kern="1200">
+                <a:solidFill>
+                  <a:schemeClr val="tx1"/>
+                </a:solidFill>
+                <a:latin typeface="+mn-lt"/>
+                <a:ea typeface="+mn-ea"/>
+                <a:cs typeface="+mn-cs"/>
+              </a:defRPr>
+            </a:lvl1pPr>
+            <a:lvl2pPr marL="457200" algn="l" defTabSz="457200" rtl="0" eaLnBrk="1" latinLnBrk="0" hangingPunct="1">
+              <a:defRPr sz="1800" kern="1200">
+                <a:solidFill>
+                  <a:schemeClr val="tx1"/>
+                </a:solidFill>
+                <a:latin typeface="+mn-lt"/>
+                <a:ea typeface="+mn-ea"/>
+                <a:cs typeface="+mn-cs"/>
+              </a:defRPr>
+            </a:lvl2pPr>
+            <a:lvl3pPr marL="914400" algn="l" defTabSz="457200" rtl="0" eaLnBrk="1" latinLnBrk="0" hangingPunct="1">
+              <a:defRPr sz="1800" kern="1200">
+                <a:solidFill>
+                  <a:schemeClr val="tx1"/>
+                </a:solidFill>
+                <a:latin typeface="+mn-lt"/>
+                <a:ea typeface="+mn-ea"/>
+                <a:cs typeface="+mn-cs"/>
+              </a:defRPr>
+            </a:lvl3pPr>
+            <a:lvl4pPr marL="1371600" algn="l" defTabSz="457200" rtl="0" eaLnBrk="1" latinLnBrk="0" hangingPunct="1">
+              <a:defRPr sz="1800" kern="1200">
+                <a:solidFill>
+                  <a:schemeClr val="tx1"/>
+                </a:solidFill>
+                <a:latin typeface="+mn-lt"/>
+                <a:ea typeface="+mn-ea"/>
+                <a:cs typeface="+mn-cs"/>
+              </a:defRPr>
+            </a:lvl4pPr>
+            <a:lvl5pPr marL="1828800" algn="l" defTabSz="457200" rtl="0" eaLnBrk="1" latinLnBrk="0" hangingPunct="1">
+              <a:defRPr sz="1800" kern="1200">
+                <a:solidFill>
+                  <a:schemeClr val="tx1"/>
+                </a:solidFill>
+                <a:latin typeface="+mn-lt"/>
+                <a:ea typeface="+mn-ea"/>
+                <a:cs typeface="+mn-cs"/>
+              </a:defRPr>
+            </a:lvl5pPr>
+            <a:lvl6pPr marL="2286000" algn="l" defTabSz="457200" rtl="0" eaLnBrk="1" latinLnBrk="0" hangingPunct="1">
+              <a:defRPr sz="1800" kern="1200">
+                <a:solidFill>
+                  <a:schemeClr val="tx1"/>
+                </a:solidFill>
+                <a:latin typeface="+mn-lt"/>
+                <a:ea typeface="+mn-ea"/>
+                <a:cs typeface="+mn-cs"/>
+              </a:defRPr>
+            </a:lvl6pPr>
+            <a:lvl7pPr marL="2743200" algn="l" defTabSz="457200" rtl="0" eaLnBrk="1" latinLnBrk="0" hangingPunct="1">
+              <a:defRPr sz="1800" kern="1200">
+                <a:solidFill>
+                  <a:schemeClr val="tx1"/>
+                </a:solidFill>
+                <a:latin typeface="+mn-lt"/>
+                <a:ea typeface="+mn-ea"/>
+                <a:cs typeface="+mn-cs"/>
+              </a:defRPr>
+            </a:lvl7pPr>
+            <a:lvl8pPr marL="3200400" algn="l" defTabSz="457200" rtl="0" eaLnBrk="1" latinLnBrk="0" hangingPunct="1">
+              <a:defRPr sz="1800" kern="1200">
+                <a:solidFill>
+                  <a:schemeClr val="tx1"/>
+                </a:solidFill>
+                <a:latin typeface="+mn-lt"/>
+                <a:ea typeface="+mn-ea"/>
+                <a:cs typeface="+mn-cs"/>
+              </a:defRPr>
+            </a:lvl8pPr>
+            <a:lvl9pPr marL="3657600" algn="l" defTabSz="457200" rtl="0" eaLnBrk="1" latinLnBrk="0" hangingPunct="1">
+              <a:defRPr sz="1800" kern="1200">
+                <a:solidFill>
+                  <a:schemeClr val="tx1"/>
+                </a:solidFill>
+                <a:latin typeface="+mn-lt"/>
+                <a:ea typeface="+mn-ea"/>
+                <a:cs typeface="+mn-cs"/>
+              </a:defRPr>
+            </a:lvl9pPr>
+          </a:lstStyle>
+          <a:p>
+            <a:pPr marL="285750" indent="-285750">
+              <a:buFont typeface="Wingdings" pitchFamily="2" charset="2"/>
+              <a:buChar char="ü"/>
+            </a:pPr>
+            <a:r>
+              <a:rPr lang="en-US" sz="1600" dirty="0"/>
+              <a:t>Measured according to well established rules (GAAP)</a:t>
+            </a:r>
+          </a:p>
+          <a:p>
+            <a:pPr marL="285750" indent="-285750">
+              <a:buFont typeface="Wingdings" pitchFamily="2" charset="2"/>
+              <a:buChar char="ü"/>
+            </a:pPr>
+            <a:r>
+              <a:rPr lang="en-US" sz="1600" dirty="0"/>
+              <a:t>Often comparable across firms</a:t>
+            </a:r>
+          </a:p>
+          <a:p>
+            <a:pPr marL="285750" indent="-285750">
+              <a:buFont typeface="Wingdings" pitchFamily="2" charset="2"/>
+              <a:buChar char="ü"/>
+            </a:pPr>
+            <a:r>
+              <a:rPr lang="en-US" sz="1600" dirty="0"/>
+              <a:t>Includes transitory items, discontinued operations and extraordinary items</a:t>
+            </a:r>
+          </a:p>
+        </p:txBody>
+      </p:sp>
+      <p:sp>
+        <p:nvSpPr>
+          <p:cNvPr id="10" name="TextBox 11">
+            <a:extLst>
+              <a:ext uri="{FF2B5EF4-FFF2-40B4-BE49-F238E27FC236}">
+                <a16:creationId xmlns:a16="http://schemas.microsoft.com/office/drawing/2014/main" id="{15791F63-95C7-C8C2-6E6A-ED2448C41112}"/>
+              </a:ext>
+            </a:extLst>
+          </p:cNvPr>
+          <p:cNvSpPr txBox="1"/>
+          <p:nvPr/>
+        </p:nvSpPr>
+        <p:spPr>
+          <a:xfrm>
+            <a:off x="4816147" y="3087224"/>
+            <a:ext cx="3881019" cy="1815882"/>
+          </a:xfrm>
+          <a:prstGeom prst="rect">
+            <a:avLst/>
+          </a:prstGeom>
+          <a:noFill/>
+        </p:spPr>
+        <p:txBody>
+          <a:bodyPr wrap="square" rtlCol="0">
+            <a:spAutoFit/>
+          </a:bodyPr>
+          <a:lstStyle>
+            <a:defPPr>
+              <a:defRPr lang="en-US"/>
+            </a:defPPr>
+            <a:lvl1pPr marL="0" algn="l" defTabSz="457200" rtl="0" eaLnBrk="1" latinLnBrk="0" hangingPunct="1">
+              <a:defRPr sz="1800" kern="1200">
+                <a:solidFill>
+                  <a:schemeClr val="tx1"/>
+                </a:solidFill>
+                <a:latin typeface="+mn-lt"/>
+                <a:ea typeface="+mn-ea"/>
+                <a:cs typeface="+mn-cs"/>
+              </a:defRPr>
+            </a:lvl1pPr>
+            <a:lvl2pPr marL="457200" algn="l" defTabSz="457200" rtl="0" eaLnBrk="1" latinLnBrk="0" hangingPunct="1">
+              <a:defRPr sz="1800" kern="1200">
+                <a:solidFill>
+                  <a:schemeClr val="tx1"/>
+                </a:solidFill>
+                <a:latin typeface="+mn-lt"/>
+                <a:ea typeface="+mn-ea"/>
+                <a:cs typeface="+mn-cs"/>
+              </a:defRPr>
+            </a:lvl2pPr>
+            <a:lvl3pPr marL="914400" algn="l" defTabSz="457200" rtl="0" eaLnBrk="1" latinLnBrk="0" hangingPunct="1">
+              <a:defRPr sz="1800" kern="1200">
+                <a:solidFill>
+                  <a:schemeClr val="tx1"/>
+                </a:solidFill>
+                <a:latin typeface="+mn-lt"/>
+                <a:ea typeface="+mn-ea"/>
+                <a:cs typeface="+mn-cs"/>
+              </a:defRPr>
+            </a:lvl3pPr>
+            <a:lvl4pPr marL="1371600" algn="l" defTabSz="457200" rtl="0" eaLnBrk="1" latinLnBrk="0" hangingPunct="1">
+              <a:defRPr sz="1800" kern="1200">
+                <a:solidFill>
+                  <a:schemeClr val="tx1"/>
+                </a:solidFill>
+                <a:latin typeface="+mn-lt"/>
+                <a:ea typeface="+mn-ea"/>
+                <a:cs typeface="+mn-cs"/>
+              </a:defRPr>
+            </a:lvl4pPr>
+            <a:lvl5pPr marL="1828800" algn="l" defTabSz="457200" rtl="0" eaLnBrk="1" latinLnBrk="0" hangingPunct="1">
+              <a:defRPr sz="1800" kern="1200">
+                <a:solidFill>
+                  <a:schemeClr val="tx1"/>
+                </a:solidFill>
+                <a:latin typeface="+mn-lt"/>
+                <a:ea typeface="+mn-ea"/>
+                <a:cs typeface="+mn-cs"/>
+              </a:defRPr>
+            </a:lvl5pPr>
+            <a:lvl6pPr marL="2286000" algn="l" defTabSz="457200" rtl="0" eaLnBrk="1" latinLnBrk="0" hangingPunct="1">
+              <a:defRPr sz="1800" kern="1200">
+                <a:solidFill>
+                  <a:schemeClr val="tx1"/>
+                </a:solidFill>
+                <a:latin typeface="+mn-lt"/>
+                <a:ea typeface="+mn-ea"/>
+                <a:cs typeface="+mn-cs"/>
+              </a:defRPr>
+            </a:lvl6pPr>
+            <a:lvl7pPr marL="2743200" algn="l" defTabSz="457200" rtl="0" eaLnBrk="1" latinLnBrk="0" hangingPunct="1">
+              <a:defRPr sz="1800" kern="1200">
+                <a:solidFill>
+                  <a:schemeClr val="tx1"/>
+                </a:solidFill>
+                <a:latin typeface="+mn-lt"/>
+                <a:ea typeface="+mn-ea"/>
+                <a:cs typeface="+mn-cs"/>
+              </a:defRPr>
+            </a:lvl7pPr>
+            <a:lvl8pPr marL="3200400" algn="l" defTabSz="457200" rtl="0" eaLnBrk="1" latinLnBrk="0" hangingPunct="1">
+              <a:defRPr sz="1800" kern="1200">
+                <a:solidFill>
+                  <a:schemeClr val="tx1"/>
+                </a:solidFill>
+                <a:latin typeface="+mn-lt"/>
+                <a:ea typeface="+mn-ea"/>
+                <a:cs typeface="+mn-cs"/>
+              </a:defRPr>
+            </a:lvl8pPr>
+            <a:lvl9pPr marL="3657600" algn="l" defTabSz="457200" rtl="0" eaLnBrk="1" latinLnBrk="0" hangingPunct="1">
+              <a:defRPr sz="1800" kern="1200">
+                <a:solidFill>
+                  <a:schemeClr val="tx1"/>
+                </a:solidFill>
+                <a:latin typeface="+mn-lt"/>
+                <a:ea typeface="+mn-ea"/>
+                <a:cs typeface="+mn-cs"/>
+              </a:defRPr>
+            </a:lvl9pPr>
+          </a:lstStyle>
+          <a:p>
+            <a:pPr marL="285750" indent="-285750">
+              <a:buFont typeface="Wingdings" pitchFamily="2" charset="2"/>
+              <a:buChar char="ü"/>
+            </a:pPr>
+            <a:r>
+              <a:rPr lang="en-US" sz="1600" dirty="0"/>
+              <a:t>Based on managers discretion</a:t>
+            </a:r>
+          </a:p>
+          <a:p>
+            <a:pPr marL="285750" indent="-285750">
+              <a:buFont typeface="Wingdings" pitchFamily="2" charset="2"/>
+              <a:buChar char="ü"/>
+            </a:pPr>
+            <a:r>
+              <a:rPr lang="en-US" sz="1600" dirty="0"/>
+              <a:t>Not often comparable across firms</a:t>
+            </a:r>
+          </a:p>
+          <a:p>
+            <a:pPr marL="285750" indent="-285750">
+              <a:buFont typeface="Wingdings" pitchFamily="2" charset="2"/>
+              <a:buChar char="ü"/>
+            </a:pPr>
+            <a:r>
+              <a:rPr lang="en-US" sz="1600" dirty="0"/>
+              <a:t>Highlighted by the SEC as a potential fraud risk</a:t>
+            </a:r>
+          </a:p>
+          <a:p>
+            <a:pPr marL="285750" indent="-285750">
+              <a:buFont typeface="Wingdings" pitchFamily="2" charset="2"/>
+              <a:buChar char="ü"/>
+            </a:pPr>
+            <a:r>
+              <a:rPr lang="en-US" sz="1600" dirty="0"/>
+              <a:t>Measures core earnings, / the firm’s own measure of performance</a:t>
+            </a:r>
+          </a:p>
+          <a:p>
+            <a:pPr marL="285750" indent="-285750">
+              <a:buFont typeface="Wingdings" pitchFamily="2" charset="2"/>
+              <a:buChar char="ü"/>
+            </a:pPr>
+            <a:r>
+              <a:rPr lang="en-US" sz="1600" dirty="0"/>
+              <a:t>Often used in CEO compensation</a:t>
+            </a:r>
+          </a:p>
+        </p:txBody>
+      </p:sp>
+    </p:spTree>
+    <p:extLst>
+      <p:ext uri="{BB962C8B-B14F-4D97-AF65-F5344CB8AC3E}">
+        <p14:creationId xmlns:p14="http://schemas.microsoft.com/office/powerpoint/2010/main" val="781574969"/>
+      </p:ext>
+    </p:extLst>
+  </p:cSld>
+  <p:clrMapOvr>
+    <a:masterClrMapping/>
+  </p:clrMapOvr>
+  <p:transition>
+    <p:fade/>
+  </p:transition>
+</p:sld>
+</file>
+
+<file path=ppt/slides/slide24.xml><?xml version="1.0" encoding="utf-8"?>
+<p:sld xmlns:a="http://schemas.openxmlformats.org/drawingml/2006/main" xmlns:r="http://schemas.openxmlformats.org/officeDocument/2006/relationships" xmlns:p="http://schemas.openxmlformats.org/presentationml/2006/main">
+  <p:cSld>
+    <p:spTree>
+      <p:nvGrpSpPr>
+        <p:cNvPr id="1" name=""/>
+        <p:cNvGrpSpPr/>
+        <p:nvPr/>
+      </p:nvGrpSpPr>
+      <p:grpSpPr>
+        <a:xfrm>
+          <a:off x="0" y="0"/>
+          <a:ext cx="0" cy="0"/>
+          <a:chOff x="0" y="0"/>
+          <a:chExt cx="0" cy="0"/>
+        </a:xfrm>
+      </p:grpSpPr>
+      <p:sp>
+        <p:nvSpPr>
           <p:cNvPr id="5" name="Title 4">
             <a:extLst>
               <a:ext uri="{FF2B5EF4-FFF2-40B4-BE49-F238E27FC236}">
@@ -11379,7 +12189,7 @@
     </p:spTree>
     <p:extLst>
       <p:ext uri="{BB962C8B-B14F-4D97-AF65-F5344CB8AC3E}">
-        <p14:creationId xmlns:p14="http://schemas.microsoft.com/office/powerpoint/2010/main" val="867823952"/>
+        <p14:creationId xmlns:p14="http://schemas.microsoft.com/office/powerpoint/2010/main" val="3498084261"/>
       </p:ext>
     </p:extLst>
   </p:cSld>
@@ -11392,7 +12202,7 @@
 </p:sld>
 </file>
 
-<file path=ppt/slides/slide21.xml><?xml version="1.0" encoding="utf-8"?>
+<file path=ppt/slides/slide25.xml><?xml version="1.0" encoding="utf-8"?>
 <p:sld xmlns:a="http://schemas.openxmlformats.org/drawingml/2006/main" xmlns:r="http://schemas.openxmlformats.org/officeDocument/2006/relationships" xmlns:p="http://schemas.openxmlformats.org/presentationml/2006/main">
   <p:cSld>
     <p:spTree>
@@ -11581,598 +12391,7 @@
     </p:spTree>
     <p:extLst>
       <p:ext uri="{BB962C8B-B14F-4D97-AF65-F5344CB8AC3E}">
-        <p14:creationId xmlns:p14="http://schemas.microsoft.com/office/powerpoint/2010/main" val="3188428957"/>
-      </p:ext>
-    </p:extLst>
-  </p:cSld>
-  <p:clrMapOvr>
-    <a:masterClrMapping/>
-  </p:clrMapOvr>
-  <p:transition>
-    <p:fade/>
-  </p:transition>
-</p:sld>
-</file>
-
-<file path=ppt/slides/slide22.xml><?xml version="1.0" encoding="utf-8"?>
-<p:sld xmlns:a="http://schemas.openxmlformats.org/drawingml/2006/main" xmlns:r="http://schemas.openxmlformats.org/officeDocument/2006/relationships" xmlns:p="http://schemas.openxmlformats.org/presentationml/2006/main">
-  <p:cSld>
-    <p:spTree>
-      <p:nvGrpSpPr>
-        <p:cNvPr id="1" name=""/>
-        <p:cNvGrpSpPr/>
-        <p:nvPr/>
-      </p:nvGrpSpPr>
-      <p:grpSpPr>
-        <a:xfrm>
-          <a:off x="0" y="0"/>
-          <a:ext cx="0" cy="0"/>
-          <a:chOff x="0" y="0"/>
-          <a:chExt cx="0" cy="0"/>
-        </a:xfrm>
-      </p:grpSpPr>
-      <p:sp>
-        <p:nvSpPr>
-          <p:cNvPr id="2" name="Title 1">
-            <a:extLst>
-              <a:ext uri="{FF2B5EF4-FFF2-40B4-BE49-F238E27FC236}">
-                <a16:creationId xmlns:a16="http://schemas.microsoft.com/office/drawing/2014/main" id="{028E5A5F-3DF8-49A7-EBAE-1267A39D4593}"/>
-              </a:ext>
-            </a:extLst>
-          </p:cNvPr>
-          <p:cNvSpPr>
-            <a:spLocks noGrp="1"/>
-          </p:cNvSpPr>
-          <p:nvPr>
-            <p:ph type="title"/>
-          </p:nvPr>
-        </p:nvSpPr>
-        <p:spPr/>
-        <p:txBody>
-          <a:bodyPr/>
-          <a:lstStyle/>
-          <a:p>
-            <a:r>
-              <a:rPr lang="en-US" dirty="0"/>
-              <a:t>Submission</a:t>
-            </a:r>
-          </a:p>
-        </p:txBody>
-      </p:sp>
-      <p:sp>
-        <p:nvSpPr>
-          <p:cNvPr id="4" name="Text Placeholder 3">
-            <a:extLst>
-              <a:ext uri="{FF2B5EF4-FFF2-40B4-BE49-F238E27FC236}">
-                <a16:creationId xmlns:a16="http://schemas.microsoft.com/office/drawing/2014/main" id="{BE958F3A-71D3-D654-AF77-DB36FA2563BC}"/>
-              </a:ext>
-            </a:extLst>
-          </p:cNvPr>
-          <p:cNvSpPr>
-            <a:spLocks noGrp="1"/>
-          </p:cNvSpPr>
-          <p:nvPr>
-            <p:ph idx="1"/>
-          </p:nvPr>
-        </p:nvSpPr>
-        <p:spPr/>
-        <p:txBody>
-          <a:bodyPr/>
-          <a:lstStyle/>
-          <a:p>
-            <a:r>
-              <a:rPr lang="en-US" dirty="0"/>
-              <a:t>For today’s class the required submission is in two parts submitted together in a word document. </a:t>
-            </a:r>
-          </a:p>
-          <a:p>
-            <a:pPr marL="342900" indent="-342900">
-              <a:buFont typeface="+mj-lt"/>
-              <a:buAutoNum type="arabicPeriod"/>
-            </a:pPr>
-            <a:r>
-              <a:rPr lang="en-US" dirty="0"/>
-              <a:t>Response to analyzing public disclosures</a:t>
-            </a:r>
-          </a:p>
-          <a:p>
-            <a:pPr marL="342900" indent="-342900">
-              <a:buFont typeface="+mj-lt"/>
-              <a:buAutoNum type="arabicPeriod"/>
-            </a:pPr>
-            <a:r>
-              <a:rPr lang="en-US" dirty="0"/>
-              <a:t>Response to analyzing transactions</a:t>
-            </a:r>
-          </a:p>
-        </p:txBody>
-      </p:sp>
-    </p:spTree>
-    <p:extLst>
-      <p:ext uri="{BB962C8B-B14F-4D97-AF65-F5344CB8AC3E}">
-        <p14:creationId xmlns:p14="http://schemas.microsoft.com/office/powerpoint/2010/main" val="3701789503"/>
-      </p:ext>
-    </p:extLst>
-  </p:cSld>
-  <p:clrMapOvr>
-    <a:masterClrMapping/>
-  </p:clrMapOvr>
-  <p:transition>
-    <p:fade/>
-  </p:transition>
-</p:sld>
-</file>
-
-<file path=ppt/slides/slide23.xml><?xml version="1.0" encoding="utf-8"?>
-<p:sld xmlns:a="http://schemas.openxmlformats.org/drawingml/2006/main" xmlns:r="http://schemas.openxmlformats.org/officeDocument/2006/relationships" xmlns:p="http://schemas.openxmlformats.org/presentationml/2006/main">
-  <p:cSld>
-    <p:spTree>
-      <p:nvGrpSpPr>
-        <p:cNvPr id="1" name=""/>
-        <p:cNvGrpSpPr/>
-        <p:nvPr/>
-      </p:nvGrpSpPr>
-      <p:grpSpPr>
-        <a:xfrm>
-          <a:off x="0" y="0"/>
-          <a:ext cx="0" cy="0"/>
-          <a:chOff x="0" y="0"/>
-          <a:chExt cx="0" cy="0"/>
-        </a:xfrm>
-      </p:grpSpPr>
-      <p:sp>
-        <p:nvSpPr>
-          <p:cNvPr id="2" name="Title 1">
-            <a:extLst>
-              <a:ext uri="{FF2B5EF4-FFF2-40B4-BE49-F238E27FC236}">
-                <a16:creationId xmlns:a16="http://schemas.microsoft.com/office/drawing/2014/main" id="{75CEA084-0EDB-A814-6BF9-69371CCBC821}"/>
-              </a:ext>
-            </a:extLst>
-          </p:cNvPr>
-          <p:cNvSpPr>
-            <a:spLocks noGrp="1"/>
-          </p:cNvSpPr>
-          <p:nvPr>
-            <p:ph type="title"/>
-          </p:nvPr>
-        </p:nvSpPr>
-        <p:spPr/>
-        <p:txBody>
-          <a:bodyPr/>
-          <a:lstStyle/>
-          <a:p>
-            <a:r>
-              <a:rPr lang="en-US" dirty="0"/>
-              <a:t>Submission Part 1</a:t>
-            </a:r>
-          </a:p>
-        </p:txBody>
-      </p:sp>
-      <p:sp>
-        <p:nvSpPr>
-          <p:cNvPr id="3" name="Content Placeholder 2">
-            <a:extLst>
-              <a:ext uri="{FF2B5EF4-FFF2-40B4-BE49-F238E27FC236}">
-                <a16:creationId xmlns:a16="http://schemas.microsoft.com/office/drawing/2014/main" id="{03D9E3EA-3E13-6460-A5A9-82092EE2F446}"/>
-              </a:ext>
-            </a:extLst>
-          </p:cNvPr>
-          <p:cNvSpPr>
-            <a:spLocks noGrp="1"/>
-          </p:cNvSpPr>
-          <p:nvPr>
-            <p:ph idx="1"/>
-          </p:nvPr>
-        </p:nvSpPr>
-        <p:spPr>
-          <a:xfrm>
-            <a:off x="469445" y="1083527"/>
-            <a:ext cx="8015192" cy="2084481"/>
-          </a:xfrm>
-        </p:spPr>
-        <p:txBody>
-          <a:bodyPr/>
-          <a:lstStyle/>
-          <a:p>
-            <a:r>
-              <a:rPr lang="en-US" dirty="0"/>
-              <a:t>Purpose: Extract examples from large public firms on the industry practice surrounding the reporting of earnings.  </a:t>
-            </a:r>
-          </a:p>
-          <a:p>
-            <a:endParaRPr lang="en-US" dirty="0"/>
-          </a:p>
-          <a:p>
-            <a:r>
-              <a:rPr lang="en-US" dirty="0"/>
-              <a:t>Add a header, “Analysis of Publicly Traded  Hotel Industry Firms’ Earnings Disclosures” to your word document. Provide a summary and a screenshot of supporting evidence about earnings reporting.</a:t>
-            </a:r>
-          </a:p>
-          <a:p>
-            <a:endParaRPr lang="en-US" dirty="0"/>
-          </a:p>
-          <a:p>
-            <a:r>
-              <a:rPr lang="en-US" dirty="0"/>
-              <a:t>Focus on whether they used GAAP or non-GAAP, and outline the exclusions, typically found for these hotels, and other unusual items you may find. </a:t>
-            </a:r>
-          </a:p>
-          <a:p>
-            <a:pPr marL="342900" indent="-342900">
-              <a:buAutoNum type="arabicPeriod"/>
-            </a:pPr>
-            <a:endParaRPr lang="en-US" dirty="0"/>
-          </a:p>
-        </p:txBody>
-      </p:sp>
-    </p:spTree>
-    <p:extLst>
-      <p:ext uri="{BB962C8B-B14F-4D97-AF65-F5344CB8AC3E}">
-        <p14:creationId xmlns:p14="http://schemas.microsoft.com/office/powerpoint/2010/main" val="2647879583"/>
-      </p:ext>
-    </p:extLst>
-  </p:cSld>
-  <p:clrMapOvr>
-    <a:masterClrMapping/>
-  </p:clrMapOvr>
-  <p:transition>
-    <p:fade/>
-  </p:transition>
-</p:sld>
-</file>
-
-<file path=ppt/slides/slide24.xml><?xml version="1.0" encoding="utf-8"?>
-<p:sld xmlns:a="http://schemas.openxmlformats.org/drawingml/2006/main" xmlns:r="http://schemas.openxmlformats.org/officeDocument/2006/relationships" xmlns:p="http://schemas.openxmlformats.org/presentationml/2006/main">
-  <p:cSld>
-    <p:spTree>
-      <p:nvGrpSpPr>
-        <p:cNvPr id="1" name="">
-          <a:extLst>
-            <a:ext uri="{FF2B5EF4-FFF2-40B4-BE49-F238E27FC236}">
-              <a16:creationId xmlns:a16="http://schemas.microsoft.com/office/drawing/2014/main" id="{137B1BB0-B423-8864-C408-9491B376DEC6}"/>
-            </a:ext>
-          </a:extLst>
-        </p:cNvPr>
-        <p:cNvGrpSpPr/>
-        <p:nvPr/>
-      </p:nvGrpSpPr>
-      <p:grpSpPr>
-        <a:xfrm>
-          <a:off x="0" y="0"/>
-          <a:ext cx="0" cy="0"/>
-          <a:chOff x="0" y="0"/>
-          <a:chExt cx="0" cy="0"/>
-        </a:xfrm>
-      </p:grpSpPr>
-      <p:pic>
-        <p:nvPicPr>
-          <p:cNvPr id="6" name="Picture Placeholder 5">
-            <a:extLst>
-              <a:ext uri="{FF2B5EF4-FFF2-40B4-BE49-F238E27FC236}">
-                <a16:creationId xmlns:a16="http://schemas.microsoft.com/office/drawing/2014/main" id="{D08F1A33-1B43-F3E1-8C35-7B10F6422CE0}"/>
-              </a:ext>
-            </a:extLst>
-          </p:cNvPr>
-          <p:cNvPicPr>
-            <a:picLocks noGrp="1" noChangeAspect="1"/>
-          </p:cNvPicPr>
-          <p:nvPr>
-            <p:ph type="pic" sz="quarter" idx="12"/>
-          </p:nvPr>
-        </p:nvPicPr>
-        <p:blipFill>
-          <a:blip r:embed="rId3"/>
-          <a:srcRect l="26893" r="26893"/>
-          <a:stretch/>
-        </p:blipFill>
-        <p:spPr>
-          <a:prstGeom prst="rect">
-            <a:avLst/>
-          </a:prstGeom>
-          <a:noFill/>
-        </p:spPr>
-      </p:pic>
-      <p:sp>
-        <p:nvSpPr>
-          <p:cNvPr id="3" name="Title 2">
-            <a:extLst>
-              <a:ext uri="{FF2B5EF4-FFF2-40B4-BE49-F238E27FC236}">
-                <a16:creationId xmlns:a16="http://schemas.microsoft.com/office/drawing/2014/main" id="{C2A05060-E2AC-9269-44AF-BC222BA4E065}"/>
-              </a:ext>
-            </a:extLst>
-          </p:cNvPr>
-          <p:cNvSpPr>
-            <a:spLocks noGrp="1"/>
-          </p:cNvSpPr>
-          <p:nvPr>
-            <p:ph type="title"/>
-          </p:nvPr>
-        </p:nvSpPr>
-        <p:spPr/>
-        <p:txBody>
-          <a:bodyPr/>
-          <a:lstStyle/>
-          <a:p>
-            <a:r>
-              <a:rPr lang="en-US" dirty="0"/>
-              <a:t>What will we do today?</a:t>
-            </a:r>
-          </a:p>
-        </p:txBody>
-      </p:sp>
-      <p:sp>
-        <p:nvSpPr>
-          <p:cNvPr id="4" name="Text Placeholder 3">
-            <a:extLst>
-              <a:ext uri="{FF2B5EF4-FFF2-40B4-BE49-F238E27FC236}">
-                <a16:creationId xmlns:a16="http://schemas.microsoft.com/office/drawing/2014/main" id="{76877959-0351-47DF-AC5A-CA71B939A875}"/>
-              </a:ext>
-            </a:extLst>
-          </p:cNvPr>
-          <p:cNvSpPr>
-            <a:spLocks noGrp="1"/>
-          </p:cNvSpPr>
-          <p:nvPr>
-            <p:ph type="body" sz="quarter" idx="13"/>
-          </p:nvPr>
-        </p:nvSpPr>
-        <p:spPr>
-          <a:xfrm>
-            <a:off x="470430" y="1085336"/>
-            <a:ext cx="4872038" cy="3003406"/>
-          </a:xfrm>
-        </p:spPr>
-        <p:txBody>
-          <a:bodyPr/>
-          <a:lstStyle/>
-          <a:p>
-            <a:pPr marL="285750" indent="-285750">
-              <a:buFont typeface="Arial" panose="020B0604020202020204" pitchFamily="34" charset="0"/>
-              <a:buChar char="•"/>
-            </a:pPr>
-            <a:r>
-              <a:rPr lang="en-US" dirty="0">
-                <a:solidFill>
-                  <a:schemeClr val="tx1">
-                    <a:lumMod val="50000"/>
-                    <a:lumOff val="50000"/>
-                  </a:schemeClr>
-                </a:solidFill>
-              </a:rPr>
-              <a:t>Course Overview</a:t>
-            </a:r>
-          </a:p>
-          <a:p>
-            <a:pPr marL="285750" indent="-285750">
-              <a:buFont typeface="Arial" panose="020B0604020202020204" pitchFamily="34" charset="0"/>
-              <a:buChar char="•"/>
-            </a:pPr>
-            <a:r>
-              <a:rPr lang="en-US" b="1" dirty="0">
-                <a:solidFill>
-                  <a:srgbClr val="361F6D"/>
-                </a:solidFill>
-              </a:rPr>
-              <a:t>Introduction to Accounting &amp; Finance Analytics</a:t>
-            </a:r>
-          </a:p>
-          <a:p>
-            <a:pPr marL="801688" lvl="1" indent="-285750"/>
-            <a:r>
-              <a:rPr lang="en-US" dirty="0">
-                <a:solidFill>
-                  <a:schemeClr val="tx1">
-                    <a:lumMod val="50000"/>
-                    <a:lumOff val="50000"/>
-                  </a:schemeClr>
-                </a:solidFill>
-              </a:rPr>
-              <a:t>Define the scope of the Accounting &amp; Finance Function</a:t>
-            </a:r>
-          </a:p>
-          <a:p>
-            <a:pPr marL="801688" lvl="1" indent="-285750"/>
-            <a:r>
-              <a:rPr lang="en-US" dirty="0">
-                <a:solidFill>
-                  <a:schemeClr val="tx1">
-                    <a:lumMod val="50000"/>
-                    <a:lumOff val="50000"/>
-                  </a:schemeClr>
-                </a:solidFill>
-              </a:rPr>
-              <a:t>Analyze Public Disclosures</a:t>
-            </a:r>
-          </a:p>
-          <a:p>
-            <a:pPr marL="801688" lvl="1" indent="-285750"/>
-            <a:r>
-              <a:rPr lang="en-US" b="1" dirty="0">
-                <a:solidFill>
-                  <a:srgbClr val="361F6D"/>
-                </a:solidFill>
-              </a:rPr>
-              <a:t>Analyze Transaction Level Data</a:t>
-            </a:r>
-          </a:p>
-          <a:p>
-            <a:pPr marL="801688" lvl="1" indent="-285750"/>
-            <a:r>
-              <a:rPr lang="en-US" dirty="0"/>
-              <a:t>Provide a Solution to Disclosure Decision</a:t>
-            </a:r>
-          </a:p>
-          <a:p>
-            <a:pPr marL="801688" lvl="1" indent="-285750"/>
-            <a:endParaRPr lang="en-US" dirty="0"/>
-          </a:p>
-          <a:p>
-            <a:pPr marL="285750" indent="-285750">
-              <a:buFont typeface="Arial" panose="020B0604020202020204" pitchFamily="34" charset="0"/>
-              <a:buChar char="•"/>
-            </a:pPr>
-            <a:endParaRPr lang="en-US" dirty="0"/>
-          </a:p>
-        </p:txBody>
-      </p:sp>
-    </p:spTree>
-    <p:extLst>
-      <p:ext uri="{BB962C8B-B14F-4D97-AF65-F5344CB8AC3E}">
-        <p14:creationId xmlns:p14="http://schemas.microsoft.com/office/powerpoint/2010/main" val="2852297331"/>
-      </p:ext>
-    </p:extLst>
-  </p:cSld>
-  <p:clrMapOvr>
-    <a:masterClrMapping/>
-  </p:clrMapOvr>
-  <p:transition>
-    <p:fade/>
-  </p:transition>
-</p:sld>
-</file>
-
-<file path=ppt/slides/slide25.xml><?xml version="1.0" encoding="utf-8"?>
-<p:sld xmlns:a="http://schemas.openxmlformats.org/drawingml/2006/main" xmlns:r="http://schemas.openxmlformats.org/officeDocument/2006/relationships" xmlns:p="http://schemas.openxmlformats.org/presentationml/2006/main">
-  <p:cSld>
-    <p:spTree>
-      <p:nvGrpSpPr>
-        <p:cNvPr id="1" name=""/>
-        <p:cNvGrpSpPr/>
-        <p:nvPr/>
-      </p:nvGrpSpPr>
-      <p:grpSpPr>
-        <a:xfrm>
-          <a:off x="0" y="0"/>
-          <a:ext cx="0" cy="0"/>
-          <a:chOff x="0" y="0"/>
-          <a:chExt cx="0" cy="0"/>
-        </a:xfrm>
-      </p:grpSpPr>
-      <p:sp>
-        <p:nvSpPr>
-          <p:cNvPr id="2" name="Title 1">
-            <a:extLst>
-              <a:ext uri="{FF2B5EF4-FFF2-40B4-BE49-F238E27FC236}">
-                <a16:creationId xmlns:a16="http://schemas.microsoft.com/office/drawing/2014/main" id="{AF13DC8F-500C-6FAE-8AA0-6C8A523BAA63}"/>
-              </a:ext>
-            </a:extLst>
-          </p:cNvPr>
-          <p:cNvSpPr>
-            <a:spLocks noGrp="1"/>
-          </p:cNvSpPr>
-          <p:nvPr>
-            <p:ph type="title"/>
-          </p:nvPr>
-        </p:nvSpPr>
-        <p:spPr/>
-        <p:txBody>
-          <a:bodyPr/>
-          <a:lstStyle/>
-          <a:p>
-            <a:r>
-              <a:rPr lang="en-US" dirty="0"/>
-              <a:t>Transaction analysis</a:t>
-            </a:r>
-          </a:p>
-        </p:txBody>
-      </p:sp>
-      <p:sp>
-        <p:nvSpPr>
-          <p:cNvPr id="3" name="Content Placeholder 2">
-            <a:extLst>
-              <a:ext uri="{FF2B5EF4-FFF2-40B4-BE49-F238E27FC236}">
-                <a16:creationId xmlns:a16="http://schemas.microsoft.com/office/drawing/2014/main" id="{550C5F61-20EF-2AB6-EE32-33B72469B4F5}"/>
-              </a:ext>
-            </a:extLst>
-          </p:cNvPr>
-          <p:cNvSpPr>
-            <a:spLocks noGrp="1"/>
-          </p:cNvSpPr>
-          <p:nvPr>
-            <p:ph idx="1"/>
-          </p:nvPr>
-        </p:nvSpPr>
-        <p:spPr>
-          <a:xfrm>
-            <a:off x="469445" y="1083527"/>
-            <a:ext cx="7641967" cy="2084481"/>
-          </a:xfrm>
-        </p:spPr>
-        <p:txBody>
-          <a:bodyPr/>
-          <a:lstStyle/>
-          <a:p>
-            <a:r>
-              <a:rPr lang="en-US" dirty="0"/>
-              <a:t>Transactions are events that affect the operations or finances of an organization. </a:t>
-            </a:r>
-          </a:p>
-          <a:p>
-            <a:endParaRPr lang="en-US" dirty="0"/>
-          </a:p>
-          <a:p>
-            <a:pPr marL="285750" indent="-285750">
-              <a:buFont typeface="Arial" panose="020B0604020202020204" pitchFamily="34" charset="0"/>
-              <a:buChar char="•"/>
-            </a:pPr>
-            <a:r>
-              <a:rPr lang="en-US" dirty="0"/>
-              <a:t>Accounting systems record transactions using a double-entry system using debits and credits. </a:t>
-            </a:r>
-          </a:p>
-          <a:p>
-            <a:pPr marL="285750" indent="-285750">
-              <a:buFont typeface="Arial" panose="020B0604020202020204" pitchFamily="34" charset="0"/>
-              <a:buChar char="•"/>
-            </a:pPr>
-            <a:r>
-              <a:rPr lang="en-US" dirty="0"/>
-              <a:t>Transactions are recorded using the accounting equation: </a:t>
-            </a:r>
-          </a:p>
-          <a:p>
-            <a:pPr marL="801688" lvl="1" indent="-285750"/>
-            <a:r>
-              <a:rPr lang="en-US" altLang="ko-KR" b="1" dirty="0">
-                <a:solidFill>
-                  <a:schemeClr val="tx2"/>
-                </a:solidFill>
-                <a:latin typeface="Arial" panose="020B0604020202020204" pitchFamily="34" charset="0"/>
-                <a:ea typeface="Gulim" panose="020B0600000101010101" pitchFamily="34" charset="-127"/>
-                <a:cs typeface="Arial" panose="020B0604020202020204" pitchFamily="34" charset="0"/>
-              </a:rPr>
-              <a:t>Assets = Liability + Equity</a:t>
-            </a:r>
-          </a:p>
-          <a:p>
-            <a:pPr marL="285750" indent="-285750">
-              <a:buFont typeface="Arial" panose="020B0604020202020204" pitchFamily="34" charset="0"/>
-              <a:buChar char="•"/>
-            </a:pPr>
-            <a:endParaRPr lang="en-US" dirty="0"/>
-          </a:p>
-          <a:p>
-            <a:pPr marL="285750" indent="-285750">
-              <a:buFont typeface="Arial" panose="020B0604020202020204" pitchFamily="34" charset="0"/>
-              <a:buChar char="•"/>
-            </a:pPr>
-            <a:r>
-              <a:rPr lang="en-US" dirty="0"/>
-              <a:t>For example, increases to assets are debit entries  </a:t>
-            </a:r>
-          </a:p>
-          <a:p>
-            <a:endParaRPr lang="en-US" dirty="0"/>
-          </a:p>
-          <a:p>
-            <a:endParaRPr lang="en-US" dirty="0"/>
-          </a:p>
-        </p:txBody>
-      </p:sp>
-    </p:spTree>
-    <p:extLst>
-      <p:ext uri="{BB962C8B-B14F-4D97-AF65-F5344CB8AC3E}">
-        <p14:creationId xmlns:p14="http://schemas.microsoft.com/office/powerpoint/2010/main" val="1852058721"/>
+        <p14:creationId xmlns:p14="http://schemas.microsoft.com/office/powerpoint/2010/main" val="251210638"/>
       </p:ext>
     </p:extLst>
   </p:cSld>
@@ -12190,13 +12409,7 @@
   <p:cSld>
     <p:spTree>
       <p:nvGrpSpPr>
-        <p:cNvPr id="1" name="">
-          <a:extLst>
-            <a:ext uri="{FF2B5EF4-FFF2-40B4-BE49-F238E27FC236}">
-              <a16:creationId xmlns:a16="http://schemas.microsoft.com/office/drawing/2014/main" id="{E41A40B9-BBDA-99A5-FD42-BABDAD466736}"/>
-            </a:ext>
-          </a:extLst>
-        </p:cNvPr>
+        <p:cNvPr id="1" name=""/>
         <p:cNvGrpSpPr/>
         <p:nvPr/>
       </p:nvGrpSpPr>
@@ -12213,7 +12426,7 @@
           <p:cNvPr id="2" name="Title 1">
             <a:extLst>
               <a:ext uri="{FF2B5EF4-FFF2-40B4-BE49-F238E27FC236}">
-                <a16:creationId xmlns:a16="http://schemas.microsoft.com/office/drawing/2014/main" id="{CB84F894-53AC-B70E-505C-E25AE1B2E214}"/>
+                <a16:creationId xmlns:a16="http://schemas.microsoft.com/office/drawing/2014/main" id="{028E5A5F-3DF8-49A7-EBAE-1267A39D4593}"/>
               </a:ext>
             </a:extLst>
           </p:cNvPr>
@@ -12231,17 +12444,17 @@
           <a:p>
             <a:r>
               <a:rPr lang="en-US" dirty="0"/>
-              <a:t>Transaction analysis</a:t>
-            </a:r>
-          </a:p>
-        </p:txBody>
-      </p:sp>
-      <p:sp>
-        <p:nvSpPr>
-          <p:cNvPr id="3" name="Content Placeholder 2">
+              <a:t>Submission</a:t>
+            </a:r>
+          </a:p>
+        </p:txBody>
+      </p:sp>
+      <p:sp>
+        <p:nvSpPr>
+          <p:cNvPr id="4" name="Text Placeholder 3">
             <a:extLst>
               <a:ext uri="{FF2B5EF4-FFF2-40B4-BE49-F238E27FC236}">
-                <a16:creationId xmlns:a16="http://schemas.microsoft.com/office/drawing/2014/main" id="{E2C7B4D4-9761-456E-11D8-01B7A7DABE79}"/>
+                <a16:creationId xmlns:a16="http://schemas.microsoft.com/office/drawing/2014/main" id="{BE958F3A-71D3-D654-AF77-DB36FA2563BC}"/>
               </a:ext>
             </a:extLst>
           </p:cNvPr>
@@ -12252,33 +12465,42 @@
             <p:ph idx="1"/>
           </p:nvPr>
         </p:nvSpPr>
-        <p:spPr>
-          <a:xfrm>
-            <a:off x="469445" y="1083527"/>
-            <a:ext cx="7641967" cy="2084481"/>
-          </a:xfrm>
-        </p:spPr>
+        <p:spPr/>
         <p:txBody>
           <a:bodyPr/>
           <a:lstStyle/>
           <a:p>
             <a:r>
               <a:rPr lang="en-US" dirty="0"/>
-              <a:t>Transactions record the economic activities of the firm so that firms can report meaningful economic aggregates like net income, revenue, cost of goods/services sold, R&amp;D expense, cash, inventory, what they owe (payables, debt), what they are owed (receivables, prepaid services).</a:t>
-            </a:r>
-          </a:p>
-          <a:p>
-            <a:endParaRPr lang="en-US" dirty="0"/>
-          </a:p>
-          <a:p>
-            <a:endParaRPr lang="en-US" dirty="0"/>
+              <a:t>For today’s class the required submission is in two parts submitted together in a word document. </a:t>
+            </a:r>
+          </a:p>
+          <a:p>
+            <a:pPr marL="342900" indent="-342900">
+              <a:buFont typeface="+mj-lt"/>
+              <a:buAutoNum type="arabicPeriod"/>
+            </a:pPr>
+            <a:r>
+              <a:rPr lang="en-US" dirty="0"/>
+              <a:t>Response to analyzing public disclosures</a:t>
+            </a:r>
+          </a:p>
+          <a:p>
+            <a:pPr marL="342900" indent="-342900">
+              <a:buFont typeface="+mj-lt"/>
+              <a:buAutoNum type="arabicPeriod"/>
+            </a:pPr>
+            <a:r>
+              <a:rPr lang="en-US" dirty="0"/>
+              <a:t>Response to analyzing transactions</a:t>
+            </a:r>
           </a:p>
         </p:txBody>
       </p:sp>
     </p:spTree>
     <p:extLst>
       <p:ext uri="{BB962C8B-B14F-4D97-AF65-F5344CB8AC3E}">
-        <p14:creationId xmlns:p14="http://schemas.microsoft.com/office/powerpoint/2010/main" val="1487627096"/>
+        <p14:creationId xmlns:p14="http://schemas.microsoft.com/office/powerpoint/2010/main" val="1728750101"/>
       </p:ext>
     </p:extLst>
   </p:cSld>
@@ -12313,7 +12535,7 @@
           <p:cNvPr id="2" name="Title 1">
             <a:extLst>
               <a:ext uri="{FF2B5EF4-FFF2-40B4-BE49-F238E27FC236}">
-                <a16:creationId xmlns:a16="http://schemas.microsoft.com/office/drawing/2014/main" id="{FAE40584-CAA3-A003-AD74-44616FB66582}"/>
+                <a16:creationId xmlns:a16="http://schemas.microsoft.com/office/drawing/2014/main" id="{75CEA084-0EDB-A814-6BF9-69371CCBC821}"/>
               </a:ext>
             </a:extLst>
           </p:cNvPr>
@@ -12331,7 +12553,7 @@
           <a:p>
             <a:r>
               <a:rPr lang="en-US" dirty="0"/>
-              <a:t>Peach State University</a:t>
+              <a:t>Submission Part 1</a:t>
             </a:r>
           </a:p>
         </p:txBody>
@@ -12341,7 +12563,7 @@
           <p:cNvPr id="3" name="Content Placeholder 2">
             <a:extLst>
               <a:ext uri="{FF2B5EF4-FFF2-40B4-BE49-F238E27FC236}">
-                <a16:creationId xmlns:a16="http://schemas.microsoft.com/office/drawing/2014/main" id="{302C74F5-8A57-2DDD-8EA5-DF6E117F8867}"/>
+                <a16:creationId xmlns:a16="http://schemas.microsoft.com/office/drawing/2014/main" id="{03D9E3EA-3E13-6460-A5A9-82092EE2F446}"/>
               </a:ext>
             </a:extLst>
           </p:cNvPr>
@@ -12355,7 +12577,7 @@
         <p:spPr>
           <a:xfrm>
             <a:off x="469445" y="1083527"/>
-            <a:ext cx="8319992" cy="2084481"/>
+            <a:ext cx="8015192" cy="2084481"/>
           </a:xfrm>
         </p:spPr>
         <p:txBody>
@@ -12364,7 +12586,7 @@
           <a:p>
             <a:r>
               <a:rPr lang="en-US" dirty="0"/>
-              <a:t>We undertake an analysis of Peach State University Hotel (a real hotel’s transactions with the name changed). </a:t>
+              <a:t>Purpose: Extract examples from large public firms on the industry practice surrounding the reporting of earnings.  </a:t>
             </a:r>
           </a:p>
           <a:p>
@@ -12373,7 +12595,7 @@
           <a:p>
             <a:r>
               <a:rPr lang="en-US" dirty="0"/>
-              <a:t>Three-part case with reference readings for each part. </a:t>
+              <a:t>Add a header, “Analysis of Publicly Traded  Hotel Industry Firms’ Earnings Disclosures” to your word document. Provide a summary and a screenshot of supporting evidence about earnings reporting.</a:t>
             </a:r>
           </a:p>
           <a:p>
@@ -12382,63 +12604,21 @@
           <a:p>
             <a:r>
               <a:rPr lang="en-US" dirty="0"/>
-              <a:t>Data analytics tool: Tableau</a:t>
-            </a:r>
-          </a:p>
-          <a:p>
-            <a:pPr marL="285750" indent="-285750">
-              <a:buFont typeface="Arial" panose="020B0604020202020204" pitchFamily="34" charset="0"/>
-              <a:buChar char="•"/>
+              <a:t>Focus on whether they used GAAP or non-GAAP, and outline the exclusions, typically found for these hotels, and other unusual items you may find. </a:t>
+            </a:r>
+          </a:p>
+          <a:p>
+            <a:pPr marL="342900" indent="-342900">
+              <a:buAutoNum type="arabicPeriod"/>
             </a:pPr>
-            <a:r>
-              <a:rPr lang="en-US" dirty="0"/>
-              <a:t>Set-up in FSB remote labs using </a:t>
-            </a:r>
-            <a:r>
-              <a:rPr lang="en-US" dirty="0">
-                <a:hlinkClick r:id="rId3"/>
-              </a:rPr>
-              <a:t>https://fprod-hcs.foster.uw.edu/</a:t>
-            </a:r>
-            <a:r>
-              <a:rPr lang="en-US" dirty="0"/>
-              <a:t> </a:t>
-            </a:r>
-          </a:p>
-          <a:p>
-            <a:pPr marL="285750" indent="-285750">
-              <a:buFont typeface="Arial" panose="020B0604020202020204" pitchFamily="34" charset="0"/>
-              <a:buChar char="•"/>
-            </a:pPr>
-            <a:r>
-              <a:rPr lang="en-US" dirty="0"/>
-              <a:t>In the u-drive use </a:t>
-            </a:r>
-            <a:r>
-              <a:rPr lang="en-US" dirty="0" err="1"/>
-              <a:t>cmd</a:t>
-            </a:r>
-            <a:r>
-              <a:rPr lang="en-US" dirty="0"/>
-              <a:t> to </a:t>
-            </a:r>
-          </a:p>
-          <a:p>
-            <a:pPr marL="285750" indent="-285750">
-              <a:buFont typeface="Arial" panose="020B0604020202020204" pitchFamily="34" charset="0"/>
-              <a:buChar char="•"/>
-            </a:pPr>
-            <a:r>
-              <a:rPr lang="en-US" dirty="0"/>
-              <a:t>git clone https://github.com/ashercurtis/datasets.io</a:t>
-            </a:r>
+            <a:endParaRPr lang="en-US" dirty="0"/>
           </a:p>
         </p:txBody>
       </p:sp>
     </p:spTree>
     <p:extLst>
       <p:ext uri="{BB962C8B-B14F-4D97-AF65-F5344CB8AC3E}">
-        <p14:creationId xmlns:p14="http://schemas.microsoft.com/office/powerpoint/2010/main" val="3823684404"/>
+        <p14:creationId xmlns:p14="http://schemas.microsoft.com/office/powerpoint/2010/main" val="1420062400"/>
       </p:ext>
     </p:extLst>
   </p:cSld>
@@ -12459,7 +12639,7 @@
         <p:cNvPr id="1" name="">
           <a:extLst>
             <a:ext uri="{FF2B5EF4-FFF2-40B4-BE49-F238E27FC236}">
-              <a16:creationId xmlns:a16="http://schemas.microsoft.com/office/drawing/2014/main" id="{2070BCFE-DDEC-D2C7-131F-51F1536BC48C}"/>
+              <a16:creationId xmlns:a16="http://schemas.microsoft.com/office/drawing/2014/main" id="{E503E7D6-3F95-653E-4400-AB4B33797B1A}"/>
             </a:ext>
           </a:extLst>
         </p:cNvPr>
@@ -12479,7 +12659,7 @@
           <p:cNvPr id="2" name="Title 1">
             <a:extLst>
               <a:ext uri="{FF2B5EF4-FFF2-40B4-BE49-F238E27FC236}">
-                <a16:creationId xmlns:a16="http://schemas.microsoft.com/office/drawing/2014/main" id="{B75048D7-D0E7-FB17-DA4E-6078575DEFAE}"/>
+                <a16:creationId xmlns:a16="http://schemas.microsoft.com/office/drawing/2014/main" id="{D9C56EA6-25F5-97C1-2DC8-E5E944AA6D56}"/>
               </a:ext>
             </a:extLst>
           </p:cNvPr>
@@ -12497,17 +12677,17 @@
           <a:p>
             <a:r>
               <a:rPr lang="en-US" dirty="0"/>
-              <a:t>Peach State University</a:t>
-            </a:r>
-          </a:p>
-        </p:txBody>
-      </p:sp>
-      <p:sp>
-        <p:nvSpPr>
-          <p:cNvPr id="3" name="Content Placeholder 2">
+              <a:t>Analyzing Public Disclosures</a:t>
+            </a:r>
+          </a:p>
+        </p:txBody>
+      </p:sp>
+      <p:sp>
+        <p:nvSpPr>
+          <p:cNvPr id="4" name="Text Placeholder 3">
             <a:extLst>
               <a:ext uri="{FF2B5EF4-FFF2-40B4-BE49-F238E27FC236}">
-                <a16:creationId xmlns:a16="http://schemas.microsoft.com/office/drawing/2014/main" id="{4A1D9570-DBEF-29F1-17B0-4849FF6CF31B}"/>
+                <a16:creationId xmlns:a16="http://schemas.microsoft.com/office/drawing/2014/main" id="{CB36D306-E6C0-0156-F483-41B9A1399E88}"/>
               </a:ext>
             </a:extLst>
           </p:cNvPr>
@@ -12515,74 +12695,92 @@
             <a:spLocks noGrp="1"/>
           </p:cNvSpPr>
           <p:nvPr>
-            <p:ph idx="1"/>
-          </p:nvPr>
-        </p:nvSpPr>
-        <p:spPr>
-          <a:xfrm>
-            <a:off x="469445" y="1083527"/>
-            <a:ext cx="8319992" cy="2084481"/>
-          </a:xfrm>
-        </p:spPr>
+            <p:ph type="body" sz="quarter" idx="13"/>
+          </p:nvPr>
+        </p:nvSpPr>
+        <p:spPr/>
         <p:txBody>
           <a:bodyPr/>
           <a:lstStyle/>
           <a:p>
             <a:r>
               <a:rPr lang="en-US" dirty="0"/>
-              <a:t>Part 1. Familiarity with the tool. Reference: </a:t>
-            </a:r>
+              <a:t>Team Activity:</a:t>
+            </a:r>
+          </a:p>
+          <a:p>
+            <a:endParaRPr lang="en-US" dirty="0"/>
+          </a:p>
+          <a:p>
+            <a:r>
+              <a:rPr lang="en-US" dirty="0"/>
+              <a:t>Part 2: Analysis of other company filings (in teams)</a:t>
+            </a:r>
+          </a:p>
+          <a:p>
+            <a:pPr marL="285750" indent="-285750">
+              <a:buFont typeface="Arial" panose="020B0604020202020204" pitchFamily="34" charset="0"/>
+              <a:buChar char="•"/>
+            </a:pPr>
             <a:r>
               <a:rPr lang="en-US" dirty="0">
                 <a:hlinkClick r:id="rId3"/>
               </a:rPr>
-              <a:t>Analytics_mindset_case_studies_PSU_Hotel_understanding_audit_analytics</a:t>
+              <a:t>Hilton – Investor Relations</a:t>
             </a:r>
             <a:endParaRPr lang="en-US" dirty="0"/>
           </a:p>
           <a:p>
-            <a:endParaRPr lang="en-US" b="1" dirty="0"/>
-          </a:p>
-          <a:p>
-            <a:r>
-              <a:rPr lang="en-US" dirty="0"/>
-              <a:t>Part 2: Understanding sources of revenue. Reference: </a:t>
-            </a:r>
-            <a:r>
-              <a:rPr lang="en-US" dirty="0" err="1">
+            <a:pPr marL="285750" indent="-285750">
+              <a:buFont typeface="Arial" panose="020B0604020202020204" pitchFamily="34" charset="0"/>
+              <a:buChar char="•"/>
+            </a:pPr>
+            <a:r>
+              <a:rPr lang="en-US" dirty="0">
                 <a:hlinkClick r:id="rId4"/>
               </a:rPr>
-              <a:t>Analytics_mindset_case_studies_PSU_Hotel_Revenue</a:t>
+              <a:t>Hyatt Hotels Corporation - Investor Relations</a:t>
             </a:r>
             <a:endParaRPr lang="en-US" dirty="0"/>
           </a:p>
           <a:p>
-            <a:endParaRPr lang="en-US" dirty="0"/>
-          </a:p>
-          <a:p>
-            <a:r>
-              <a:rPr lang="en-US" dirty="0"/>
-              <a:t>Part 3: You will act as an advisor to identify events / transactions / transaction  categories to craft the firm’s non-GAAP earnings number. Reference:</a:t>
-            </a:r>
-          </a:p>
-          <a:p>
-            <a:r>
-              <a:rPr lang="en-US" dirty="0" err="1">
+            <a:pPr marL="285750" indent="-285750">
+              <a:buFont typeface="Arial" panose="020B0604020202020204" pitchFamily="34" charset="0"/>
+              <a:buChar char="•"/>
+            </a:pPr>
+            <a:r>
+              <a:rPr lang="en-US" dirty="0">
                 <a:hlinkClick r:id="rId5"/>
               </a:rPr>
-              <a:t>Analytics_mindset_case_studies_PSU_Hotel_background</a:t>
-            </a:r>
-            <a:r>
-              <a:rPr lang="en-US" dirty="0"/>
-              <a:t> (hint: search for events)</a:t>
-            </a:r>
+              <a:t>Investors - InterContinental Hotels Group PLC</a:t>
+            </a:r>
+            <a:endParaRPr lang="en-US" dirty="0"/>
+          </a:p>
+          <a:p>
+            <a:pPr marL="285750" indent="-285750">
+              <a:buFont typeface="Arial" panose="020B0604020202020204" pitchFamily="34" charset="0"/>
+              <a:buChar char="•"/>
+            </a:pPr>
+            <a:r>
+              <a:rPr lang="en-US" dirty="0">
+                <a:hlinkClick r:id="rId6"/>
+              </a:rPr>
+              <a:t>Wyndham Hotels &amp; Resorts, Inc. (WH)</a:t>
+            </a:r>
+            <a:endParaRPr lang="en-US" dirty="0"/>
+          </a:p>
+          <a:p>
+            <a:endParaRPr lang="en-US" dirty="0"/>
+          </a:p>
+          <a:p>
+            <a:endParaRPr lang="en-US" dirty="0"/>
           </a:p>
         </p:txBody>
       </p:sp>
     </p:spTree>
     <p:extLst>
       <p:ext uri="{BB962C8B-B14F-4D97-AF65-F5344CB8AC3E}">
-        <p14:creationId xmlns:p14="http://schemas.microsoft.com/office/powerpoint/2010/main" val="4214750385"/>
+        <p14:creationId xmlns:p14="http://schemas.microsoft.com/office/powerpoint/2010/main" val="1157585926"/>
       </p:ext>
     </p:extLst>
   </p:cSld>
@@ -13575,7 +13773,7 @@
               <a:rPr lang="en-US" dirty="0">
                 <a:latin typeface="+mn-lt"/>
               </a:rPr>
-              <a:t>Analyze Public Disclosures</a:t>
+              <a:t>Analyze Transaction Level Data</a:t>
             </a:r>
           </a:p>
           <a:p>
@@ -13584,7 +13782,7 @@
               <a:rPr lang="en-US" dirty="0">
                 <a:latin typeface="+mn-lt"/>
               </a:rPr>
-              <a:t>Analyze Transaction Level Data</a:t>
+              <a:t>Analyze Public Disclosures</a:t>
             </a:r>
           </a:p>
           <a:p>
@@ -18924,17 +19122,6 @@
 </file>
 
 <file path=customXml/item1.xml><?xml version="1.0" encoding="utf-8"?>
-<p:properties xmlns:p="http://schemas.microsoft.com/office/2006/metadata/properties" xmlns:xsi="http://www.w3.org/2001/XMLSchema-instance" xmlns:pc="http://schemas.microsoft.com/office/infopath/2007/PartnerControls">
-  <documentManagement>
-    <lcf76f155ced4ddcb4097134ff3c332f xmlns="3e08c221-0eca-4d51-ae15-1dc733eb7f09">
-      <Terms xmlns="http://schemas.microsoft.com/office/infopath/2007/PartnerControls"/>
-    </lcf76f155ced4ddcb4097134ff3c332f>
-    <TaxCatchAll xmlns="ab06a5aa-8e31-4bdb-9b13-38c58a92ec8a" xsi:nil="true"/>
-  </documentManagement>
-</p:properties>
-</file>
-
-<file path=customXml/item2.xml><?xml version="1.0" encoding="utf-8"?>
 <?mso-contentType ?>
 <FormTemplates xmlns="http://schemas.microsoft.com/sharepoint/v3/contenttype/forms">
   <Display>DocumentLibraryForm</Display>
@@ -18943,7 +19130,7 @@
 </FormTemplates>
 </file>
 
-<file path=customXml/item3.xml><?xml version="1.0" encoding="utf-8"?>
+<file path=customXml/item2.xml><?xml version="1.0" encoding="utf-8"?>
 <ct:contentTypeSchema xmlns:ct="http://schemas.microsoft.com/office/2006/metadata/contentType" xmlns:ma="http://schemas.microsoft.com/office/2006/metadata/properties/metaAttributes" ct:_="" ma:_="" ma:contentTypeName="Document" ma:contentTypeID="0x010100CC02147D869F5D4A8DCDB203BDC4D329" ma:contentTypeVersion="15" ma:contentTypeDescription="Create a new document." ma:contentTypeScope="" ma:versionID="f17a597da68fab695020270d6a7086cb">
   <xsd:schema xmlns:xsd="http://www.w3.org/2001/XMLSchema" xmlns:xs="http://www.w3.org/2001/XMLSchema" xmlns:p="http://schemas.microsoft.com/office/2006/metadata/properties" xmlns:ns2="3e08c221-0eca-4d51-ae15-1dc733eb7f09" xmlns:ns3="59ca73c7-24b6-45ce-ba44-a049ea6a0300" xmlns:ns4="ab06a5aa-8e31-4bdb-9b13-38c58a92ec8a" targetNamespace="http://schemas.microsoft.com/office/2006/metadata/properties" ma:root="true" ma:fieldsID="50ee8e58bc979c30809c6ae6bdc56957" ns2:_="" ns3:_="" ns4:_="">
     <xsd:import namespace="3e08c221-0eca-4d51-ae15-1dc733eb7f09"/>
@@ -19183,25 +19370,18 @@
 </ct:contentTypeSchema>
 </file>
 
-<file path=customXml/itemProps1.xml><?xml version="1.0" encoding="utf-8"?>
-<ds:datastoreItem xmlns:ds="http://schemas.openxmlformats.org/officeDocument/2006/customXml" ds:itemID="{D5E56C4E-BE7C-4EF0-9A58-932F2D9A29D2}">
-  <ds:schemaRefs>
-    <ds:schemaRef ds:uri="http://purl.org/dc/terms/"/>
-    <ds:schemaRef ds:uri="http://purl.org/dc/elements/1.1/"/>
-    <ds:schemaRef ds:uri="http://schemas.microsoft.com/office/2006/documentManagement/types"/>
-    <ds:schemaRef ds:uri="ab06a5aa-8e31-4bdb-9b13-38c58a92ec8a"/>
-    <ds:schemaRef ds:uri="3e08c221-0eca-4d51-ae15-1dc733eb7f09"/>
-    <ds:schemaRef ds:uri="http://schemas.openxmlformats.org/package/2006/metadata/core-properties"/>
-    <ds:schemaRef ds:uri="59ca73c7-24b6-45ce-ba44-a049ea6a0300"/>
-    <ds:schemaRef ds:uri="http://schemas.microsoft.com/office/2006/metadata/properties"/>
-    <ds:schemaRef ds:uri="http://schemas.microsoft.com/office/infopath/2007/PartnerControls"/>
-    <ds:schemaRef ds:uri="http://www.w3.org/XML/1998/namespace"/>
-    <ds:schemaRef ds:uri="http://purl.org/dc/dcmitype/"/>
-  </ds:schemaRefs>
-</ds:datastoreItem>
+<file path=customXml/item3.xml><?xml version="1.0" encoding="utf-8"?>
+<p:properties xmlns:p="http://schemas.microsoft.com/office/2006/metadata/properties" xmlns:xsi="http://www.w3.org/2001/XMLSchema-instance" xmlns:pc="http://schemas.microsoft.com/office/infopath/2007/PartnerControls">
+  <documentManagement>
+    <lcf76f155ced4ddcb4097134ff3c332f xmlns="3e08c221-0eca-4d51-ae15-1dc733eb7f09">
+      <Terms xmlns="http://schemas.microsoft.com/office/infopath/2007/PartnerControls"/>
+    </lcf76f155ced4ddcb4097134ff3c332f>
+    <TaxCatchAll xmlns="ab06a5aa-8e31-4bdb-9b13-38c58a92ec8a" xsi:nil="true"/>
+  </documentManagement>
+</p:properties>
 </file>
 
-<file path=customXml/itemProps2.xml><?xml version="1.0" encoding="utf-8"?>
+<file path=customXml/itemProps1.xml><?xml version="1.0" encoding="utf-8"?>
 <ds:datastoreItem xmlns:ds="http://schemas.openxmlformats.org/officeDocument/2006/customXml" ds:itemID="{A0FAB5FD-9BA7-405C-859C-9F45E41B0168}">
   <ds:schemaRefs>
     <ds:schemaRef ds:uri="http://schemas.microsoft.com/sharepoint/v3/contenttype/forms"/>
@@ -19209,7 +19389,7 @@
 </ds:datastoreItem>
 </file>
 
-<file path=customXml/itemProps3.xml><?xml version="1.0" encoding="utf-8"?>
+<file path=customXml/itemProps2.xml><?xml version="1.0" encoding="utf-8"?>
 <ds:datastoreItem xmlns:ds="http://schemas.openxmlformats.org/officeDocument/2006/customXml" ds:itemID="{8187960B-CFD5-4D75-AB4F-AC2F70658F87}">
   <ds:schemaRefs>
     <ds:schemaRef ds:uri="http://schemas.microsoft.com/office/2006/metadata/contentType"/>
@@ -19229,6 +19409,24 @@
 </ds:datastoreItem>
 </file>
 
+<file path=customXml/itemProps3.xml><?xml version="1.0" encoding="utf-8"?>
+<ds:datastoreItem xmlns:ds="http://schemas.openxmlformats.org/officeDocument/2006/customXml" ds:itemID="{D5E56C4E-BE7C-4EF0-9A58-932F2D9A29D2}">
+  <ds:schemaRefs>
+    <ds:schemaRef ds:uri="http://purl.org/dc/terms/"/>
+    <ds:schemaRef ds:uri="http://purl.org/dc/elements/1.1/"/>
+    <ds:schemaRef ds:uri="http://schemas.microsoft.com/office/2006/documentManagement/types"/>
+    <ds:schemaRef ds:uri="ab06a5aa-8e31-4bdb-9b13-38c58a92ec8a"/>
+    <ds:schemaRef ds:uri="3e08c221-0eca-4d51-ae15-1dc733eb7f09"/>
+    <ds:schemaRef ds:uri="http://schemas.openxmlformats.org/package/2006/metadata/core-properties"/>
+    <ds:schemaRef ds:uri="59ca73c7-24b6-45ce-ba44-a049ea6a0300"/>
+    <ds:schemaRef ds:uri="http://schemas.microsoft.com/office/2006/metadata/properties"/>
+    <ds:schemaRef ds:uri="http://schemas.microsoft.com/office/infopath/2007/PartnerControls"/>
+    <ds:schemaRef ds:uri="http://www.w3.org/XML/1998/namespace"/>
+    <ds:schemaRef ds:uri="http://purl.org/dc/dcmitype/"/>
+  </ds:schemaRefs>
+</ds:datastoreItem>
+</file>
+
 <file path=docMetadata/LabelInfo.xml><?xml version="1.0" encoding="utf-8"?>
 <clbl:labelList xmlns:clbl="http://schemas.microsoft.com/office/2020/mipLabelMetadata">
   <clbl:label id="{f6b6dd5b-f02f-441a-99a0-162ac5060bd2}" enabled="0" method="" siteId="{f6b6dd5b-f02f-441a-99a0-162ac5060bd2}" removed="1"/>
